--- a/tmp-tj/261028_tajplast_audit-reseaux-sociaux_v1.pptx
+++ b/tmp-tj/261028_tajplast_audit-reseaux-sociaux_v1.pptx
@@ -3333,9 +3333,53 @@
           </a:p>
         </p:txBody>
       </p:sp>
+      <p:sp>
+        <p:nvSpPr>
+          <p:cNvPr id="3" name="Rectangle 2"/>
+          <p:cNvSpPr/>
+          <p:nvPr/>
+        </p:nvSpPr>
+        <p:spPr>
+          <a:xfrm>
+            <a:off x="7020000" y="0"/>
+            <a:ext cx="5172119" cy="6858000"/>
+          </a:xfrm>
+          <a:prstGeom prst="rect">
+            <a:avLst/>
+          </a:prstGeom>
+          <a:solidFill>
+            <a:srgbClr val="F4F4F2"/>
+          </a:solidFill>
+          <a:ln>
+            <a:noFill/>
+          </a:ln>
+          <a:effectLst/>
+        </p:spPr>
+        <p:style>
+          <a:lnRef idx="1">
+            <a:schemeClr val="accent1"/>
+          </a:lnRef>
+          <a:fillRef idx="3">
+            <a:schemeClr val="accent1"/>
+          </a:fillRef>
+          <a:effectRef idx="2">
+            <a:schemeClr val="accent1"/>
+          </a:effectRef>
+          <a:fontRef idx="minor">
+            <a:schemeClr val="lt1"/>
+          </a:fontRef>
+        </p:style>
+        <p:txBody>
+          <a:bodyPr rtlCol="0" anchor="ctr"/>
+          <a:lstStyle/>
+          <a:p>
+            <a:pPr algn="ctr"/>
+          </a:p>
+        </p:txBody>
+      </p:sp>
       <p:pic>
         <p:nvPicPr>
-          <p:cNvPr id="3" name="Picture 2" descr="after_table.jpg"/>
+          <p:cNvPr id="4" name="Picture 3" descr="table_ibiza.png"/>
           <p:cNvPicPr>
             <a:picLocks noChangeAspect="1"/>
           </p:cNvPicPr>
@@ -3343,15 +3387,14 @@
         </p:nvPicPr>
         <p:blipFill>
           <a:blip r:embed="rId2"/>
-          <a:srcRect l="2864" r="2864"/>
           <a:stretch>
             <a:fillRect/>
           </a:stretch>
         </p:blipFill>
         <p:spPr>
           <a:xfrm>
-            <a:off x="7020000" y="0"/>
-            <a:ext cx="5172119" cy="6858000"/>
+            <a:off x="7488000" y="1889817"/>
+            <a:ext cx="4236119" cy="3078366"/>
           </a:xfrm>
           <a:prstGeom prst="rect">
             <a:avLst/>
@@ -3360,7 +3403,7 @@
       </p:pic>
       <p:sp>
         <p:nvSpPr>
-          <p:cNvPr id="4" name="Rectangle 3"/>
+          <p:cNvPr id="5" name="Rectangle 4"/>
           <p:cNvSpPr/>
           <p:nvPr/>
         </p:nvSpPr>
@@ -3404,7 +3447,7 @@
       </p:sp>
       <p:pic>
         <p:nvPicPr>
-          <p:cNvPr id="5" name="Picture 4" descr="logo_blanc.png"/>
+          <p:cNvPr id="6" name="Picture 5" descr="logo_blanc.png"/>
           <p:cNvPicPr>
             <a:picLocks noChangeAspect="1"/>
           </p:cNvPicPr>
@@ -3428,7 +3471,7 @@
       </p:pic>
       <p:sp>
         <p:nvSpPr>
-          <p:cNvPr id="6" name="TextBox 5"/>
+          <p:cNvPr id="7" name="TextBox 6"/>
           <p:cNvSpPr txBox="1"/>
           <p:nvPr/>
         </p:nvSpPr>
@@ -3467,7 +3510,7 @@
       </p:sp>
       <p:sp>
         <p:nvSpPr>
-          <p:cNvPr id="7" name="TextBox 6"/>
+          <p:cNvPr id="8" name="TextBox 7"/>
           <p:cNvSpPr txBox="1"/>
           <p:nvPr/>
         </p:nvSpPr>
@@ -3506,7 +3549,7 @@
       </p:sp>
       <p:sp>
         <p:nvSpPr>
-          <p:cNvPr id="8" name="TextBox 7"/>
+          <p:cNvPr id="9" name="TextBox 8"/>
           <p:cNvSpPr txBox="1"/>
           <p:nvPr/>
         </p:nvSpPr>
@@ -3545,7 +3588,7 @@
       </p:sp>
       <p:pic>
         <p:nvPicPr>
-          <p:cNvPr id="9" name="Picture 8" descr="brand-facebook_or.png"/>
+          <p:cNvPr id="10" name="Picture 9" descr="brand-facebook_or.png"/>
           <p:cNvPicPr>
             <a:picLocks noChangeAspect="1"/>
           </p:cNvPicPr>
@@ -3569,7 +3612,7 @@
       </p:pic>
       <p:sp>
         <p:nvSpPr>
-          <p:cNvPr id="10" name="TextBox 9"/>
+          <p:cNvPr id="11" name="TextBox 10"/>
           <p:cNvSpPr txBox="1"/>
           <p:nvPr/>
         </p:nvSpPr>
@@ -3608,7 +3651,7 @@
       </p:sp>
       <p:pic>
         <p:nvPicPr>
-          <p:cNvPr id="11" name="Picture 10" descr="brand-instagram_or.png"/>
+          <p:cNvPr id="12" name="Picture 11" descr="brand-instagram_or.png"/>
           <p:cNvPicPr>
             <a:picLocks noChangeAspect="1"/>
           </p:cNvPicPr>
@@ -3632,7 +3675,7 @@
       </p:pic>
       <p:sp>
         <p:nvSpPr>
-          <p:cNvPr id="12" name="TextBox 11"/>
+          <p:cNvPr id="13" name="TextBox 12"/>
           <p:cNvSpPr txBox="1"/>
           <p:nvPr/>
         </p:nvSpPr>
@@ -3671,7 +3714,7 @@
       </p:sp>
       <p:pic>
         <p:nvPicPr>
-          <p:cNvPr id="13" name="Picture 12" descr="brand-linkedin_or.png"/>
+          <p:cNvPr id="14" name="Picture 13" descr="brand-linkedin_or.png"/>
           <p:cNvPicPr>
             <a:picLocks noChangeAspect="1"/>
           </p:cNvPicPr>
@@ -3695,7 +3738,7 @@
       </p:pic>
       <p:sp>
         <p:nvSpPr>
-          <p:cNvPr id="14" name="TextBox 13"/>
+          <p:cNvPr id="15" name="TextBox 14"/>
           <p:cNvSpPr txBox="1"/>
           <p:nvPr/>
         </p:nvSpPr>
@@ -3734,7 +3777,7 @@
       </p:sp>
       <p:sp>
         <p:nvSpPr>
-          <p:cNvPr id="15" name="TextBox 14"/>
+          <p:cNvPr id="16" name="TextBox 15"/>
           <p:cNvSpPr txBox="1"/>
           <p:nvPr/>
         </p:nvSpPr>
@@ -18798,7 +18841,7 @@
                 </a:solidFill>
                 <a:latin typeface="Arial"/>
               </a:rPr>
-              <a:t>Plastica fait réagir 3 fois plus, avec 30 % d’abonnés en moins</a:t>
+              <a:t>Plastica : 3 fois plus de réactions, moins d’abonnés</a:t>
             </a:r>
           </a:p>
         </p:txBody>
@@ -21213,7 +21256,7 @@
                 </a:solidFill>
                 <a:latin typeface="Arial"/>
               </a:rPr>
-              <a:t>Le catalogue est bien montré, mais rien ne donne envie d’acheter</a:t>
+              <a:t>Un beau catalogue, mais rien qui pousse à acheter</a:t>
             </a:r>
           </a:p>
         </p:txBody>
@@ -24241,7 +24284,7 @@
                 </a:solidFill>
                 <a:latin typeface="Arial"/>
               </a:rPr>
-              <a:t>Les moins bonnes : des visuels repris, sans usage montré</a:t>
+              <a:t>Les moins bonnes : des visuels déjà vus</a:t>
             </a:r>
           </a:p>
         </p:txBody>

--- a/tmp-tj/261028_tajplast_audit-reseaux-sociaux_v1.pptx
+++ b/tmp-tj/261028_tajplast_audit-reseaux-sociaux_v1.pptx
@@ -24,6 +24,10 @@
     <p:sldId id="272" r:id="rId23"/>
     <p:sldId id="273" r:id="rId24"/>
     <p:sldId id="274" r:id="rId25"/>
+    <p:sldId id="275" r:id="rId26"/>
+    <p:sldId id="276" r:id="rId27"/>
+    <p:sldId id="277" r:id="rId28"/>
+    <p:sldId id="278" r:id="rId29"/>
   </p:sldIdLst>
   <p:sldSz cx="12192119" cy="6858000" type="screen4x3"/>
   <p:notesSz cx="6858000" cy="9144000"/>
@@ -4100,7 +4104,7 @@
                 </a:solidFill>
                 <a:latin typeface="Arial"/>
               </a:rPr>
-              <a:t>10 / 19</a:t>
+              <a:t>10 / 23</a:t>
             </a:r>
           </a:p>
         </p:txBody>
@@ -5491,7 +5495,7 @@
                 </a:solidFill>
                 <a:latin typeface="Arial"/>
               </a:rPr>
-              <a:t>11 / 19</a:t>
+              <a:t>11 / 23</a:t>
             </a:r>
           </a:p>
         </p:txBody>
@@ -6477,7 +6481,7 @@
                 </a:solidFill>
                 <a:latin typeface="Arial"/>
               </a:rPr>
-              <a:t>12 / 19</a:t>
+              <a:t>12 / 23</a:t>
             </a:r>
           </a:p>
         </p:txBody>
@@ -7463,7 +7467,7 @@
                 </a:solidFill>
                 <a:latin typeface="Arial"/>
               </a:rPr>
-              <a:t>13 / 19</a:t>
+              <a:t>13 / 23</a:t>
             </a:r>
           </a:p>
         </p:txBody>
@@ -8449,7 +8453,7 @@
                 </a:solidFill>
                 <a:latin typeface="Arial"/>
               </a:rPr>
-              <a:t>14 / 19</a:t>
+              <a:t>14 / 23</a:t>
             </a:r>
           </a:p>
         </p:txBody>
@@ -9435,7 +9439,7 @@
                 </a:solidFill>
                 <a:latin typeface="Arial"/>
               </a:rPr>
-              <a:t>15 / 19</a:t>
+              <a:t>15 / 23</a:t>
             </a:r>
           </a:p>
         </p:txBody>
@@ -10421,7 +10425,7 @@
                 </a:solidFill>
                 <a:latin typeface="Arial"/>
               </a:rPr>
-              <a:t>16 / 19</a:t>
+              <a:t>16 / 23</a:t>
             </a:r>
           </a:p>
         </p:txBody>
@@ -11285,7 +11289,7 @@
                 </a:solidFill>
                 <a:latin typeface="Arial"/>
               </a:rPr>
-              <a:t>RECOMMANDATIONS</a:t>
+              <a:t>AVANT / APRÈS · VERSION 2</a:t>
             </a:r>
           </a:p>
         </p:txBody>
@@ -11324,7 +11328,7 @@
                 </a:solidFill>
                 <a:latin typeface="Arial"/>
               </a:rPr>
-              <a:t>5 décisions pour faire réagir, puis faire commander</a:t>
+              <a:t>Version 2 : on arrête de montrer, on raconte</a:t>
             </a:r>
           </a:p>
         </p:txBody>
@@ -11407,7 +11411,7 @@
                 </a:solidFill>
                 <a:latin typeface="Arial"/>
               </a:rPr>
-              <a:t>17 / 19</a:t>
+              <a:t>17 / 23</a:t>
             </a:r>
           </a:p>
         </p:txBody>
@@ -11459,8 +11463,8 @@
         </p:nvSpPr>
         <p:spPr>
           <a:xfrm>
-            <a:off x="576000" y="1584000"/>
-            <a:ext cx="11052000" cy="846000"/>
+            <a:off x="576000" y="1655999"/>
+            <a:ext cx="2628000" cy="2592000"/>
           </a:xfrm>
           <a:prstGeom prst="roundRect">
             <a:avLst>
@@ -11468,7 +11472,7 @@
             </a:avLst>
           </a:prstGeom>
           <a:solidFill>
-            <a:srgbClr val="FFFFFF"/>
+            <a:srgbClr val="F4F4F2"/>
           </a:solidFill>
           <a:ln>
             <a:noFill/>
@@ -11499,16 +11503,16 @@
       </p:sp>
       <p:sp>
         <p:nvSpPr>
-          <p:cNvPr id="11" name="Rectangle 10"/>
+          <p:cNvPr id="11" name="Oval 10"/>
           <p:cNvSpPr/>
           <p:nvPr/>
         </p:nvSpPr>
         <p:spPr>
           <a:xfrm>
-            <a:off x="576000" y="1584000"/>
-            <a:ext cx="90000" cy="846000"/>
-          </a:xfrm>
-          <a:prstGeom prst="rect">
+            <a:off x="827999" y="1908000"/>
+            <a:ext cx="684000" cy="684000"/>
+          </a:xfrm>
+          <a:prstGeom prst="ellipse">
             <a:avLst/>
           </a:prstGeom>
           <a:solidFill>
@@ -11541,16 +11545,40 @@
           </a:p>
         </p:txBody>
       </p:sp>
-      <p:sp>
-        <p:nvSpPr>
-          <p:cNvPr id="12" name="TextBox 11"/>
+      <p:pic>
+        <p:nvPicPr>
+          <p:cNvPr id="12" name="Picture 11" descr="clock-hour-7_bl.png"/>
+          <p:cNvPicPr>
+            <a:picLocks noChangeAspect="1"/>
+          </p:cNvPicPr>
+          <p:nvPr/>
+        </p:nvPicPr>
+        <p:blipFill>
+          <a:blip r:embed="rId3"/>
+          <a:stretch>
+            <a:fillRect/>
+          </a:stretch>
+        </p:blipFill>
+        <p:spPr>
+          <a:xfrm>
+            <a:off x="978479" y="2058480"/>
+            <a:ext cx="383040" cy="383040"/>
+          </a:xfrm>
+          <a:prstGeom prst="rect">
+            <a:avLst/>
+          </a:prstGeom>
+        </p:spPr>
+      </p:pic>
+      <p:sp>
+        <p:nvSpPr>
+          <p:cNvPr id="13" name="TextBox 12"/>
           <p:cNvSpPr txBox="1"/>
           <p:nvPr/>
         </p:nvSpPr>
         <p:spPr>
           <a:xfrm>
-            <a:off x="792000" y="1584000"/>
-            <a:ext cx="503999" cy="846000"/>
+            <a:off x="827999" y="2736000"/>
+            <a:ext cx="2160000" cy="360000"/>
           </a:xfrm>
           <a:prstGeom prst="rect">
             <a:avLst/>
@@ -11558,38 +11586,123 @@
           <a:noFill/>
         </p:spPr>
         <p:txBody>
-          <a:bodyPr wrap="square" lIns="36000" rIns="36000" tIns="18000" bIns="18000" anchor="ctr">
+          <a:bodyPr wrap="square" lIns="36000" rIns="36000" tIns="18000" bIns="18000" anchor="t">
             <a:spAutoFit/>
           </a:bodyPr>
           <a:lstStyle/>
           <a:p>
-            <a:pPr algn="ctr">
-              <a:lnSpc>
-                <a:spcPct val="110000"/>
-              </a:lnSpc>
-            </a:pPr>
-            <a:r>
-              <a:rPr sz="2400" b="1">
-                <a:solidFill>
-                  <a:srgbClr val="E84E0E"/>
-                </a:solidFill>
-                <a:latin typeface="Arial"/>
-              </a:rPr>
-              <a:t>1</a:t>
-            </a:r>
-          </a:p>
-        </p:txBody>
-      </p:sp>
-      <p:sp>
-        <p:nvSpPr>
-          <p:cNvPr id="13" name="Oval 12"/>
+            <a:pPr algn="l">
+              <a:lnSpc>
+                <a:spcPct val="110000"/>
+              </a:lnSpc>
+            </a:pPr>
+            <a:r>
+              <a:rPr sz="1600" b="1">
+                <a:solidFill>
+                  <a:srgbClr val="111111"/>
+                </a:solidFill>
+                <a:latin typeface="Arial"/>
+              </a:rPr>
+              <a:t>Une scène</a:t>
+            </a:r>
+          </a:p>
+        </p:txBody>
+      </p:sp>
+      <p:sp>
+        <p:nvSpPr>
+          <p:cNvPr id="14" name="TextBox 13"/>
+          <p:cNvSpPr txBox="1"/>
+          <p:nvPr/>
+        </p:nvSpPr>
+        <p:spPr>
+          <a:xfrm>
+            <a:off x="827999" y="3131999"/>
+            <a:ext cx="2196000" cy="1080000"/>
+          </a:xfrm>
+          <a:prstGeom prst="rect">
+            <a:avLst/>
+          </a:prstGeom>
+          <a:noFill/>
+        </p:spPr>
+        <p:txBody>
+          <a:bodyPr wrap="square" lIns="36000" rIns="36000" tIns="18000" bIns="18000" anchor="t">
+            <a:spAutoFit/>
+          </a:bodyPr>
+          <a:lstStyle/>
+          <a:p>
+            <a:pPr algn="l">
+              <a:lnSpc>
+                <a:spcPct val="110000"/>
+              </a:lnSpc>
+            </a:pPr>
+            <a:r>
+              <a:rPr sz="1200" b="0">
+                <a:solidFill>
+                  <a:srgbClr val="5A5A5A"/>
+                </a:solidFill>
+                <a:latin typeface="Arial"/>
+              </a:rPr>
+              <a:t>Une situation vécue : la coupure d’eau, le matin d’école, le dimanche.</a:t>
+            </a:r>
+          </a:p>
+        </p:txBody>
+      </p:sp>
+      <p:sp>
+        <p:nvSpPr>
+          <p:cNvPr id="15" name="Rounded Rectangle 14"/>
           <p:cNvSpPr/>
           <p:nvPr/>
         </p:nvSpPr>
         <p:spPr>
           <a:xfrm>
-            <a:off x="1404000" y="1709999"/>
-            <a:ext cx="594000" cy="594000"/>
+            <a:off x="3384000" y="1655999"/>
+            <a:ext cx="2628000" cy="2592000"/>
+          </a:xfrm>
+          <a:prstGeom prst="roundRect">
+            <a:avLst>
+              <a:gd name="adj" fmla="val 6000"/>
+            </a:avLst>
+          </a:prstGeom>
+          <a:solidFill>
+            <a:srgbClr val="F4F4F2"/>
+          </a:solidFill>
+          <a:ln>
+            <a:noFill/>
+          </a:ln>
+          <a:effectLst/>
+        </p:spPr>
+        <p:style>
+          <a:lnRef idx="1">
+            <a:schemeClr val="accent1"/>
+          </a:lnRef>
+          <a:fillRef idx="3">
+            <a:schemeClr val="accent1"/>
+          </a:fillRef>
+          <a:effectRef idx="2">
+            <a:schemeClr val="accent1"/>
+          </a:effectRef>
+          <a:fontRef idx="minor">
+            <a:schemeClr val="lt1"/>
+          </a:fontRef>
+        </p:style>
+        <p:txBody>
+          <a:bodyPr rtlCol="0" anchor="ctr"/>
+          <a:lstStyle/>
+          <a:p>
+            <a:pPr algn="ctr"/>
+          </a:p>
+        </p:txBody>
+      </p:sp>
+      <p:sp>
+        <p:nvSpPr>
+          <p:cNvPr id="16" name="Oval 15"/>
+          <p:cNvSpPr/>
+          <p:nvPr/>
+        </p:nvSpPr>
+        <p:spPr>
+          <a:xfrm>
+            <a:off x="3635999" y="1908000"/>
+            <a:ext cx="684000" cy="684000"/>
           </a:xfrm>
           <a:prstGeom prst="ellipse">
             <a:avLst/>
@@ -11626,22 +11739,22 @@
       </p:sp>
       <p:pic>
         <p:nvPicPr>
-          <p:cNvPr id="14" name="Picture 13" descr="repeat_bl.png"/>
+          <p:cNvPr id="17" name="Picture 16" descr="sparkles_bl.png"/>
           <p:cNvPicPr>
             <a:picLocks noChangeAspect="1"/>
           </p:cNvPicPr>
           <p:nvPr/>
         </p:nvPicPr>
         <p:blipFill>
-          <a:blip r:embed="rId3"/>
+          <a:blip r:embed="rId4"/>
           <a:stretch>
             <a:fillRect/>
           </a:stretch>
         </p:blipFill>
         <p:spPr>
           <a:xfrm>
-            <a:off x="1534680" y="1840679"/>
-            <a:ext cx="332640" cy="332640"/>
+            <a:off x="3786479" y="2058480"/>
+            <a:ext cx="383040" cy="383040"/>
           </a:xfrm>
           <a:prstGeom prst="rect">
             <a:avLst/>
@@ -11650,14 +11763,14 @@
       </p:pic>
       <p:sp>
         <p:nvSpPr>
-          <p:cNvPr id="15" name="TextBox 14"/>
+          <p:cNvPr id="18" name="TextBox 17"/>
           <p:cNvSpPr txBox="1"/>
           <p:nvPr/>
         </p:nvSpPr>
         <p:spPr>
           <a:xfrm>
-            <a:off x="2196000" y="1584000"/>
-            <a:ext cx="3060000" cy="846000"/>
+            <a:off x="3635999" y="2736000"/>
+            <a:ext cx="2160000" cy="360000"/>
           </a:xfrm>
           <a:prstGeom prst="rect">
             <a:avLst/>
@@ -11665,7 +11778,7 @@
           <a:noFill/>
         </p:spPr>
         <p:txBody>
-          <a:bodyPr wrap="square" lIns="36000" rIns="36000" tIns="18000" bIns="18000" anchor="ctr">
+          <a:bodyPr wrap="square" lIns="36000" rIns="36000" tIns="18000" bIns="18000" anchor="t">
             <a:spAutoFit/>
           </a:bodyPr>
           <a:lstStyle/>
@@ -11676,27 +11789,27 @@
               </a:lnSpc>
             </a:pPr>
             <a:r>
-              <a:rPr sz="1500" b="1">
+              <a:rPr sz="1600" b="1">
                 <a:solidFill>
                   <a:srgbClr val="111111"/>
                 </a:solidFill>
                 <a:latin typeface="Arial"/>
               </a:rPr>
-              <a:t>Publier moins, mieux</a:t>
-            </a:r>
-          </a:p>
-        </p:txBody>
-      </p:sp>
-      <p:sp>
-        <p:nvSpPr>
-          <p:cNvPr id="16" name="TextBox 15"/>
+              <a:t>Un parti pris</a:t>
+            </a:r>
+          </a:p>
+        </p:txBody>
+      </p:sp>
+      <p:sp>
+        <p:nvSpPr>
+          <p:cNvPr id="19" name="TextBox 18"/>
           <p:cNvSpPr txBox="1"/>
           <p:nvPr/>
         </p:nvSpPr>
         <p:spPr>
           <a:xfrm>
-            <a:off x="5256000" y="1584000"/>
-            <a:ext cx="6228000" cy="846000"/>
+            <a:off x="3635999" y="3131999"/>
+            <a:ext cx="2196000" cy="1080000"/>
           </a:xfrm>
           <a:prstGeom prst="rect">
             <a:avLst/>
@@ -11704,7 +11817,7 @@
           <a:noFill/>
         </p:spPr>
         <p:txBody>
-          <a:bodyPr wrap="square" lIns="36000" rIns="36000" tIns="18000" bIns="18000" anchor="ctr">
+          <a:bodyPr wrap="square" lIns="36000" rIns="36000" tIns="18000" bIns="18000" anchor="t">
             <a:spAutoFit/>
           </a:bodyPr>
           <a:lstStyle/>
@@ -11715,27 +11828,27 @@
               </a:lnSpc>
             </a:pPr>
             <a:r>
-              <a:rPr sz="1250" b="0">
+              <a:rPr sz="1200" b="0">
                 <a:solidFill>
                   <a:srgbClr val="5A5A5A"/>
                 </a:solidFill>
                 <a:latin typeface="Arial"/>
               </a:rPr>
-              <a:t>Une publication par jour au lieu de trois, jamais deux fois le même visuel dans le mois.</a:t>
-            </a:r>
-          </a:p>
-        </p:txBody>
-      </p:sp>
-      <p:sp>
-        <p:nvSpPr>
-          <p:cNvPr id="17" name="Rounded Rectangle 16"/>
+              <a:t>Un fond de couleur franche, un produit en grand, une phrase qui accroche.</a:t>
+            </a:r>
+          </a:p>
+        </p:txBody>
+      </p:sp>
+      <p:sp>
+        <p:nvSpPr>
+          <p:cNvPr id="20" name="Rounded Rectangle 19"/>
           <p:cNvSpPr/>
           <p:nvPr/>
         </p:nvSpPr>
         <p:spPr>
           <a:xfrm>
-            <a:off x="576000" y="2538000"/>
-            <a:ext cx="11052000" cy="846000"/>
+            <a:off x="6192000" y="1655999"/>
+            <a:ext cx="2628000" cy="2592000"/>
           </a:xfrm>
           <a:prstGeom prst="roundRect">
             <a:avLst>
@@ -11774,16 +11887,16 @@
       </p:sp>
       <p:sp>
         <p:nvSpPr>
-          <p:cNvPr id="18" name="Rectangle 17"/>
+          <p:cNvPr id="21" name="Oval 20"/>
           <p:cNvSpPr/>
           <p:nvPr/>
         </p:nvSpPr>
         <p:spPr>
           <a:xfrm>
-            <a:off x="576000" y="2538000"/>
-            <a:ext cx="90000" cy="846000"/>
-          </a:xfrm>
-          <a:prstGeom prst="rect">
+            <a:off x="6443999" y="1908000"/>
+            <a:ext cx="684000" cy="684000"/>
+          </a:xfrm>
+          <a:prstGeom prst="ellipse">
             <a:avLst/>
           </a:prstGeom>
           <a:solidFill>
@@ -11816,16 +11929,40 @@
           </a:p>
         </p:txBody>
       </p:sp>
-      <p:sp>
-        <p:nvSpPr>
-          <p:cNvPr id="19" name="TextBox 18"/>
+      <p:pic>
+        <p:nvPicPr>
+          <p:cNvPr id="22" name="Picture 21" descr="message-circle_bl.png"/>
+          <p:cNvPicPr>
+            <a:picLocks noChangeAspect="1"/>
+          </p:cNvPicPr>
+          <p:nvPr/>
+        </p:nvPicPr>
+        <p:blipFill>
+          <a:blip r:embed="rId5"/>
+          <a:stretch>
+            <a:fillRect/>
+          </a:stretch>
+        </p:blipFill>
+        <p:spPr>
+          <a:xfrm>
+            <a:off x="6594479" y="2058480"/>
+            <a:ext cx="383040" cy="383040"/>
+          </a:xfrm>
+          <a:prstGeom prst="rect">
+            <a:avLst/>
+          </a:prstGeom>
+        </p:spPr>
+      </p:pic>
+      <p:sp>
+        <p:nvSpPr>
+          <p:cNvPr id="23" name="TextBox 22"/>
           <p:cNvSpPr txBox="1"/>
           <p:nvPr/>
         </p:nvSpPr>
         <p:spPr>
           <a:xfrm>
-            <a:off x="792000" y="2538000"/>
-            <a:ext cx="503999" cy="846000"/>
+            <a:off x="6443999" y="2736000"/>
+            <a:ext cx="2160000" cy="360000"/>
           </a:xfrm>
           <a:prstGeom prst="rect">
             <a:avLst/>
@@ -11833,38 +11970,123 @@
           <a:noFill/>
         </p:spPr>
         <p:txBody>
-          <a:bodyPr wrap="square" lIns="36000" rIns="36000" tIns="18000" bIns="18000" anchor="ctr">
+          <a:bodyPr wrap="square" lIns="36000" rIns="36000" tIns="18000" bIns="18000" anchor="t">
             <a:spAutoFit/>
           </a:bodyPr>
           <a:lstStyle/>
           <a:p>
-            <a:pPr algn="ctr">
-              <a:lnSpc>
-                <a:spcPct val="110000"/>
-              </a:lnSpc>
-            </a:pPr>
-            <a:r>
-              <a:rPr sz="2400" b="1">
-                <a:solidFill>
-                  <a:srgbClr val="E84E0E"/>
-                </a:solidFill>
-                <a:latin typeface="Arial"/>
-              </a:rPr>
-              <a:t>2</a:t>
-            </a:r>
-          </a:p>
-        </p:txBody>
-      </p:sp>
-      <p:sp>
-        <p:nvSpPr>
-          <p:cNvPr id="20" name="Oval 19"/>
+            <a:pPr algn="l">
+              <a:lnSpc>
+                <a:spcPct val="110000"/>
+              </a:lnSpc>
+            </a:pPr>
+            <a:r>
+              <a:rPr sz="1600" b="1">
+                <a:solidFill>
+                  <a:srgbClr val="111111"/>
+                </a:solidFill>
+                <a:latin typeface="Arial"/>
+              </a:rPr>
+              <a:t>Un jeu</a:t>
+            </a:r>
+          </a:p>
+        </p:txBody>
+      </p:sp>
+      <p:sp>
+        <p:nvSpPr>
+          <p:cNvPr id="24" name="TextBox 23"/>
+          <p:cNvSpPr txBox="1"/>
+          <p:nvPr/>
+        </p:nvSpPr>
+        <p:spPr>
+          <a:xfrm>
+            <a:off x="6443999" y="3131999"/>
+            <a:ext cx="2196000" cy="1080000"/>
+          </a:xfrm>
+          <a:prstGeom prst="rect">
+            <a:avLst/>
+          </a:prstGeom>
+          <a:noFill/>
+        </p:spPr>
+        <p:txBody>
+          <a:bodyPr wrap="square" lIns="36000" rIns="36000" tIns="18000" bIns="18000" anchor="t">
+            <a:spAutoFit/>
+          </a:bodyPr>
+          <a:lstStyle/>
+          <a:p>
+            <a:pPr algn="l">
+              <a:lnSpc>
+                <a:spcPct val="110000"/>
+              </a:lnSpc>
+            </a:pPr>
+            <a:r>
+              <a:rPr sz="1200" b="0">
+                <a:solidFill>
+                  <a:srgbClr val="5A5A5A"/>
+                </a:solidFill>
+                <a:latin typeface="Arial"/>
+              </a:rPr>
+              <a:t>Sondage de couleurs, question aux éleveurs : on fait répondre.</a:t>
+            </a:r>
+          </a:p>
+        </p:txBody>
+      </p:sp>
+      <p:sp>
+        <p:nvSpPr>
+          <p:cNvPr id="25" name="Rounded Rectangle 24"/>
           <p:cNvSpPr/>
           <p:nvPr/>
         </p:nvSpPr>
         <p:spPr>
           <a:xfrm>
-            <a:off x="1404000" y="2663999"/>
-            <a:ext cx="594000" cy="594000"/>
+            <a:off x="9000000" y="1655999"/>
+            <a:ext cx="2628000" cy="2592000"/>
+          </a:xfrm>
+          <a:prstGeom prst="roundRect">
+            <a:avLst>
+              <a:gd name="adj" fmla="val 6000"/>
+            </a:avLst>
+          </a:prstGeom>
+          <a:solidFill>
+            <a:srgbClr val="F4F4F2"/>
+          </a:solidFill>
+          <a:ln>
+            <a:noFill/>
+          </a:ln>
+          <a:effectLst/>
+        </p:spPr>
+        <p:style>
+          <a:lnRef idx="1">
+            <a:schemeClr val="accent1"/>
+          </a:lnRef>
+          <a:fillRef idx="3">
+            <a:schemeClr val="accent1"/>
+          </a:fillRef>
+          <a:effectRef idx="2">
+            <a:schemeClr val="accent1"/>
+          </a:effectRef>
+          <a:fontRef idx="minor">
+            <a:schemeClr val="lt1"/>
+          </a:fontRef>
+        </p:style>
+        <p:txBody>
+          <a:bodyPr rtlCol="0" anchor="ctr"/>
+          <a:lstStyle/>
+          <a:p>
+            <a:pPr algn="ctr"/>
+          </a:p>
+        </p:txBody>
+      </p:sp>
+      <p:sp>
+        <p:nvSpPr>
+          <p:cNvPr id="26" name="Oval 25"/>
+          <p:cNvSpPr/>
+          <p:nvPr/>
+        </p:nvSpPr>
+        <p:spPr>
+          <a:xfrm>
+            <a:off x="9251999" y="1908000"/>
+            <a:ext cx="684000" cy="684000"/>
           </a:xfrm>
           <a:prstGeom prst="ellipse">
             <a:avLst/>
@@ -11901,557 +12123,7 @@
       </p:sp>
       <p:pic>
         <p:nvPicPr>
-          <p:cNvPr id="21" name="Picture 20" descr="pencil_bl.png"/>
-          <p:cNvPicPr>
-            <a:picLocks noChangeAspect="1"/>
-          </p:cNvPicPr>
-          <p:nvPr/>
-        </p:nvPicPr>
-        <p:blipFill>
-          <a:blip r:embed="rId4"/>
-          <a:stretch>
-            <a:fillRect/>
-          </a:stretch>
-        </p:blipFill>
-        <p:spPr>
-          <a:xfrm>
-            <a:off x="1534680" y="2794679"/>
-            <a:ext cx="332640" cy="332640"/>
-          </a:xfrm>
-          <a:prstGeom prst="rect">
-            <a:avLst/>
-          </a:prstGeom>
-        </p:spPr>
-      </p:pic>
-      <p:sp>
-        <p:nvSpPr>
-          <p:cNvPr id="22" name="TextBox 21"/>
-          <p:cNvSpPr txBox="1"/>
-          <p:nvPr/>
-        </p:nvSpPr>
-        <p:spPr>
-          <a:xfrm>
-            <a:off x="2196000" y="2538000"/>
-            <a:ext cx="3060000" cy="846000"/>
-          </a:xfrm>
-          <a:prstGeom prst="rect">
-            <a:avLst/>
-          </a:prstGeom>
-          <a:noFill/>
-        </p:spPr>
-        <p:txBody>
-          <a:bodyPr wrap="square" lIns="36000" rIns="36000" tIns="18000" bIns="18000" anchor="ctr">
-            <a:spAutoFit/>
-          </a:bodyPr>
-          <a:lstStyle/>
-          <a:p>
-            <a:pPr algn="l">
-              <a:lnSpc>
-                <a:spcPct val="110000"/>
-              </a:lnSpc>
-            </a:pPr>
-            <a:r>
-              <a:rPr sz="1500" b="1">
-                <a:solidFill>
-                  <a:srgbClr val="111111"/>
-                </a:solidFill>
-                <a:latin typeface="Arial"/>
-              </a:rPr>
-              <a:t>Écrire un vrai texte</a:t>
-            </a:r>
-          </a:p>
-        </p:txBody>
-      </p:sp>
-      <p:sp>
-        <p:nvSpPr>
-          <p:cNvPr id="23" name="TextBox 22"/>
-          <p:cNvSpPr txBox="1"/>
-          <p:nvPr/>
-        </p:nvSpPr>
-        <p:spPr>
-          <a:xfrm>
-            <a:off x="5256000" y="2538000"/>
-            <a:ext cx="6228000" cy="846000"/>
-          </a:xfrm>
-          <a:prstGeom prst="rect">
-            <a:avLst/>
-          </a:prstGeom>
-          <a:noFill/>
-        </p:spPr>
-        <p:txBody>
-          <a:bodyPr wrap="square" lIns="36000" rIns="36000" tIns="18000" bIns="18000" anchor="ctr">
-            <a:spAutoFit/>
-          </a:bodyPr>
-          <a:lstStyle/>
-          <a:p>
-            <a:pPr algn="l">
-              <a:lnSpc>
-                <a:spcPct val="110000"/>
-              </a:lnSpc>
-            </a:pPr>
-            <a:r>
-              <a:rPr sz="1250" b="0">
-                <a:solidFill>
-                  <a:srgbClr val="5A5A5A"/>
-                </a:solidFill>
-                <a:latin typeface="Arial"/>
-              </a:rPr>
-              <a:t>Bénéfice, question, numéro : la règle des avant / après, sur chaque publication.</a:t>
-            </a:r>
-          </a:p>
-        </p:txBody>
-      </p:sp>
-      <p:sp>
-        <p:nvSpPr>
-          <p:cNvPr id="24" name="Rounded Rectangle 23"/>
-          <p:cNvSpPr/>
-          <p:nvPr/>
-        </p:nvSpPr>
-        <p:spPr>
-          <a:xfrm>
-            <a:off x="576000" y="3492000"/>
-            <a:ext cx="11052000" cy="846000"/>
-          </a:xfrm>
-          <a:prstGeom prst="roundRect">
-            <a:avLst>
-              <a:gd name="adj" fmla="val 6000"/>
-            </a:avLst>
-          </a:prstGeom>
-          <a:solidFill>
-            <a:srgbClr val="FFFFFF"/>
-          </a:solidFill>
-          <a:ln>
-            <a:noFill/>
-          </a:ln>
-          <a:effectLst/>
-        </p:spPr>
-        <p:style>
-          <a:lnRef idx="1">
-            <a:schemeClr val="accent1"/>
-          </a:lnRef>
-          <a:fillRef idx="3">
-            <a:schemeClr val="accent1"/>
-          </a:fillRef>
-          <a:effectRef idx="2">
-            <a:schemeClr val="accent1"/>
-          </a:effectRef>
-          <a:fontRef idx="minor">
-            <a:schemeClr val="lt1"/>
-          </a:fontRef>
-        </p:style>
-        <p:txBody>
-          <a:bodyPr rtlCol="0" anchor="ctr"/>
-          <a:lstStyle/>
-          <a:p>
-            <a:pPr algn="ctr"/>
-          </a:p>
-        </p:txBody>
-      </p:sp>
-      <p:sp>
-        <p:nvSpPr>
-          <p:cNvPr id="25" name="Rectangle 24"/>
-          <p:cNvSpPr/>
-          <p:nvPr/>
-        </p:nvSpPr>
-        <p:spPr>
-          <a:xfrm>
-            <a:off x="576000" y="3492000"/>
-            <a:ext cx="90000" cy="846000"/>
-          </a:xfrm>
-          <a:prstGeom prst="rect">
-            <a:avLst/>
-          </a:prstGeom>
-          <a:solidFill>
-            <a:srgbClr val="E84E0E"/>
-          </a:solidFill>
-          <a:ln>
-            <a:noFill/>
-          </a:ln>
-          <a:effectLst/>
-        </p:spPr>
-        <p:style>
-          <a:lnRef idx="1">
-            <a:schemeClr val="accent1"/>
-          </a:lnRef>
-          <a:fillRef idx="3">
-            <a:schemeClr val="accent1"/>
-          </a:fillRef>
-          <a:effectRef idx="2">
-            <a:schemeClr val="accent1"/>
-          </a:effectRef>
-          <a:fontRef idx="minor">
-            <a:schemeClr val="lt1"/>
-          </a:fontRef>
-        </p:style>
-        <p:txBody>
-          <a:bodyPr rtlCol="0" anchor="ctr"/>
-          <a:lstStyle/>
-          <a:p>
-            <a:pPr algn="ctr"/>
-          </a:p>
-        </p:txBody>
-      </p:sp>
-      <p:sp>
-        <p:nvSpPr>
-          <p:cNvPr id="26" name="TextBox 25"/>
-          <p:cNvSpPr txBox="1"/>
-          <p:nvPr/>
-        </p:nvSpPr>
-        <p:spPr>
-          <a:xfrm>
-            <a:off x="792000" y="3492000"/>
-            <a:ext cx="503999" cy="846000"/>
-          </a:xfrm>
-          <a:prstGeom prst="rect">
-            <a:avLst/>
-          </a:prstGeom>
-          <a:noFill/>
-        </p:spPr>
-        <p:txBody>
-          <a:bodyPr wrap="square" lIns="36000" rIns="36000" tIns="18000" bIns="18000" anchor="ctr">
-            <a:spAutoFit/>
-          </a:bodyPr>
-          <a:lstStyle/>
-          <a:p>
-            <a:pPr algn="ctr">
-              <a:lnSpc>
-                <a:spcPct val="110000"/>
-              </a:lnSpc>
-            </a:pPr>
-            <a:r>
-              <a:rPr sz="2400" b="1">
-                <a:solidFill>
-                  <a:srgbClr val="E84E0E"/>
-                </a:solidFill>
-                <a:latin typeface="Arial"/>
-              </a:rPr>
-              <a:t>3</a:t>
-            </a:r>
-          </a:p>
-        </p:txBody>
-      </p:sp>
-      <p:sp>
-        <p:nvSpPr>
-          <p:cNvPr id="27" name="Oval 26"/>
-          <p:cNvSpPr/>
-          <p:nvPr/>
-        </p:nvSpPr>
-        <p:spPr>
-          <a:xfrm>
-            <a:off x="1404000" y="3617999"/>
-            <a:ext cx="594000" cy="594000"/>
-          </a:xfrm>
-          <a:prstGeom prst="ellipse">
-            <a:avLst/>
-          </a:prstGeom>
-          <a:solidFill>
-            <a:srgbClr val="159641"/>
-          </a:solidFill>
-          <a:ln>
-            <a:noFill/>
-          </a:ln>
-          <a:effectLst/>
-        </p:spPr>
-        <p:style>
-          <a:lnRef idx="1">
-            <a:schemeClr val="accent1"/>
-          </a:lnRef>
-          <a:fillRef idx="3">
-            <a:schemeClr val="accent1"/>
-          </a:fillRef>
-          <a:effectRef idx="2">
-            <a:schemeClr val="accent1"/>
-          </a:effectRef>
-          <a:fontRef idx="minor">
-            <a:schemeClr val="lt1"/>
-          </a:fontRef>
-        </p:style>
-        <p:txBody>
-          <a:bodyPr rtlCol="0" anchor="ctr"/>
-          <a:lstStyle/>
-          <a:p>
-            <a:pPr algn="ctr"/>
-          </a:p>
-        </p:txBody>
-      </p:sp>
-      <p:pic>
-        <p:nvPicPr>
-          <p:cNvPr id="28" name="Picture 27" descr="video_bl.png"/>
-          <p:cNvPicPr>
-            <a:picLocks noChangeAspect="1"/>
-          </p:cNvPicPr>
-          <p:nvPr/>
-        </p:nvPicPr>
-        <p:blipFill>
-          <a:blip r:embed="rId5"/>
-          <a:stretch>
-            <a:fillRect/>
-          </a:stretch>
-        </p:blipFill>
-        <p:spPr>
-          <a:xfrm>
-            <a:off x="1534680" y="3748679"/>
-            <a:ext cx="332640" cy="332640"/>
-          </a:xfrm>
-          <a:prstGeom prst="rect">
-            <a:avLst/>
-          </a:prstGeom>
-        </p:spPr>
-      </p:pic>
-      <p:sp>
-        <p:nvSpPr>
-          <p:cNvPr id="29" name="TextBox 28"/>
-          <p:cNvSpPr txBox="1"/>
-          <p:nvPr/>
-        </p:nvSpPr>
-        <p:spPr>
-          <a:xfrm>
-            <a:off x="2196000" y="3492000"/>
-            <a:ext cx="3060000" cy="846000"/>
-          </a:xfrm>
-          <a:prstGeom prst="rect">
-            <a:avLst/>
-          </a:prstGeom>
-          <a:noFill/>
-        </p:spPr>
-        <p:txBody>
-          <a:bodyPr wrap="square" lIns="36000" rIns="36000" tIns="18000" bIns="18000" anchor="ctr">
-            <a:spAutoFit/>
-          </a:bodyPr>
-          <a:lstStyle/>
-          <a:p>
-            <a:pPr algn="l">
-              <a:lnSpc>
-                <a:spcPct val="110000"/>
-              </a:lnSpc>
-            </a:pPr>
-            <a:r>
-              <a:rPr sz="1500" b="1">
-                <a:solidFill>
-                  <a:srgbClr val="111111"/>
-                </a:solidFill>
-                <a:latin typeface="Arial"/>
-              </a:rPr>
-              <a:t>Passer à la vidéo</a:t>
-            </a:r>
-          </a:p>
-        </p:txBody>
-      </p:sp>
-      <p:sp>
-        <p:nvSpPr>
-          <p:cNvPr id="30" name="TextBox 29"/>
-          <p:cNvSpPr txBox="1"/>
-          <p:nvPr/>
-        </p:nvSpPr>
-        <p:spPr>
-          <a:xfrm>
-            <a:off x="5256000" y="3492000"/>
-            <a:ext cx="6228000" cy="846000"/>
-          </a:xfrm>
-          <a:prstGeom prst="rect">
-            <a:avLst/>
-          </a:prstGeom>
-          <a:noFill/>
-        </p:spPr>
-        <p:txBody>
-          <a:bodyPr wrap="square" lIns="36000" rIns="36000" tIns="18000" bIns="18000" anchor="ctr">
-            <a:spAutoFit/>
-          </a:bodyPr>
-          <a:lstStyle/>
-          <a:p>
-            <a:pPr algn="l">
-              <a:lnSpc>
-                <a:spcPct val="110000"/>
-              </a:lnSpc>
-            </a:pPr>
-            <a:r>
-              <a:rPr sz="1250" b="0">
-                <a:solidFill>
-                  <a:srgbClr val="5A5A5A"/>
-                </a:solidFill>
-                <a:latin typeface="Arial"/>
-              </a:rPr>
-              <a:t>Deux vidéos courtes par semaine : l’usine, un produit en usage, une livraison.</a:t>
-            </a:r>
-          </a:p>
-        </p:txBody>
-      </p:sp>
-      <p:sp>
-        <p:nvSpPr>
-          <p:cNvPr id="31" name="Rounded Rectangle 30"/>
-          <p:cNvSpPr/>
-          <p:nvPr/>
-        </p:nvSpPr>
-        <p:spPr>
-          <a:xfrm>
-            <a:off x="576000" y="4446000"/>
-            <a:ext cx="11052000" cy="846000"/>
-          </a:xfrm>
-          <a:prstGeom prst="roundRect">
-            <a:avLst>
-              <a:gd name="adj" fmla="val 6000"/>
-            </a:avLst>
-          </a:prstGeom>
-          <a:solidFill>
-            <a:srgbClr val="F4F4F2"/>
-          </a:solidFill>
-          <a:ln>
-            <a:noFill/>
-          </a:ln>
-          <a:effectLst/>
-        </p:spPr>
-        <p:style>
-          <a:lnRef idx="1">
-            <a:schemeClr val="accent1"/>
-          </a:lnRef>
-          <a:fillRef idx="3">
-            <a:schemeClr val="accent1"/>
-          </a:fillRef>
-          <a:effectRef idx="2">
-            <a:schemeClr val="accent1"/>
-          </a:effectRef>
-          <a:fontRef idx="minor">
-            <a:schemeClr val="lt1"/>
-          </a:fontRef>
-        </p:style>
-        <p:txBody>
-          <a:bodyPr rtlCol="0" anchor="ctr"/>
-          <a:lstStyle/>
-          <a:p>
-            <a:pPr algn="ctr"/>
-          </a:p>
-        </p:txBody>
-      </p:sp>
-      <p:sp>
-        <p:nvSpPr>
-          <p:cNvPr id="32" name="Rectangle 31"/>
-          <p:cNvSpPr/>
-          <p:nvPr/>
-        </p:nvSpPr>
-        <p:spPr>
-          <a:xfrm>
-            <a:off x="576000" y="4446000"/>
-            <a:ext cx="90000" cy="846000"/>
-          </a:xfrm>
-          <a:prstGeom prst="rect">
-            <a:avLst/>
-          </a:prstGeom>
-          <a:solidFill>
-            <a:srgbClr val="E84E0E"/>
-          </a:solidFill>
-          <a:ln>
-            <a:noFill/>
-          </a:ln>
-          <a:effectLst/>
-        </p:spPr>
-        <p:style>
-          <a:lnRef idx="1">
-            <a:schemeClr val="accent1"/>
-          </a:lnRef>
-          <a:fillRef idx="3">
-            <a:schemeClr val="accent1"/>
-          </a:fillRef>
-          <a:effectRef idx="2">
-            <a:schemeClr val="accent1"/>
-          </a:effectRef>
-          <a:fontRef idx="minor">
-            <a:schemeClr val="lt1"/>
-          </a:fontRef>
-        </p:style>
-        <p:txBody>
-          <a:bodyPr rtlCol="0" anchor="ctr"/>
-          <a:lstStyle/>
-          <a:p>
-            <a:pPr algn="ctr"/>
-          </a:p>
-        </p:txBody>
-      </p:sp>
-      <p:sp>
-        <p:nvSpPr>
-          <p:cNvPr id="33" name="TextBox 32"/>
-          <p:cNvSpPr txBox="1"/>
-          <p:nvPr/>
-        </p:nvSpPr>
-        <p:spPr>
-          <a:xfrm>
-            <a:off x="792000" y="4446000"/>
-            <a:ext cx="503999" cy="846000"/>
-          </a:xfrm>
-          <a:prstGeom prst="rect">
-            <a:avLst/>
-          </a:prstGeom>
-          <a:noFill/>
-        </p:spPr>
-        <p:txBody>
-          <a:bodyPr wrap="square" lIns="36000" rIns="36000" tIns="18000" bIns="18000" anchor="ctr">
-            <a:spAutoFit/>
-          </a:bodyPr>
-          <a:lstStyle/>
-          <a:p>
-            <a:pPr algn="ctr">
-              <a:lnSpc>
-                <a:spcPct val="110000"/>
-              </a:lnSpc>
-            </a:pPr>
-            <a:r>
-              <a:rPr sz="2400" b="1">
-                <a:solidFill>
-                  <a:srgbClr val="E84E0E"/>
-                </a:solidFill>
-                <a:latin typeface="Arial"/>
-              </a:rPr>
-              <a:t>4</a:t>
-            </a:r>
-          </a:p>
-        </p:txBody>
-      </p:sp>
-      <p:sp>
-        <p:nvSpPr>
-          <p:cNvPr id="34" name="Oval 33"/>
-          <p:cNvSpPr/>
-          <p:nvPr/>
-        </p:nvSpPr>
-        <p:spPr>
-          <a:xfrm>
-            <a:off x="1404000" y="4571999"/>
-            <a:ext cx="594000" cy="594000"/>
-          </a:xfrm>
-          <a:prstGeom prst="ellipse">
-            <a:avLst/>
-          </a:prstGeom>
-          <a:solidFill>
-            <a:srgbClr val="159641"/>
-          </a:solidFill>
-          <a:ln>
-            <a:noFill/>
-          </a:ln>
-          <a:effectLst/>
-        </p:spPr>
-        <p:style>
-          <a:lnRef idx="1">
-            <a:schemeClr val="accent1"/>
-          </a:lnRef>
-          <a:fillRef idx="3">
-            <a:schemeClr val="accent1"/>
-          </a:fillRef>
-          <a:effectRef idx="2">
-            <a:schemeClr val="accent1"/>
-          </a:effectRef>
-          <a:fontRef idx="minor">
-            <a:schemeClr val="lt1"/>
-          </a:fontRef>
-        </p:style>
-        <p:txBody>
-          <a:bodyPr rtlCol="0" anchor="ctr"/>
-          <a:lstStyle/>
-          <a:p>
-            <a:pPr algn="ctr"/>
-          </a:p>
-        </p:txBody>
-      </p:sp>
-      <p:pic>
-        <p:nvPicPr>
-          <p:cNvPr id="35" name="Picture 34" descr="currency-dollar_bl.png"/>
+          <p:cNvPr id="27" name="Picture 26" descr="brand-whatsapp_bl.png"/>
           <p:cNvPicPr>
             <a:picLocks noChangeAspect="1"/>
           </p:cNvPicPr>
@@ -12465,8 +12137,8 @@
         </p:blipFill>
         <p:spPr>
           <a:xfrm>
-            <a:off x="1534680" y="4702679"/>
-            <a:ext cx="332640" cy="332640"/>
+            <a:off x="9402479" y="2058480"/>
+            <a:ext cx="383040" cy="383040"/>
           </a:xfrm>
           <a:prstGeom prst="rect">
             <a:avLst/>
@@ -12475,14 +12147,14 @@
       </p:pic>
       <p:sp>
         <p:nvSpPr>
-          <p:cNvPr id="36" name="TextBox 35"/>
+          <p:cNvPr id="28" name="TextBox 27"/>
           <p:cNvSpPr txBox="1"/>
           <p:nvPr/>
         </p:nvSpPr>
         <p:spPr>
           <a:xfrm>
-            <a:off x="2196000" y="4446000"/>
-            <a:ext cx="3060000" cy="846000"/>
+            <a:off x="9251999" y="2736000"/>
+            <a:ext cx="2160000" cy="360000"/>
           </a:xfrm>
           <a:prstGeom prst="rect">
             <a:avLst/>
@@ -12490,7 +12162,7 @@
           <a:noFill/>
         </p:spPr>
         <p:txBody>
-          <a:bodyPr wrap="square" lIns="36000" rIns="36000" tIns="18000" bIns="18000" anchor="ctr">
+          <a:bodyPr wrap="square" lIns="36000" rIns="36000" tIns="18000" bIns="18000" anchor="t">
             <a:spAutoFit/>
           </a:bodyPr>
           <a:lstStyle/>
@@ -12501,27 +12173,27 @@
               </a:lnSpc>
             </a:pPr>
             <a:r>
-              <a:rPr sz="1500" b="1">
+              <a:rPr sz="1600" b="1">
                 <a:solidFill>
                   <a:srgbClr val="111111"/>
                 </a:solidFill>
                 <a:latin typeface="Arial"/>
               </a:rPr>
-              <a:t>Afficher les prix</a:t>
-            </a:r>
-          </a:p>
-        </p:txBody>
-      </p:sp>
-      <p:sp>
-        <p:nvSpPr>
-          <p:cNvPr id="37" name="TextBox 36"/>
+              <a:t>Un seul geste</a:t>
+            </a:r>
+          </a:p>
+        </p:txBody>
+      </p:sp>
+      <p:sp>
+        <p:nvSpPr>
+          <p:cNvPr id="29" name="TextBox 28"/>
           <p:cNvSpPr txBox="1"/>
           <p:nvPr/>
         </p:nvSpPr>
         <p:spPr>
           <a:xfrm>
-            <a:off x="5256000" y="4446000"/>
-            <a:ext cx="6228000" cy="846000"/>
+            <a:off x="9251999" y="3131999"/>
+            <a:ext cx="2196000" cy="1080000"/>
           </a:xfrm>
           <a:prstGeom prst="rect">
             <a:avLst/>
@@ -12529,7 +12201,7 @@
           <a:noFill/>
         </p:spPr>
         <p:txBody>
-          <a:bodyPr wrap="square" lIns="36000" rIns="36000" tIns="18000" bIns="18000" anchor="ctr">
+          <a:bodyPr wrap="square" lIns="36000" rIns="36000" tIns="18000" bIns="18000" anchor="t">
             <a:spAutoFit/>
           </a:bodyPr>
           <a:lstStyle/>
@@ -12540,193 +12212,20 @@
               </a:lnSpc>
             </a:pPr>
             <a:r>
-              <a:rPr sz="1250" b="0">
+              <a:rPr sz="1200" b="0">
                 <a:solidFill>
                   <a:srgbClr val="5A5A5A"/>
                 </a:solidFill>
                 <a:latin typeface="Arial"/>
               </a:rPr>
-              <a:t>Une offre datée par mois, comme Metaplast, avec un prix et une date de fin.</a:t>
-            </a:r>
-          </a:p>
-        </p:txBody>
-      </p:sp>
-      <p:sp>
-        <p:nvSpPr>
-          <p:cNvPr id="38" name="Rounded Rectangle 37"/>
-          <p:cNvSpPr/>
-          <p:nvPr/>
-        </p:nvSpPr>
-        <p:spPr>
-          <a:xfrm>
-            <a:off x="576000" y="5400000"/>
-            <a:ext cx="11052000" cy="846000"/>
-          </a:xfrm>
-          <a:prstGeom prst="roundRect">
-            <a:avLst>
-              <a:gd name="adj" fmla="val 6000"/>
-            </a:avLst>
-          </a:prstGeom>
-          <a:solidFill>
-            <a:srgbClr val="FFFFFF"/>
-          </a:solidFill>
-          <a:ln>
-            <a:noFill/>
-          </a:ln>
-          <a:effectLst/>
-        </p:spPr>
-        <p:style>
-          <a:lnRef idx="1">
-            <a:schemeClr val="accent1"/>
-          </a:lnRef>
-          <a:fillRef idx="3">
-            <a:schemeClr val="accent1"/>
-          </a:fillRef>
-          <a:effectRef idx="2">
-            <a:schemeClr val="accent1"/>
-          </a:effectRef>
-          <a:fontRef idx="minor">
-            <a:schemeClr val="lt1"/>
-          </a:fontRef>
-        </p:style>
-        <p:txBody>
-          <a:bodyPr rtlCol="0" anchor="ctr"/>
-          <a:lstStyle/>
-          <a:p>
-            <a:pPr algn="ctr"/>
-          </a:p>
-        </p:txBody>
-      </p:sp>
-      <p:sp>
-        <p:nvSpPr>
-          <p:cNvPr id="39" name="Rectangle 38"/>
-          <p:cNvSpPr/>
-          <p:nvPr/>
-        </p:nvSpPr>
-        <p:spPr>
-          <a:xfrm>
-            <a:off x="576000" y="5400000"/>
-            <a:ext cx="90000" cy="846000"/>
-          </a:xfrm>
-          <a:prstGeom prst="rect">
-            <a:avLst/>
-          </a:prstGeom>
-          <a:solidFill>
-            <a:srgbClr val="E84E0E"/>
-          </a:solidFill>
-          <a:ln>
-            <a:noFill/>
-          </a:ln>
-          <a:effectLst/>
-        </p:spPr>
-        <p:style>
-          <a:lnRef idx="1">
-            <a:schemeClr val="accent1"/>
-          </a:lnRef>
-          <a:fillRef idx="3">
-            <a:schemeClr val="accent1"/>
-          </a:fillRef>
-          <a:effectRef idx="2">
-            <a:schemeClr val="accent1"/>
-          </a:effectRef>
-          <a:fontRef idx="minor">
-            <a:schemeClr val="lt1"/>
-          </a:fontRef>
-        </p:style>
-        <p:txBody>
-          <a:bodyPr rtlCol="0" anchor="ctr"/>
-          <a:lstStyle/>
-          <a:p>
-            <a:pPr algn="ctr"/>
-          </a:p>
-        </p:txBody>
-      </p:sp>
-      <p:sp>
-        <p:nvSpPr>
-          <p:cNvPr id="40" name="TextBox 39"/>
-          <p:cNvSpPr txBox="1"/>
-          <p:nvPr/>
-        </p:nvSpPr>
-        <p:spPr>
-          <a:xfrm>
-            <a:off x="792000" y="5400000"/>
-            <a:ext cx="503999" cy="846000"/>
-          </a:xfrm>
-          <a:prstGeom prst="rect">
-            <a:avLst/>
-          </a:prstGeom>
-          <a:noFill/>
-        </p:spPr>
-        <p:txBody>
-          <a:bodyPr wrap="square" lIns="36000" rIns="36000" tIns="18000" bIns="18000" anchor="ctr">
-            <a:spAutoFit/>
-          </a:bodyPr>
-          <a:lstStyle/>
-          <a:p>
-            <a:pPr algn="ctr">
-              <a:lnSpc>
-                <a:spcPct val="110000"/>
-              </a:lnSpc>
-            </a:pPr>
-            <a:r>
-              <a:rPr sz="2400" b="1">
-                <a:solidFill>
-                  <a:srgbClr val="E84E0E"/>
-                </a:solidFill>
-                <a:latin typeface="Arial"/>
-              </a:rPr>
-              <a:t>5</a:t>
-            </a:r>
-          </a:p>
-        </p:txBody>
-      </p:sp>
-      <p:sp>
-        <p:nvSpPr>
-          <p:cNvPr id="41" name="Oval 40"/>
-          <p:cNvSpPr/>
-          <p:nvPr/>
-        </p:nvSpPr>
-        <p:spPr>
-          <a:xfrm>
-            <a:off x="1404000" y="5525999"/>
-            <a:ext cx="594000" cy="594000"/>
-          </a:xfrm>
-          <a:prstGeom prst="ellipse">
-            <a:avLst/>
-          </a:prstGeom>
-          <a:solidFill>
-            <a:srgbClr val="159641"/>
-          </a:solidFill>
-          <a:ln>
-            <a:noFill/>
-          </a:ln>
-          <a:effectLst/>
-        </p:spPr>
-        <p:style>
-          <a:lnRef idx="1">
-            <a:schemeClr val="accent1"/>
-          </a:lnRef>
-          <a:fillRef idx="3">
-            <a:schemeClr val="accent1"/>
-          </a:fillRef>
-          <a:effectRef idx="2">
-            <a:schemeClr val="accent1"/>
-          </a:effectRef>
-          <a:fontRef idx="minor">
-            <a:schemeClr val="lt1"/>
-          </a:fontRef>
-        </p:style>
-        <p:txBody>
-          <a:bodyPr rtlCol="0" anchor="ctr"/>
-          <a:lstStyle/>
-          <a:p>
-            <a:pPr algn="ctr"/>
+              <a:t>Commander sur WhatsApp, avec le numéro en très gros.</a:t>
+            </a:r>
           </a:p>
         </p:txBody>
       </p:sp>
       <p:pic>
         <p:nvPicPr>
-          <p:cNvPr id="42" name="Picture 41" descr="brand-linkedin_bl.png"/>
+          <p:cNvPr id="30" name="Picture 29" descr="v2_cuves.jpg"/>
           <p:cNvPicPr>
             <a:picLocks noChangeAspect="1"/>
           </p:cNvPicPr>
@@ -12740,92 +12239,134 @@
         </p:blipFill>
         <p:spPr>
           <a:xfrm>
-            <a:off x="1534680" y="5656679"/>
-            <a:ext cx="332640" cy="332640"/>
+            <a:off x="651600" y="4428000"/>
+            <a:ext cx="1612799" cy="2015999"/>
           </a:xfrm>
           <a:prstGeom prst="rect">
             <a:avLst/>
           </a:prstGeom>
         </p:spPr>
       </p:pic>
-      <p:sp>
-        <p:nvSpPr>
-          <p:cNvPr id="43" name="TextBox 42"/>
-          <p:cNvSpPr txBox="1"/>
-          <p:nvPr/>
-        </p:nvSpPr>
-        <p:spPr>
-          <a:xfrm>
-            <a:off x="2196000" y="5400000"/>
-            <a:ext cx="3060000" cy="846000"/>
-          </a:xfrm>
-          <a:prstGeom prst="rect">
-            <a:avLst/>
-          </a:prstGeom>
-          <a:noFill/>
-        </p:spPr>
-        <p:txBody>
-          <a:bodyPr wrap="square" lIns="36000" rIns="36000" tIns="18000" bIns="18000" anchor="ctr">
-            <a:spAutoFit/>
-          </a:bodyPr>
-          <a:lstStyle/>
-          <a:p>
-            <a:pPr algn="l">
-              <a:lnSpc>
-                <a:spcPct val="110000"/>
-              </a:lnSpc>
-            </a:pPr>
-            <a:r>
-              <a:rPr sz="1500" b="1">
-                <a:solidFill>
-                  <a:srgbClr val="111111"/>
-                </a:solidFill>
-                <a:latin typeface="Arial"/>
-              </a:rPr>
-              <a:t>Réveiller LinkedIn</a:t>
-            </a:r>
-          </a:p>
-        </p:txBody>
-      </p:sp>
-      <p:sp>
-        <p:nvSpPr>
-          <p:cNvPr id="44" name="TextBox 43"/>
-          <p:cNvSpPr txBox="1"/>
-          <p:nvPr/>
-        </p:nvSpPr>
-        <p:spPr>
-          <a:xfrm>
-            <a:off x="5256000" y="5400000"/>
-            <a:ext cx="6228000" cy="846000"/>
-          </a:xfrm>
-          <a:prstGeom prst="rect">
-            <a:avLst/>
-          </a:prstGeom>
-          <a:noFill/>
-        </p:spPr>
-        <p:txBody>
-          <a:bodyPr wrap="square" lIns="36000" rIns="36000" tIns="18000" bIns="18000" anchor="ctr">
-            <a:spAutoFit/>
-          </a:bodyPr>
-          <a:lstStyle/>
-          <a:p>
-            <a:pPr algn="l">
-              <a:lnSpc>
-                <a:spcPct val="110000"/>
-              </a:lnSpc>
-            </a:pPr>
-            <a:r>
-              <a:rPr sz="1250" b="0">
-                <a:solidFill>
-                  <a:srgbClr val="5A5A5A"/>
-                </a:solidFill>
-                <a:latin typeface="Arial"/>
-              </a:rPr>
-              <a:t>Une publication par semaine pour les acheteurs professionnels et les revendeurs, sans faute de nom.</a:t>
-            </a:r>
-          </a:p>
-        </p:txBody>
-      </p:sp>
+      <p:pic>
+        <p:nvPicPr>
+          <p:cNvPr id="31" name="Picture 30" descr="v2_panier.jpg"/>
+          <p:cNvPicPr>
+            <a:picLocks noChangeAspect="1"/>
+          </p:cNvPicPr>
+          <p:nvPr/>
+        </p:nvPicPr>
+        <p:blipFill>
+          <a:blip r:embed="rId8"/>
+          <a:stretch>
+            <a:fillRect/>
+          </a:stretch>
+        </p:blipFill>
+        <p:spPr>
+          <a:xfrm>
+            <a:off x="2523600" y="4428000"/>
+            <a:ext cx="1612799" cy="2015999"/>
+          </a:xfrm>
+          <a:prstGeom prst="rect">
+            <a:avLst/>
+          </a:prstGeom>
+        </p:spPr>
+      </p:pic>
+      <p:pic>
+        <p:nvPicPr>
+          <p:cNvPr id="32" name="Picture 31" descr="v2_abreuvoir.jpg"/>
+          <p:cNvPicPr>
+            <a:picLocks noChangeAspect="1"/>
+          </p:cNvPicPr>
+          <p:nvPr/>
+        </p:nvPicPr>
+        <p:blipFill>
+          <a:blip r:embed="rId9"/>
+          <a:stretch>
+            <a:fillRect/>
+          </a:stretch>
+        </p:blipFill>
+        <p:spPr>
+          <a:xfrm>
+            <a:off x="4395600" y="4428000"/>
+            <a:ext cx="1612799" cy="2015999"/>
+          </a:xfrm>
+          <a:prstGeom prst="rect">
+            <a:avLst/>
+          </a:prstGeom>
+        </p:spPr>
+      </p:pic>
+      <p:pic>
+        <p:nvPicPr>
+          <p:cNvPr id="33" name="Picture 32" descr="v2_ibiza.jpg"/>
+          <p:cNvPicPr>
+            <a:picLocks noChangeAspect="1"/>
+          </p:cNvPicPr>
+          <p:nvPr/>
+        </p:nvPicPr>
+        <p:blipFill>
+          <a:blip r:embed="rId10"/>
+          <a:stretch>
+            <a:fillRect/>
+          </a:stretch>
+        </p:blipFill>
+        <p:spPr>
+          <a:xfrm>
+            <a:off x="6267600" y="4428000"/>
+            <a:ext cx="1612799" cy="2015999"/>
+          </a:xfrm>
+          <a:prstGeom prst="rect">
+            <a:avLst/>
+          </a:prstGeom>
+        </p:spPr>
+      </p:pic>
+      <p:pic>
+        <p:nvPicPr>
+          <p:cNvPr id="34" name="Picture 33" descr="v2_tiroirs.jpg"/>
+          <p:cNvPicPr>
+            <a:picLocks noChangeAspect="1"/>
+          </p:cNvPicPr>
+          <p:nvPr/>
+        </p:nvPicPr>
+        <p:blipFill>
+          <a:blip r:embed="rId11"/>
+          <a:stretch>
+            <a:fillRect/>
+          </a:stretch>
+        </p:blipFill>
+        <p:spPr>
+          <a:xfrm>
+            <a:off x="8139600" y="4428000"/>
+            <a:ext cx="1612799" cy="2015999"/>
+          </a:xfrm>
+          <a:prstGeom prst="rect">
+            <a:avLst/>
+          </a:prstGeom>
+        </p:spPr>
+      </p:pic>
+      <p:pic>
+        <p:nvPicPr>
+          <p:cNvPr id="35" name="Picture 34" descr="v2_choco.jpg"/>
+          <p:cNvPicPr>
+            <a:picLocks noChangeAspect="1"/>
+          </p:cNvPicPr>
+          <p:nvPr/>
+        </p:nvPicPr>
+        <p:blipFill>
+          <a:blip r:embed="rId12"/>
+          <a:stretch>
+            <a:fillRect/>
+          </a:stretch>
+        </p:blipFill>
+        <p:spPr>
+          <a:xfrm>
+            <a:off x="10011600" y="4428000"/>
+            <a:ext cx="1612799" cy="2015999"/>
+          </a:xfrm>
+          <a:prstGeom prst="rect">
+            <a:avLst/>
+          </a:prstGeom>
+        </p:spPr>
+      </p:pic>
     </p:spTree>
   </p:cSld>
   <p:clrMapOvr>
@@ -12990,7 +12531,7 @@
                 </a:solidFill>
                 <a:latin typeface="Arial"/>
               </a:rPr>
-              <a:t>PLAN 30 JOURS</a:t>
+              <a:t>VERSION 2 · 1 SUR 3</a:t>
             </a:r>
           </a:p>
         </p:txBody>
@@ -13029,7 +12570,7 @@
                 </a:solidFill>
                 <a:latin typeface="Arial"/>
               </a:rPr>
-              <a:t>Le premier mois, semaine par semaine</a:t>
+              <a:t>Le besoin, puis le produit</a:t>
             </a:r>
           </a:p>
         </p:txBody>
@@ -13112,7 +12653,7 @@
                 </a:solidFill>
                 <a:latin typeface="Arial"/>
               </a:rPr>
-              <a:t>18 / 19</a:t>
+              <a:t>18 / 23</a:t>
             </a:r>
           </a:p>
         </p:txBody>
@@ -13164,14 +12705,16 @@
         </p:nvSpPr>
         <p:spPr>
           <a:xfrm>
-            <a:off x="576000" y="1584000"/>
-            <a:ext cx="2628000" cy="576000"/>
+            <a:off x="576000" y="1548000"/>
+            <a:ext cx="5364000" cy="4824000"/>
           </a:xfrm>
           <a:prstGeom prst="roundRect">
-            <a:avLst/>
+            <a:avLst>
+              <a:gd name="adj" fmla="val 6000"/>
+            </a:avLst>
           </a:prstGeom>
           <a:solidFill>
-            <a:srgbClr val="E84E0E"/>
+            <a:srgbClr val="F4F4F2"/>
           </a:solidFill>
           <a:ln>
             <a:noFill/>
@@ -13202,7 +12745,7 @@
       </p:sp>
       <p:pic>
         <p:nvPicPr>
-          <p:cNvPr id="11" name="Picture 10" descr="calendar-event_bl.png"/>
+          <p:cNvPr id="11" name="Picture 10" descr="v2_cuves.jpg"/>
           <p:cNvPicPr>
             <a:picLocks noChangeAspect="1"/>
           </p:cNvPicPr>
@@ -13216,8 +12759,8 @@
         </p:blipFill>
         <p:spPr>
           <a:xfrm>
-            <a:off x="720000" y="1710000"/>
-            <a:ext cx="324000" cy="324000"/>
+            <a:off x="756000" y="1755000"/>
+            <a:ext cx="3528000" cy="4410000"/>
           </a:xfrm>
           <a:prstGeom prst="rect">
             <a:avLst/>
@@ -13232,8 +12775,8 @@
         </p:nvSpPr>
         <p:spPr>
           <a:xfrm>
-            <a:off x="1116000" y="1584000"/>
-            <a:ext cx="2015999" cy="576000"/>
+            <a:off x="4392000" y="1800000"/>
+            <a:ext cx="1440000" cy="576000"/>
           </a:xfrm>
           <a:prstGeom prst="rect">
             <a:avLst/>
@@ -13241,7 +12784,7 @@
           <a:noFill/>
         </p:spPr>
         <p:txBody>
-          <a:bodyPr wrap="square" lIns="36000" rIns="36000" tIns="18000" bIns="18000" anchor="ctr">
+          <a:bodyPr wrap="square" lIns="36000" rIns="36000" tIns="18000" bIns="18000" anchor="t">
             <a:spAutoFit/>
           </a:bodyPr>
           <a:lstStyle/>
@@ -13254,25 +12797,64 @@
             <a:r>
               <a:rPr sz="1500" b="1">
                 <a:solidFill>
-                  <a:srgbClr val="FFFFFF"/>
-                </a:solidFill>
-                <a:latin typeface="Arial"/>
-              </a:rPr>
-              <a:t>Semaine 1</a:t>
-            </a:r>
-          </a:p>
-        </p:txBody>
-      </p:sp>
-      <p:sp>
-        <p:nvSpPr>
-          <p:cNvPr id="13" name="Rounded Rectangle 12"/>
+                  <a:srgbClr val="E84E0E"/>
+                </a:solidFill>
+                <a:latin typeface="Arial"/>
+              </a:rPr>
+              <a:t>Cuves</a:t>
+            </a:r>
+          </a:p>
+        </p:txBody>
+      </p:sp>
+      <p:sp>
+        <p:nvSpPr>
+          <p:cNvPr id="13" name="TextBox 12"/>
+          <p:cNvSpPr txBox="1"/>
+          <p:nvPr/>
+        </p:nvSpPr>
+        <p:spPr>
+          <a:xfrm>
+            <a:off x="4392000" y="2520000"/>
+            <a:ext cx="1440000" cy="3420000"/>
+          </a:xfrm>
+          <a:prstGeom prst="rect">
+            <a:avLst/>
+          </a:prstGeom>
+          <a:noFill/>
+        </p:spPr>
+        <p:txBody>
+          <a:bodyPr wrap="square" lIns="36000" rIns="36000" tIns="18000" bIns="18000" anchor="t">
+            <a:spAutoFit/>
+          </a:bodyPr>
+          <a:lstStyle/>
+          <a:p>
+            <a:pPr algn="l">
+              <a:lnSpc>
+                <a:spcPct val="110000"/>
+              </a:lnSpc>
+            </a:pPr>
+            <a:r>
+              <a:rPr sz="1200" b="0">
+                <a:solidFill>
+                  <a:srgbClr val="111111"/>
+                </a:solidFill>
+                <a:latin typeface="Arial"/>
+              </a:rPr>
+              <a:t>Le besoin d’abord : la coupure d’eau, avec les vraies contenances.</a:t>
+            </a:r>
+          </a:p>
+        </p:txBody>
+      </p:sp>
+      <p:sp>
+        <p:nvSpPr>
+          <p:cNvPr id="14" name="Rounded Rectangle 13"/>
           <p:cNvSpPr/>
           <p:nvPr/>
         </p:nvSpPr>
         <p:spPr>
           <a:xfrm>
-            <a:off x="576000" y="2304000"/>
-            <a:ext cx="2628000" cy="2880000"/>
+            <a:off x="6192000" y="1548000"/>
+            <a:ext cx="5364000" cy="4824000"/>
           </a:xfrm>
           <a:prstGeom prst="roundRect">
             <a:avLst>
@@ -13309,160 +12891,9 @@
           </a:p>
         </p:txBody>
       </p:sp>
-      <p:sp>
-        <p:nvSpPr>
-          <p:cNvPr id="14" name="TextBox 13"/>
-          <p:cNvSpPr txBox="1"/>
-          <p:nvPr/>
-        </p:nvSpPr>
-        <p:spPr>
-          <a:xfrm>
-            <a:off x="720000" y="2448000"/>
-            <a:ext cx="2376000" cy="2664000"/>
-          </a:xfrm>
-          <a:prstGeom prst="rect">
-            <a:avLst/>
-          </a:prstGeom>
-          <a:noFill/>
-        </p:spPr>
-        <p:txBody>
-          <a:bodyPr wrap="square">
-            <a:spAutoFit/>
-          </a:bodyPr>
-          <a:lstStyle/>
-          <a:p>
-            <a:pPr>
-              <a:lnSpc>
-                <a:spcPct val="110000"/>
-              </a:lnSpc>
-              <a:spcAft>
-                <a:spcPts val="700"/>
-              </a:spcAft>
-            </a:pPr>
-            <a:r>
-              <a:rPr sz="850">
-                <a:solidFill>
-                  <a:srgbClr val="E84E0E"/>
-                </a:solidFill>
-                <a:latin typeface="Arial"/>
-              </a:rPr>
-              <a:t>■  </a:t>
-            </a:r>
-            <a:r>
-              <a:rPr sz="1250">
-                <a:solidFill>
-                  <a:srgbClr val="111111"/>
-                </a:solidFill>
-                <a:latin typeface="Arial"/>
-              </a:rPr>
-              <a:t>Corriger « TAPLAST » sur LinkedIn</a:t>
-            </a:r>
-          </a:p>
-          <a:p>
-            <a:pPr>
-              <a:lnSpc>
-                <a:spcPct val="110000"/>
-              </a:lnSpc>
-              <a:spcAft>
-                <a:spcPts val="700"/>
-              </a:spcAft>
-            </a:pPr>
-            <a:r>
-              <a:rPr sz="850">
-                <a:solidFill>
-                  <a:srgbClr val="E84E0E"/>
-                </a:solidFill>
-                <a:latin typeface="Arial"/>
-              </a:rPr>
-              <a:t>■  </a:t>
-            </a:r>
-            <a:r>
-              <a:rPr sz="1250">
-                <a:solidFill>
-                  <a:srgbClr val="111111"/>
-                </a:solidFill>
-                <a:latin typeface="Arial"/>
-              </a:rPr>
-              <a:t>Retirer les publications en double</a:t>
-            </a:r>
-          </a:p>
-          <a:p>
-            <a:pPr>
-              <a:lnSpc>
-                <a:spcPct val="110000"/>
-              </a:lnSpc>
-              <a:spcAft>
-                <a:spcPts val="700"/>
-              </a:spcAft>
-            </a:pPr>
-            <a:r>
-              <a:rPr sz="850">
-                <a:solidFill>
-                  <a:srgbClr val="E84E0E"/>
-                </a:solidFill>
-                <a:latin typeface="Arial"/>
-              </a:rPr>
-              <a:t>■  </a:t>
-            </a:r>
-            <a:r>
-              <a:rPr sz="1250">
-                <a:solidFill>
-                  <a:srgbClr val="111111"/>
-                </a:solidFill>
-                <a:latin typeface="Arial"/>
-              </a:rPr>
-              <a:t>Valider les 6 publications refaites</a:t>
-            </a:r>
-          </a:p>
-        </p:txBody>
-      </p:sp>
-      <p:sp>
-        <p:nvSpPr>
-          <p:cNvPr id="15" name="Rounded Rectangle 14"/>
-          <p:cNvSpPr/>
-          <p:nvPr/>
-        </p:nvSpPr>
-        <p:spPr>
-          <a:xfrm>
-            <a:off x="3384000" y="1584000"/>
-            <a:ext cx="2628000" cy="576000"/>
-          </a:xfrm>
-          <a:prstGeom prst="roundRect">
-            <a:avLst/>
-          </a:prstGeom>
-          <a:solidFill>
-            <a:srgbClr val="159641"/>
-          </a:solidFill>
-          <a:ln>
-            <a:noFill/>
-          </a:ln>
-          <a:effectLst/>
-        </p:spPr>
-        <p:style>
-          <a:lnRef idx="1">
-            <a:schemeClr val="accent1"/>
-          </a:lnRef>
-          <a:fillRef idx="3">
-            <a:schemeClr val="accent1"/>
-          </a:fillRef>
-          <a:effectRef idx="2">
-            <a:schemeClr val="accent1"/>
-          </a:effectRef>
-          <a:fontRef idx="minor">
-            <a:schemeClr val="lt1"/>
-          </a:fontRef>
-        </p:style>
-        <p:txBody>
-          <a:bodyPr rtlCol="0" anchor="ctr"/>
-          <a:lstStyle/>
-          <a:p>
-            <a:pPr algn="ctr"/>
-          </a:p>
-        </p:txBody>
-      </p:sp>
       <p:pic>
         <p:nvPicPr>
-          <p:cNvPr id="16" name="Picture 15" descr="pencil_bl.png"/>
+          <p:cNvPr id="15" name="Picture 14" descr="v2_panier.jpg"/>
           <p:cNvPicPr>
             <a:picLocks noChangeAspect="1"/>
           </p:cNvPicPr>
@@ -13476,14 +12907,53 @@
         </p:blipFill>
         <p:spPr>
           <a:xfrm>
-            <a:off x="3528000" y="1710000"/>
-            <a:ext cx="324000" cy="324000"/>
+            <a:off x="6372000" y="1755000"/>
+            <a:ext cx="3528000" cy="4410000"/>
           </a:xfrm>
           <a:prstGeom prst="rect">
             <a:avLst/>
           </a:prstGeom>
         </p:spPr>
       </p:pic>
+      <p:sp>
+        <p:nvSpPr>
+          <p:cNvPr id="16" name="TextBox 15"/>
+          <p:cNvSpPr txBox="1"/>
+          <p:nvPr/>
+        </p:nvSpPr>
+        <p:spPr>
+          <a:xfrm>
+            <a:off x="10008000" y="1800000"/>
+            <a:ext cx="1440000" cy="576000"/>
+          </a:xfrm>
+          <a:prstGeom prst="rect">
+            <a:avLst/>
+          </a:prstGeom>
+          <a:noFill/>
+        </p:spPr>
+        <p:txBody>
+          <a:bodyPr wrap="square" lIns="36000" rIns="36000" tIns="18000" bIns="18000" anchor="t">
+            <a:spAutoFit/>
+          </a:bodyPr>
+          <a:lstStyle/>
+          <a:p>
+            <a:pPr algn="l">
+              <a:lnSpc>
+                <a:spcPct val="110000"/>
+              </a:lnSpc>
+            </a:pPr>
+            <a:r>
+              <a:rPr sz="1500" b="1">
+                <a:solidFill>
+                  <a:srgbClr val="E84E0E"/>
+                </a:solidFill>
+                <a:latin typeface="Arial"/>
+              </a:rPr>
+              <a:t>Panier Flora</a:t>
+            </a:r>
+          </a:p>
+        </p:txBody>
+      </p:sp>
       <p:sp>
         <p:nvSpPr>
           <p:cNvPr id="17" name="TextBox 16"/>
@@ -13492,8 +12962,8 @@
         </p:nvSpPr>
         <p:spPr>
           <a:xfrm>
-            <a:off x="3924000" y="1584000"/>
-            <a:ext cx="2015999" cy="576000"/>
+            <a:off x="10008000" y="2520000"/>
+            <a:ext cx="1440000" cy="3420000"/>
           </a:xfrm>
           <a:prstGeom prst="rect">
             <a:avLst/>
@@ -13501,7 +12971,7 @@
           <a:noFill/>
         </p:spPr>
         <p:txBody>
-          <a:bodyPr wrap="square" lIns="36000" rIns="36000" tIns="18000" bIns="18000" anchor="ctr">
+          <a:bodyPr wrap="square" lIns="36000" rIns="36000" tIns="18000" bIns="18000" anchor="t">
             <a:spAutoFit/>
           </a:bodyPr>
           <a:lstStyle/>
@@ -13512,795 +12982,13 @@
               </a:lnSpc>
             </a:pPr>
             <a:r>
-              <a:rPr sz="1500" b="1">
-                <a:solidFill>
-                  <a:srgbClr val="FFFFFF"/>
-                </a:solidFill>
-                <a:latin typeface="Arial"/>
-              </a:rPr>
-              <a:t>Semaine 2</a:t>
-            </a:r>
-          </a:p>
-        </p:txBody>
-      </p:sp>
-      <p:sp>
-        <p:nvSpPr>
-          <p:cNvPr id="18" name="Rounded Rectangle 17"/>
-          <p:cNvSpPr/>
-          <p:nvPr/>
-        </p:nvSpPr>
-        <p:spPr>
-          <a:xfrm>
-            <a:off x="3384000" y="2304000"/>
-            <a:ext cx="2628000" cy="2880000"/>
-          </a:xfrm>
-          <a:prstGeom prst="roundRect">
-            <a:avLst>
-              <a:gd name="adj" fmla="val 6000"/>
-            </a:avLst>
-          </a:prstGeom>
-          <a:solidFill>
-            <a:srgbClr val="F4F4F2"/>
-          </a:solidFill>
-          <a:ln>
-            <a:noFill/>
-          </a:ln>
-          <a:effectLst/>
-        </p:spPr>
-        <p:style>
-          <a:lnRef idx="1">
-            <a:schemeClr val="accent1"/>
-          </a:lnRef>
-          <a:fillRef idx="3">
-            <a:schemeClr val="accent1"/>
-          </a:fillRef>
-          <a:effectRef idx="2">
-            <a:schemeClr val="accent1"/>
-          </a:effectRef>
-          <a:fontRef idx="minor">
-            <a:schemeClr val="lt1"/>
-          </a:fontRef>
-        </p:style>
-        <p:txBody>
-          <a:bodyPr rtlCol="0" anchor="ctr"/>
-          <a:lstStyle/>
-          <a:p>
-            <a:pPr algn="ctr"/>
-          </a:p>
-        </p:txBody>
-      </p:sp>
-      <p:sp>
-        <p:nvSpPr>
-          <p:cNvPr id="19" name="TextBox 18"/>
-          <p:cNvSpPr txBox="1"/>
-          <p:nvPr/>
-        </p:nvSpPr>
-        <p:spPr>
-          <a:xfrm>
-            <a:off x="3528000" y="2448000"/>
-            <a:ext cx="2376000" cy="2664000"/>
-          </a:xfrm>
-          <a:prstGeom prst="rect">
-            <a:avLst/>
-          </a:prstGeom>
-          <a:noFill/>
-        </p:spPr>
-        <p:txBody>
-          <a:bodyPr wrap="square">
-            <a:spAutoFit/>
-          </a:bodyPr>
-          <a:lstStyle/>
-          <a:p>
-            <a:pPr>
-              <a:lnSpc>
-                <a:spcPct val="110000"/>
-              </a:lnSpc>
-              <a:spcAft>
-                <a:spcPts val="700"/>
-              </a:spcAft>
-            </a:pPr>
-            <a:r>
-              <a:rPr sz="850">
-                <a:solidFill>
-                  <a:srgbClr val="E84E0E"/>
-                </a:solidFill>
-                <a:latin typeface="Arial"/>
-              </a:rPr>
-              <a:t>■  </a:t>
-            </a:r>
-            <a:r>
-              <a:rPr sz="1250">
+              <a:rPr sz="1200" b="0">
                 <a:solidFill>
                   <a:srgbClr val="111111"/>
                 </a:solidFill>
                 <a:latin typeface="Arial"/>
               </a:rPr>
-              <a:t>Publier les 6 avant / après</a:t>
-            </a:r>
-          </a:p>
-          <a:p>
-            <a:pPr>
-              <a:lnSpc>
-                <a:spcPct val="110000"/>
-              </a:lnSpc>
-              <a:spcAft>
-                <a:spcPts val="700"/>
-              </a:spcAft>
-            </a:pPr>
-            <a:r>
-              <a:rPr sz="850">
-                <a:solidFill>
-                  <a:srgbClr val="E84E0E"/>
-                </a:solidFill>
-                <a:latin typeface="Arial"/>
-              </a:rPr>
-              <a:t>■  </a:t>
-            </a:r>
-            <a:r>
-              <a:rPr sz="1250">
-                <a:solidFill>
-                  <a:srgbClr val="111111"/>
-                </a:solidFill>
-                <a:latin typeface="Arial"/>
-              </a:rPr>
-              <a:t>1 publication par jour, 12 h ou 18 h</a:t>
-            </a:r>
-          </a:p>
-          <a:p>
-            <a:pPr>
-              <a:lnSpc>
-                <a:spcPct val="110000"/>
-              </a:lnSpc>
-              <a:spcAft>
-                <a:spcPts val="700"/>
-              </a:spcAft>
-            </a:pPr>
-            <a:r>
-              <a:rPr sz="850">
-                <a:solidFill>
-                  <a:srgbClr val="E84E0E"/>
-                </a:solidFill>
-                <a:latin typeface="Arial"/>
-              </a:rPr>
-              <a:t>■  </a:t>
-            </a:r>
-            <a:r>
-              <a:rPr sz="1250">
-                <a:solidFill>
-                  <a:srgbClr val="111111"/>
-                </a:solidFill>
-                <a:latin typeface="Arial"/>
-              </a:rPr>
-              <a:t>Répondre à chaque commentaire</a:t>
-            </a:r>
-          </a:p>
-        </p:txBody>
-      </p:sp>
-      <p:sp>
-        <p:nvSpPr>
-          <p:cNvPr id="20" name="Rounded Rectangle 19"/>
-          <p:cNvSpPr/>
-          <p:nvPr/>
-        </p:nvSpPr>
-        <p:spPr>
-          <a:xfrm>
-            <a:off x="6192000" y="1584000"/>
-            <a:ext cx="2628000" cy="576000"/>
-          </a:xfrm>
-          <a:prstGeom prst="roundRect">
-            <a:avLst/>
-          </a:prstGeom>
-          <a:solidFill>
-            <a:srgbClr val="E84E0E"/>
-          </a:solidFill>
-          <a:ln>
-            <a:noFill/>
-          </a:ln>
-          <a:effectLst/>
-        </p:spPr>
-        <p:style>
-          <a:lnRef idx="1">
-            <a:schemeClr val="accent1"/>
-          </a:lnRef>
-          <a:fillRef idx="3">
-            <a:schemeClr val="accent1"/>
-          </a:fillRef>
-          <a:effectRef idx="2">
-            <a:schemeClr val="accent1"/>
-          </a:effectRef>
-          <a:fontRef idx="minor">
-            <a:schemeClr val="lt1"/>
-          </a:fontRef>
-        </p:style>
-        <p:txBody>
-          <a:bodyPr rtlCol="0" anchor="ctr"/>
-          <a:lstStyle/>
-          <a:p>
-            <a:pPr algn="ctr"/>
-          </a:p>
-        </p:txBody>
-      </p:sp>
-      <p:pic>
-        <p:nvPicPr>
-          <p:cNvPr id="21" name="Picture 20" descr="video_bl.png"/>
-          <p:cNvPicPr>
-            <a:picLocks noChangeAspect="1"/>
-          </p:cNvPicPr>
-          <p:nvPr/>
-        </p:nvPicPr>
-        <p:blipFill>
-          <a:blip r:embed="rId5"/>
-          <a:stretch>
-            <a:fillRect/>
-          </a:stretch>
-        </p:blipFill>
-        <p:spPr>
-          <a:xfrm>
-            <a:off x="6336000" y="1710000"/>
-            <a:ext cx="324000" cy="324000"/>
-          </a:xfrm>
-          <a:prstGeom prst="rect">
-            <a:avLst/>
-          </a:prstGeom>
-        </p:spPr>
-      </p:pic>
-      <p:sp>
-        <p:nvSpPr>
-          <p:cNvPr id="22" name="TextBox 21"/>
-          <p:cNvSpPr txBox="1"/>
-          <p:nvPr/>
-        </p:nvSpPr>
-        <p:spPr>
-          <a:xfrm>
-            <a:off x="6732000" y="1584000"/>
-            <a:ext cx="2015999" cy="576000"/>
-          </a:xfrm>
-          <a:prstGeom prst="rect">
-            <a:avLst/>
-          </a:prstGeom>
-          <a:noFill/>
-        </p:spPr>
-        <p:txBody>
-          <a:bodyPr wrap="square" lIns="36000" rIns="36000" tIns="18000" bIns="18000" anchor="ctr">
-            <a:spAutoFit/>
-          </a:bodyPr>
-          <a:lstStyle/>
-          <a:p>
-            <a:pPr algn="l">
-              <a:lnSpc>
-                <a:spcPct val="110000"/>
-              </a:lnSpc>
-            </a:pPr>
-            <a:r>
-              <a:rPr sz="1500" b="1">
-                <a:solidFill>
-                  <a:srgbClr val="FFFFFF"/>
-                </a:solidFill>
-                <a:latin typeface="Arial"/>
-              </a:rPr>
-              <a:t>Semaine 3</a:t>
-            </a:r>
-          </a:p>
-        </p:txBody>
-      </p:sp>
-      <p:sp>
-        <p:nvSpPr>
-          <p:cNvPr id="23" name="Rounded Rectangle 22"/>
-          <p:cNvSpPr/>
-          <p:nvPr/>
-        </p:nvSpPr>
-        <p:spPr>
-          <a:xfrm>
-            <a:off x="6192000" y="2304000"/>
-            <a:ext cx="2628000" cy="2880000"/>
-          </a:xfrm>
-          <a:prstGeom prst="roundRect">
-            <a:avLst>
-              <a:gd name="adj" fmla="val 6000"/>
-            </a:avLst>
-          </a:prstGeom>
-          <a:solidFill>
-            <a:srgbClr val="F4F4F2"/>
-          </a:solidFill>
-          <a:ln>
-            <a:noFill/>
-          </a:ln>
-          <a:effectLst/>
-        </p:spPr>
-        <p:style>
-          <a:lnRef idx="1">
-            <a:schemeClr val="accent1"/>
-          </a:lnRef>
-          <a:fillRef idx="3">
-            <a:schemeClr val="accent1"/>
-          </a:fillRef>
-          <a:effectRef idx="2">
-            <a:schemeClr val="accent1"/>
-          </a:effectRef>
-          <a:fontRef idx="minor">
-            <a:schemeClr val="lt1"/>
-          </a:fontRef>
-        </p:style>
-        <p:txBody>
-          <a:bodyPr rtlCol="0" anchor="ctr"/>
-          <a:lstStyle/>
-          <a:p>
-            <a:pPr algn="ctr"/>
-          </a:p>
-        </p:txBody>
-      </p:sp>
-      <p:sp>
-        <p:nvSpPr>
-          <p:cNvPr id="24" name="TextBox 23"/>
-          <p:cNvSpPr txBox="1"/>
-          <p:nvPr/>
-        </p:nvSpPr>
-        <p:spPr>
-          <a:xfrm>
-            <a:off x="6336000" y="2448000"/>
-            <a:ext cx="2376000" cy="2664000"/>
-          </a:xfrm>
-          <a:prstGeom prst="rect">
-            <a:avLst/>
-          </a:prstGeom>
-          <a:noFill/>
-        </p:spPr>
-        <p:txBody>
-          <a:bodyPr wrap="square">
-            <a:spAutoFit/>
-          </a:bodyPr>
-          <a:lstStyle/>
-          <a:p>
-            <a:pPr>
-              <a:lnSpc>
-                <a:spcPct val="110000"/>
-              </a:lnSpc>
-              <a:spcAft>
-                <a:spcPts val="700"/>
-              </a:spcAft>
-            </a:pPr>
-            <a:r>
-              <a:rPr sz="850">
-                <a:solidFill>
-                  <a:srgbClr val="E84E0E"/>
-                </a:solidFill>
-                <a:latin typeface="Arial"/>
-              </a:rPr>
-              <a:t>■  </a:t>
-            </a:r>
-            <a:r>
-              <a:rPr sz="1250">
-                <a:solidFill>
-                  <a:srgbClr val="111111"/>
-                </a:solidFill>
-                <a:latin typeface="Arial"/>
-              </a:rPr>
-              <a:t>Tourner 2 vidéos à l’usine</a:t>
-            </a:r>
-          </a:p>
-          <a:p>
-            <a:pPr>
-              <a:lnSpc>
-                <a:spcPct val="110000"/>
-              </a:lnSpc>
-              <a:spcAft>
-                <a:spcPts val="700"/>
-              </a:spcAft>
-            </a:pPr>
-            <a:r>
-              <a:rPr sz="850">
-                <a:solidFill>
-                  <a:srgbClr val="E84E0E"/>
-                </a:solidFill>
-                <a:latin typeface="Arial"/>
-              </a:rPr>
-              <a:t>■  </a:t>
-            </a:r>
-            <a:r>
-              <a:rPr sz="1250">
-                <a:solidFill>
-                  <a:srgbClr val="111111"/>
-                </a:solidFill>
-                <a:latin typeface="Arial"/>
-              </a:rPr>
-              <a:t>Première offre datée avec prix</a:t>
-            </a:r>
-          </a:p>
-          <a:p>
-            <a:pPr>
-              <a:lnSpc>
-                <a:spcPct val="110000"/>
-              </a:lnSpc>
-              <a:spcAft>
-                <a:spcPts val="700"/>
-              </a:spcAft>
-            </a:pPr>
-            <a:r>
-              <a:rPr sz="850">
-                <a:solidFill>
-                  <a:srgbClr val="E84E0E"/>
-                </a:solidFill>
-                <a:latin typeface="Arial"/>
-              </a:rPr>
-              <a:t>■  </a:t>
-            </a:r>
-            <a:r>
-              <a:rPr sz="1250">
-                <a:solidFill>
-                  <a:srgbClr val="111111"/>
-                </a:solidFill>
-                <a:latin typeface="Arial"/>
-              </a:rPr>
-              <a:t>Relancer Instagram</a:t>
-            </a:r>
-          </a:p>
-        </p:txBody>
-      </p:sp>
-      <p:sp>
-        <p:nvSpPr>
-          <p:cNvPr id="25" name="Rounded Rectangle 24"/>
-          <p:cNvSpPr/>
-          <p:nvPr/>
-        </p:nvSpPr>
-        <p:spPr>
-          <a:xfrm>
-            <a:off x="9000000" y="1584000"/>
-            <a:ext cx="2628000" cy="576000"/>
-          </a:xfrm>
-          <a:prstGeom prst="roundRect">
-            <a:avLst/>
-          </a:prstGeom>
-          <a:solidFill>
-            <a:srgbClr val="159641"/>
-          </a:solidFill>
-          <a:ln>
-            <a:noFill/>
-          </a:ln>
-          <a:effectLst/>
-        </p:spPr>
-        <p:style>
-          <a:lnRef idx="1">
-            <a:schemeClr val="accent1"/>
-          </a:lnRef>
-          <a:fillRef idx="3">
-            <a:schemeClr val="accent1"/>
-          </a:fillRef>
-          <a:effectRef idx="2">
-            <a:schemeClr val="accent1"/>
-          </a:effectRef>
-          <a:fontRef idx="minor">
-            <a:schemeClr val="lt1"/>
-          </a:fontRef>
-        </p:style>
-        <p:txBody>
-          <a:bodyPr rtlCol="0" anchor="ctr"/>
-          <a:lstStyle/>
-          <a:p>
-            <a:pPr algn="ctr"/>
-          </a:p>
-        </p:txBody>
-      </p:sp>
-      <p:pic>
-        <p:nvPicPr>
-          <p:cNvPr id="26" name="Picture 25" descr="trending-up_bl.png"/>
-          <p:cNvPicPr>
-            <a:picLocks noChangeAspect="1"/>
-          </p:cNvPicPr>
-          <p:nvPr/>
-        </p:nvPicPr>
-        <p:blipFill>
-          <a:blip r:embed="rId6"/>
-          <a:stretch>
-            <a:fillRect/>
-          </a:stretch>
-        </p:blipFill>
-        <p:spPr>
-          <a:xfrm>
-            <a:off x="9144000" y="1710000"/>
-            <a:ext cx="324000" cy="324000"/>
-          </a:xfrm>
-          <a:prstGeom prst="rect">
-            <a:avLst/>
-          </a:prstGeom>
-        </p:spPr>
-      </p:pic>
-      <p:sp>
-        <p:nvSpPr>
-          <p:cNvPr id="27" name="TextBox 26"/>
-          <p:cNvSpPr txBox="1"/>
-          <p:nvPr/>
-        </p:nvSpPr>
-        <p:spPr>
-          <a:xfrm>
-            <a:off x="9540000" y="1584000"/>
-            <a:ext cx="2015999" cy="576000"/>
-          </a:xfrm>
-          <a:prstGeom prst="rect">
-            <a:avLst/>
-          </a:prstGeom>
-          <a:noFill/>
-        </p:spPr>
-        <p:txBody>
-          <a:bodyPr wrap="square" lIns="36000" rIns="36000" tIns="18000" bIns="18000" anchor="ctr">
-            <a:spAutoFit/>
-          </a:bodyPr>
-          <a:lstStyle/>
-          <a:p>
-            <a:pPr algn="l">
-              <a:lnSpc>
-                <a:spcPct val="110000"/>
-              </a:lnSpc>
-            </a:pPr>
-            <a:r>
-              <a:rPr sz="1500" b="1">
-                <a:solidFill>
-                  <a:srgbClr val="FFFFFF"/>
-                </a:solidFill>
-                <a:latin typeface="Arial"/>
-              </a:rPr>
-              <a:t>Semaine 4</a:t>
-            </a:r>
-          </a:p>
-        </p:txBody>
-      </p:sp>
-      <p:sp>
-        <p:nvSpPr>
-          <p:cNvPr id="28" name="Rounded Rectangle 27"/>
-          <p:cNvSpPr/>
-          <p:nvPr/>
-        </p:nvSpPr>
-        <p:spPr>
-          <a:xfrm>
-            <a:off x="9000000" y="2304000"/>
-            <a:ext cx="2628000" cy="2880000"/>
-          </a:xfrm>
-          <a:prstGeom prst="roundRect">
-            <a:avLst>
-              <a:gd name="adj" fmla="val 6000"/>
-            </a:avLst>
-          </a:prstGeom>
-          <a:solidFill>
-            <a:srgbClr val="F4F4F2"/>
-          </a:solidFill>
-          <a:ln>
-            <a:noFill/>
-          </a:ln>
-          <a:effectLst/>
-        </p:spPr>
-        <p:style>
-          <a:lnRef idx="1">
-            <a:schemeClr val="accent1"/>
-          </a:lnRef>
-          <a:fillRef idx="3">
-            <a:schemeClr val="accent1"/>
-          </a:fillRef>
-          <a:effectRef idx="2">
-            <a:schemeClr val="accent1"/>
-          </a:effectRef>
-          <a:fontRef idx="minor">
-            <a:schemeClr val="lt1"/>
-          </a:fontRef>
-        </p:style>
-        <p:txBody>
-          <a:bodyPr rtlCol="0" anchor="ctr"/>
-          <a:lstStyle/>
-          <a:p>
-            <a:pPr algn="ctr"/>
-          </a:p>
-        </p:txBody>
-      </p:sp>
-      <p:sp>
-        <p:nvSpPr>
-          <p:cNvPr id="29" name="TextBox 28"/>
-          <p:cNvSpPr txBox="1"/>
-          <p:nvPr/>
-        </p:nvSpPr>
-        <p:spPr>
-          <a:xfrm>
-            <a:off x="9144000" y="2448000"/>
-            <a:ext cx="2376000" cy="2664000"/>
-          </a:xfrm>
-          <a:prstGeom prst="rect">
-            <a:avLst/>
-          </a:prstGeom>
-          <a:noFill/>
-        </p:spPr>
-        <p:txBody>
-          <a:bodyPr wrap="square">
-            <a:spAutoFit/>
-          </a:bodyPr>
-          <a:lstStyle/>
-          <a:p>
-            <a:pPr>
-              <a:lnSpc>
-                <a:spcPct val="110000"/>
-              </a:lnSpc>
-              <a:spcAft>
-                <a:spcPts val="700"/>
-              </a:spcAft>
-            </a:pPr>
-            <a:r>
-              <a:rPr sz="850">
-                <a:solidFill>
-                  <a:srgbClr val="E84E0E"/>
-                </a:solidFill>
-                <a:latin typeface="Arial"/>
-              </a:rPr>
-              <a:t>■  </a:t>
-            </a:r>
-            <a:r>
-              <a:rPr sz="1250">
-                <a:solidFill>
-                  <a:srgbClr val="111111"/>
-                </a:solidFill>
-                <a:latin typeface="Arial"/>
-              </a:rPr>
-              <a:t>Comparer aux 3 réactions de départ</a:t>
-            </a:r>
-          </a:p>
-          <a:p>
-            <a:pPr>
-              <a:lnSpc>
-                <a:spcPct val="110000"/>
-              </a:lnSpc>
-              <a:spcAft>
-                <a:spcPts val="700"/>
-              </a:spcAft>
-            </a:pPr>
-            <a:r>
-              <a:rPr sz="850">
-                <a:solidFill>
-                  <a:srgbClr val="E84E0E"/>
-                </a:solidFill>
-                <a:latin typeface="Arial"/>
-              </a:rPr>
-              <a:t>■  </a:t>
-            </a:r>
-            <a:r>
-              <a:rPr sz="1250">
-                <a:solidFill>
-                  <a:srgbClr val="111111"/>
-                </a:solidFill>
-                <a:latin typeface="Arial"/>
-              </a:rPr>
-              <a:t>Garder ce qui marche</a:t>
-            </a:r>
-          </a:p>
-          <a:p>
-            <a:pPr>
-              <a:lnSpc>
-                <a:spcPct val="110000"/>
-              </a:lnSpc>
-              <a:spcAft>
-                <a:spcPts val="700"/>
-              </a:spcAft>
-            </a:pPr>
-            <a:r>
-              <a:rPr sz="850">
-                <a:solidFill>
-                  <a:srgbClr val="E84E0E"/>
-                </a:solidFill>
-                <a:latin typeface="Arial"/>
-              </a:rPr>
-              <a:t>■  </a:t>
-            </a:r>
-            <a:r>
-              <a:rPr sz="1250">
-                <a:solidFill>
-                  <a:srgbClr val="111111"/>
-                </a:solidFill>
-                <a:latin typeface="Arial"/>
-              </a:rPr>
-              <a:t>Préparer le mois suivant</a:t>
-            </a:r>
-          </a:p>
-        </p:txBody>
-      </p:sp>
-      <p:sp>
-        <p:nvSpPr>
-          <p:cNvPr id="30" name="Rounded Rectangle 29"/>
-          <p:cNvSpPr/>
-          <p:nvPr/>
-        </p:nvSpPr>
-        <p:spPr>
-          <a:xfrm>
-            <a:off x="576000" y="5364000"/>
-            <a:ext cx="11052000" cy="864000"/>
-          </a:xfrm>
-          <a:prstGeom prst="roundRect">
-            <a:avLst>
-              <a:gd name="adj" fmla="val 6000"/>
-            </a:avLst>
-          </a:prstGeom>
-          <a:solidFill>
-            <a:srgbClr val="111111"/>
-          </a:solidFill>
-          <a:ln>
-            <a:noFill/>
-          </a:ln>
-          <a:effectLst/>
-        </p:spPr>
-        <p:style>
-          <a:lnRef idx="1">
-            <a:schemeClr val="accent1"/>
-          </a:lnRef>
-          <a:fillRef idx="3">
-            <a:schemeClr val="accent1"/>
-          </a:fillRef>
-          <a:effectRef idx="2">
-            <a:schemeClr val="accent1"/>
-          </a:effectRef>
-          <a:fontRef idx="minor">
-            <a:schemeClr val="lt1"/>
-          </a:fontRef>
-        </p:style>
-        <p:txBody>
-          <a:bodyPr rtlCol="0" anchor="ctr"/>
-          <a:lstStyle/>
-          <a:p>
-            <a:pPr algn="ctr"/>
-          </a:p>
-        </p:txBody>
-      </p:sp>
-      <p:pic>
-        <p:nvPicPr>
-          <p:cNvPr id="31" name="Picture 30" descr="target-arrow_or.png"/>
-          <p:cNvPicPr>
-            <a:picLocks noChangeAspect="1"/>
-          </p:cNvPicPr>
-          <p:nvPr/>
-        </p:nvPicPr>
-        <p:blipFill>
-          <a:blip r:embed="rId7"/>
-          <a:stretch>
-            <a:fillRect/>
-          </a:stretch>
-        </p:blipFill>
-        <p:spPr>
-          <a:xfrm>
-            <a:off x="792000" y="5544000"/>
-            <a:ext cx="503999" cy="503999"/>
-          </a:xfrm>
-          <a:prstGeom prst="rect">
-            <a:avLst/>
-          </a:prstGeom>
-        </p:spPr>
-      </p:pic>
-      <p:sp>
-        <p:nvSpPr>
-          <p:cNvPr id="32" name="TextBox 31"/>
-          <p:cNvSpPr txBox="1"/>
-          <p:nvPr/>
-        </p:nvSpPr>
-        <p:spPr>
-          <a:xfrm>
-            <a:off x="1440000" y="5364000"/>
-            <a:ext cx="10008000" cy="864000"/>
-          </a:xfrm>
-          <a:prstGeom prst="rect">
-            <a:avLst/>
-          </a:prstGeom>
-          <a:noFill/>
-        </p:spPr>
-        <p:txBody>
-          <a:bodyPr wrap="square" lIns="36000" rIns="36000" tIns="18000" bIns="18000" anchor="ctr">
-            <a:spAutoFit/>
-          </a:bodyPr>
-          <a:lstStyle/>
-          <a:p>
-            <a:pPr algn="l">
-              <a:lnSpc>
-                <a:spcPct val="110000"/>
-              </a:lnSpc>
-            </a:pPr>
-            <a:r>
-              <a:rPr sz="1350" b="1">
-                <a:solidFill>
-                  <a:srgbClr val="FFFFFF"/>
-                </a:solidFill>
-                <a:latin typeface="Arial"/>
-              </a:rPr>
-              <a:t>Objectif proposé à 30 jours : passer de 3 à 10 réactions médianes par publication, et compter les commandes venues de Facebook.</a:t>
+              <a:t>Votre meilleure publication, en couleur pleine et sans texte parasite.</a:t>
             </a:r>
           </a:p>
         </p:txBody>
@@ -14469,7 +13157,7 @@
                 </a:solidFill>
                 <a:latin typeface="Arial"/>
               </a:rPr>
-              <a:t>SUITE</a:t>
+              <a:t>VERSION 2 · 2 SUR 3</a:t>
             </a:r>
           </a:p>
         </p:txBody>
@@ -14508,7 +13196,7 @@
                 </a:solidFill>
                 <a:latin typeface="Arial"/>
               </a:rPr>
-              <a:t>Ce qu’il nous faut pour aller plus loin</a:t>
+              <a:t>Faire parler la cible</a:t>
             </a:r>
           </a:p>
         </p:txBody>
@@ -14591,7 +13279,7 @@
                 </a:solidFill>
                 <a:latin typeface="Arial"/>
               </a:rPr>
-              <a:t>19 / 19</a:t>
+              <a:t>19 / 23</a:t>
             </a:r>
           </a:p>
         </p:txBody>
@@ -14643,8 +13331,8 @@
         </p:nvSpPr>
         <p:spPr>
           <a:xfrm>
-            <a:off x="576000" y="1655999"/>
-            <a:ext cx="3528000" cy="3420000"/>
+            <a:off x="576000" y="1548000"/>
+            <a:ext cx="5364000" cy="4824000"/>
           </a:xfrm>
           <a:prstGeom prst="roundRect">
             <a:avLst>
@@ -14681,53 +13369,9 @@
           </a:p>
         </p:txBody>
       </p:sp>
-      <p:sp>
-        <p:nvSpPr>
-          <p:cNvPr id="11" name="Oval 10"/>
-          <p:cNvSpPr/>
-          <p:nvPr/>
-        </p:nvSpPr>
-        <p:spPr>
-          <a:xfrm>
-            <a:off x="864000" y="1944000"/>
-            <a:ext cx="792000" cy="792000"/>
-          </a:xfrm>
-          <a:prstGeom prst="ellipse">
-            <a:avLst/>
-          </a:prstGeom>
-          <a:solidFill>
-            <a:srgbClr val="E84E0E"/>
-          </a:solidFill>
-          <a:ln>
-            <a:noFill/>
-          </a:ln>
-          <a:effectLst/>
-        </p:spPr>
-        <p:style>
-          <a:lnRef idx="1">
-            <a:schemeClr val="accent1"/>
-          </a:lnRef>
-          <a:fillRef idx="3">
-            <a:schemeClr val="accent1"/>
-          </a:fillRef>
-          <a:effectRef idx="2">
-            <a:schemeClr val="accent1"/>
-          </a:effectRef>
-          <a:fontRef idx="minor">
-            <a:schemeClr val="lt1"/>
-          </a:fontRef>
-        </p:style>
-        <p:txBody>
-          <a:bodyPr rtlCol="0" anchor="ctr"/>
-          <a:lstStyle/>
-          <a:p>
-            <a:pPr algn="ctr"/>
-          </a:p>
-        </p:txBody>
-      </p:sp>
       <p:pic>
         <p:nvPicPr>
-          <p:cNvPr id="12" name="Picture 11" descr="eye_bl.png"/>
+          <p:cNvPr id="11" name="Picture 10" descr="v2_abreuvoir.jpg"/>
           <p:cNvPicPr>
             <a:picLocks noChangeAspect="1"/>
           </p:cNvPicPr>
@@ -14741,8 +13385,8 @@
         </p:blipFill>
         <p:spPr>
           <a:xfrm>
-            <a:off x="1038240" y="2118240"/>
-            <a:ext cx="443520" cy="443520"/>
+            <a:off x="756000" y="1755000"/>
+            <a:ext cx="3528000" cy="4410000"/>
           </a:xfrm>
           <a:prstGeom prst="rect">
             <a:avLst/>
@@ -14751,14 +13395,14 @@
       </p:pic>
       <p:sp>
         <p:nvSpPr>
-          <p:cNvPr id="13" name="TextBox 12"/>
+          <p:cNvPr id="12" name="TextBox 11"/>
           <p:cNvSpPr txBox="1"/>
           <p:nvPr/>
         </p:nvSpPr>
         <p:spPr>
           <a:xfrm>
-            <a:off x="864000" y="2951999"/>
-            <a:ext cx="3024000" cy="432000"/>
+            <a:off x="4392000" y="1800000"/>
+            <a:ext cx="1440000" cy="576000"/>
           </a:xfrm>
           <a:prstGeom prst="rect">
             <a:avLst/>
@@ -14777,27 +13421,27 @@
               </a:lnSpc>
             </a:pPr>
             <a:r>
-              <a:rPr sz="1700" b="1">
-                <a:solidFill>
-                  <a:srgbClr val="111111"/>
-                </a:solidFill>
-                <a:latin typeface="Arial"/>
-              </a:rPr>
-              <a:t>L’accès aux comptes</a:t>
-            </a:r>
-          </a:p>
-        </p:txBody>
-      </p:sp>
-      <p:sp>
-        <p:nvSpPr>
-          <p:cNvPr id="14" name="TextBox 13"/>
+              <a:rPr sz="1500" b="1">
+                <a:solidFill>
+                  <a:srgbClr val="E84E0E"/>
+                </a:solidFill>
+                <a:latin typeface="Arial"/>
+              </a:rPr>
+              <a:t>Abreuvoir</a:t>
+            </a:r>
+          </a:p>
+        </p:txBody>
+      </p:sp>
+      <p:sp>
+        <p:nvSpPr>
+          <p:cNvPr id="13" name="TextBox 12"/>
           <p:cNvSpPr txBox="1"/>
           <p:nvPr/>
         </p:nvSpPr>
         <p:spPr>
           <a:xfrm>
-            <a:off x="864000" y="3456000"/>
-            <a:ext cx="3024000" cy="1440000"/>
+            <a:off x="4392000" y="2520000"/>
+            <a:ext cx="1440000" cy="3420000"/>
           </a:xfrm>
           <a:prstGeom prst="rect">
             <a:avLst/>
@@ -14816,27 +13460,27 @@
               </a:lnSpc>
             </a:pPr>
             <a:r>
-              <a:rPr sz="1300" b="0">
-                <a:solidFill>
-                  <a:srgbClr val="5A5A5A"/>
-                </a:solidFill>
-                <a:latin typeface="Arial"/>
-              </a:rPr>
-              <a:t>Portée, clics et messages reçus : pour mesurer les ventes, pas seulement les réactions.</a:t>
-            </a:r>
-          </a:p>
-        </p:txBody>
-      </p:sp>
-      <p:sp>
-        <p:nvSpPr>
-          <p:cNvPr id="15" name="Rounded Rectangle 14"/>
+              <a:rPr sz="1200" b="0">
+                <a:solidFill>
+                  <a:srgbClr val="111111"/>
+                </a:solidFill>
+                <a:latin typeface="Arial"/>
+              </a:rPr>
+              <a:t>On parle aux éleveurs, avec leurs mots : « poulets assoiffés ».</a:t>
+            </a:r>
+          </a:p>
+        </p:txBody>
+      </p:sp>
+      <p:sp>
+        <p:nvSpPr>
+          <p:cNvPr id="14" name="Rounded Rectangle 13"/>
           <p:cNvSpPr/>
           <p:nvPr/>
         </p:nvSpPr>
         <p:spPr>
           <a:xfrm>
-            <a:off x="4320000" y="1655999"/>
-            <a:ext cx="3528000" cy="3420000"/>
+            <a:off x="6192000" y="1548000"/>
+            <a:ext cx="5364000" cy="4824000"/>
           </a:xfrm>
           <a:prstGeom prst="roundRect">
             <a:avLst>
@@ -14873,53 +13517,9 @@
           </a:p>
         </p:txBody>
       </p:sp>
-      <p:sp>
-        <p:nvSpPr>
-          <p:cNvPr id="16" name="Oval 15"/>
-          <p:cNvSpPr/>
-          <p:nvPr/>
-        </p:nvSpPr>
-        <p:spPr>
-          <a:xfrm>
-            <a:off x="4608000" y="1944000"/>
-            <a:ext cx="792000" cy="792000"/>
-          </a:xfrm>
-          <a:prstGeom prst="ellipse">
-            <a:avLst/>
-          </a:prstGeom>
-          <a:solidFill>
-            <a:srgbClr val="E84E0E"/>
-          </a:solidFill>
-          <a:ln>
-            <a:noFill/>
-          </a:ln>
-          <a:effectLst/>
-        </p:spPr>
-        <p:style>
-          <a:lnRef idx="1">
-            <a:schemeClr val="accent1"/>
-          </a:lnRef>
-          <a:fillRef idx="3">
-            <a:schemeClr val="accent1"/>
-          </a:fillRef>
-          <a:effectRef idx="2">
-            <a:schemeClr val="accent1"/>
-          </a:effectRef>
-          <a:fontRef idx="minor">
-            <a:schemeClr val="lt1"/>
-          </a:fontRef>
-        </p:style>
-        <p:txBody>
-          <a:bodyPr rtlCol="0" anchor="ctr"/>
-          <a:lstStyle/>
-          <a:p>
-            <a:pPr algn="ctr"/>
-          </a:p>
-        </p:txBody>
-      </p:sp>
       <p:pic>
         <p:nvPicPr>
-          <p:cNvPr id="17" name="Picture 16" descr="currency-dollar_bl.png"/>
+          <p:cNvPr id="15" name="Picture 14" descr="v2_ibiza.jpg"/>
           <p:cNvPicPr>
             <a:picLocks noChangeAspect="1"/>
           </p:cNvPicPr>
@@ -14933,8 +13533,8 @@
         </p:blipFill>
         <p:spPr>
           <a:xfrm>
-            <a:off x="4782240" y="2118240"/>
-            <a:ext cx="443520" cy="443520"/>
+            <a:off x="6372000" y="1755000"/>
+            <a:ext cx="3528000" cy="4410000"/>
           </a:xfrm>
           <a:prstGeom prst="rect">
             <a:avLst/>
@@ -14943,14 +13543,14 @@
       </p:pic>
       <p:sp>
         <p:nvSpPr>
-          <p:cNvPr id="18" name="TextBox 17"/>
+          <p:cNvPr id="16" name="TextBox 15"/>
           <p:cNvSpPr txBox="1"/>
           <p:nvPr/>
         </p:nvSpPr>
         <p:spPr>
           <a:xfrm>
-            <a:off x="4608000" y="2951999"/>
-            <a:ext cx="3024000" cy="432000"/>
+            <a:off x="10008000" y="1800000"/>
+            <a:ext cx="1440000" cy="576000"/>
           </a:xfrm>
           <a:prstGeom prst="rect">
             <a:avLst/>
@@ -14969,27 +13569,27 @@
               </a:lnSpc>
             </a:pPr>
             <a:r>
-              <a:rPr sz="1700" b="1">
-                <a:solidFill>
-                  <a:srgbClr val="111111"/>
-                </a:solidFill>
-                <a:latin typeface="Arial"/>
-              </a:rPr>
-              <a:t>Prix et délais</a:t>
-            </a:r>
-          </a:p>
-        </p:txBody>
-      </p:sp>
-      <p:sp>
-        <p:nvSpPr>
-          <p:cNvPr id="19" name="TextBox 18"/>
+              <a:rPr sz="1500" b="1">
+                <a:solidFill>
+                  <a:srgbClr val="E84E0E"/>
+                </a:solidFill>
+                <a:latin typeface="Arial"/>
+              </a:rPr>
+              <a:t>Table et chaises Ibiza</a:t>
+            </a:r>
+          </a:p>
+        </p:txBody>
+      </p:sp>
+      <p:sp>
+        <p:nvSpPr>
+          <p:cNvPr id="17" name="TextBox 16"/>
           <p:cNvSpPr txBox="1"/>
           <p:nvPr/>
         </p:nvSpPr>
         <p:spPr>
           <a:xfrm>
-            <a:off x="4608000" y="3456000"/>
-            <a:ext cx="3024000" cy="1440000"/>
+            <a:off x="10008000" y="2520000"/>
+            <a:ext cx="1440000" cy="3420000"/>
           </a:xfrm>
           <a:prstGeom prst="rect">
             <a:avLst/>
@@ -15008,244 +13608,13 @@
               </a:lnSpc>
             </a:pPr>
             <a:r>
-              <a:rPr sz="1300" b="0">
-                <a:solidFill>
-                  <a:srgbClr val="5A5A5A"/>
-                </a:solidFill>
-                <a:latin typeface="Arial"/>
-              </a:rPr>
-              <a:t>Pour écrire des offres datées sur les produits phares.</a:t>
-            </a:r>
-          </a:p>
-        </p:txBody>
-      </p:sp>
-      <p:sp>
-        <p:nvSpPr>
-          <p:cNvPr id="20" name="Rounded Rectangle 19"/>
-          <p:cNvSpPr/>
-          <p:nvPr/>
-        </p:nvSpPr>
-        <p:spPr>
-          <a:xfrm>
-            <a:off x="8064000" y="1655999"/>
-            <a:ext cx="3528000" cy="3420000"/>
-          </a:xfrm>
-          <a:prstGeom prst="roundRect">
-            <a:avLst>
-              <a:gd name="adj" fmla="val 6000"/>
-            </a:avLst>
-          </a:prstGeom>
-          <a:solidFill>
-            <a:srgbClr val="F4F4F2"/>
-          </a:solidFill>
-          <a:ln>
-            <a:noFill/>
-          </a:ln>
-          <a:effectLst/>
-        </p:spPr>
-        <p:style>
-          <a:lnRef idx="1">
-            <a:schemeClr val="accent1"/>
-          </a:lnRef>
-          <a:fillRef idx="3">
-            <a:schemeClr val="accent1"/>
-          </a:fillRef>
-          <a:effectRef idx="2">
-            <a:schemeClr val="accent1"/>
-          </a:effectRef>
-          <a:fontRef idx="minor">
-            <a:schemeClr val="lt1"/>
-          </a:fontRef>
-        </p:style>
-        <p:txBody>
-          <a:bodyPr rtlCol="0" anchor="ctr"/>
-          <a:lstStyle/>
-          <a:p>
-            <a:pPr algn="ctr"/>
-          </a:p>
-        </p:txBody>
-      </p:sp>
-      <p:sp>
-        <p:nvSpPr>
-          <p:cNvPr id="21" name="Oval 20"/>
-          <p:cNvSpPr/>
-          <p:nvPr/>
-        </p:nvSpPr>
-        <p:spPr>
-          <a:xfrm>
-            <a:off x="8352000" y="1944000"/>
-            <a:ext cx="792000" cy="792000"/>
-          </a:xfrm>
-          <a:prstGeom prst="ellipse">
-            <a:avLst/>
-          </a:prstGeom>
-          <a:solidFill>
-            <a:srgbClr val="159641"/>
-          </a:solidFill>
-          <a:ln>
-            <a:noFill/>
-          </a:ln>
-          <a:effectLst/>
-        </p:spPr>
-        <p:style>
-          <a:lnRef idx="1">
-            <a:schemeClr val="accent1"/>
-          </a:lnRef>
-          <a:fillRef idx="3">
-            <a:schemeClr val="accent1"/>
-          </a:fillRef>
-          <a:effectRef idx="2">
-            <a:schemeClr val="accent1"/>
-          </a:effectRef>
-          <a:fontRef idx="minor">
-            <a:schemeClr val="lt1"/>
-          </a:fontRef>
-        </p:style>
-        <p:txBody>
-          <a:bodyPr rtlCol="0" anchor="ctr"/>
-          <a:lstStyle/>
-          <a:p>
-            <a:pPr algn="ctr"/>
-          </a:p>
-        </p:txBody>
-      </p:sp>
-      <p:pic>
-        <p:nvPicPr>
-          <p:cNvPr id="22" name="Picture 21" descr="circle-check_bl.png"/>
-          <p:cNvPicPr>
-            <a:picLocks noChangeAspect="1"/>
-          </p:cNvPicPr>
-          <p:nvPr/>
-        </p:nvPicPr>
-        <p:blipFill>
-          <a:blip r:embed="rId5"/>
-          <a:stretch>
-            <a:fillRect/>
-          </a:stretch>
-        </p:blipFill>
-        <p:spPr>
-          <a:xfrm>
-            <a:off x="8526240" y="2118240"/>
-            <a:ext cx="443520" cy="443520"/>
-          </a:xfrm>
-          <a:prstGeom prst="rect">
-            <a:avLst/>
-          </a:prstGeom>
-        </p:spPr>
-      </p:pic>
-      <p:sp>
-        <p:nvSpPr>
-          <p:cNvPr id="23" name="TextBox 22"/>
-          <p:cNvSpPr txBox="1"/>
-          <p:nvPr/>
-        </p:nvSpPr>
-        <p:spPr>
-          <a:xfrm>
-            <a:off x="8352000" y="2951999"/>
-            <a:ext cx="3024000" cy="432000"/>
-          </a:xfrm>
-          <a:prstGeom prst="rect">
-            <a:avLst/>
-          </a:prstGeom>
-          <a:noFill/>
-        </p:spPr>
-        <p:txBody>
-          <a:bodyPr wrap="square" lIns="36000" rIns="36000" tIns="18000" bIns="18000" anchor="t">
-            <a:spAutoFit/>
-          </a:bodyPr>
-          <a:lstStyle/>
-          <a:p>
-            <a:pPr algn="l">
-              <a:lnSpc>
-                <a:spcPct val="110000"/>
-              </a:lnSpc>
-            </a:pPr>
-            <a:r>
-              <a:rPr sz="1700" b="1">
+              <a:rPr sz="1200" b="0">
                 <a:solidFill>
                   <a:srgbClr val="111111"/>
                 </a:solidFill>
                 <a:latin typeface="Arial"/>
               </a:rPr>
-              <a:t>Votre accord</a:t>
-            </a:r>
-          </a:p>
-        </p:txBody>
-      </p:sp>
-      <p:sp>
-        <p:nvSpPr>
-          <p:cNvPr id="24" name="TextBox 23"/>
-          <p:cNvSpPr txBox="1"/>
-          <p:nvPr/>
-        </p:nvSpPr>
-        <p:spPr>
-          <a:xfrm>
-            <a:off x="8352000" y="3456000"/>
-            <a:ext cx="3024000" cy="1440000"/>
-          </a:xfrm>
-          <a:prstGeom prst="rect">
-            <a:avLst/>
-          </a:prstGeom>
-          <a:noFill/>
-        </p:spPr>
-        <p:txBody>
-          <a:bodyPr wrap="square" lIns="36000" rIns="36000" tIns="18000" bIns="18000" anchor="t">
-            <a:spAutoFit/>
-          </a:bodyPr>
-          <a:lstStyle/>
-          <a:p>
-            <a:pPr algn="l">
-              <a:lnSpc>
-                <a:spcPct val="110000"/>
-              </a:lnSpc>
-            </a:pPr>
-            <a:r>
-              <a:rPr sz="1300" b="0">
-                <a:solidFill>
-                  <a:srgbClr val="5A5A5A"/>
-                </a:solidFill>
-                <a:latin typeface="Arial"/>
-              </a:rPr>
-              <a:t>Sur les 6 publications refaites, avant toute mise en ligne.</a:t>
-            </a:r>
-          </a:p>
-        </p:txBody>
-      </p:sp>
-      <p:sp>
-        <p:nvSpPr>
-          <p:cNvPr id="25" name="TextBox 24"/>
-          <p:cNvSpPr txBox="1"/>
-          <p:nvPr/>
-        </p:nvSpPr>
-        <p:spPr>
-          <a:xfrm>
-            <a:off x="576000" y="5400000"/>
-            <a:ext cx="11052000" cy="720000"/>
-          </a:xfrm>
-          <a:prstGeom prst="rect">
-            <a:avLst/>
-          </a:prstGeom>
-          <a:noFill/>
-        </p:spPr>
-        <p:txBody>
-          <a:bodyPr wrap="square" lIns="36000" rIns="36000" tIns="18000" bIns="18000" anchor="t">
-            <a:spAutoFit/>
-          </a:bodyPr>
-          <a:lstStyle/>
-          <a:p>
-            <a:pPr algn="l">
-              <a:lnSpc>
-                <a:spcPct val="110000"/>
-              </a:lnSpc>
-            </a:pPr>
-            <a:r>
-              <a:rPr sz="1200" b="0">
-                <a:solidFill>
-                  <a:srgbClr val="5A5A5A"/>
-                </a:solidFill>
-                <a:latin typeface="Arial"/>
-              </a:rPr>
-              <a:t>Rien n’a été publié. Les visuels « après » reprennent vos propres images et vos coordonnées.</a:t>
+              <a:t>Un sondage de couleurs pour faire commenter.</a:t>
             </a:r>
           </a:p>
         </p:txBody>
@@ -15536,7 +13905,7 @@
                 </a:solidFill>
                 <a:latin typeface="Arial"/>
               </a:rPr>
-              <a:t>2 / 19</a:t>
+              <a:t>2 / 23</a:t>
             </a:r>
           </a:p>
         </p:txBody>
@@ -16344,6 +14713,4761 @@
                 <a:latin typeface="Arial"/>
               </a:rPr>
               <a:t>Chez Metaplast, les vidéos font 3,5 fois plus de réactions que les images.</a:t>
+            </a:r>
+          </a:p>
+        </p:txBody>
+      </p:sp>
+    </p:spTree>
+  </p:cSld>
+  <p:clrMapOvr>
+    <a:masterClrMapping/>
+  </p:clrMapOvr>
+</p:sld>
+</file>
+
+<file path=ppt/slides/slide20.xml><?xml version="1.0" encoding="utf-8"?>
+<p:sld xmlns:a="http://schemas.openxmlformats.org/drawingml/2006/main" xmlns:p="http://schemas.openxmlformats.org/presentationml/2006/main" xmlns:r="http://schemas.openxmlformats.org/officeDocument/2006/relationships">
+  <p:cSld>
+    <p:spTree>
+      <p:nvGrpSpPr>
+        <p:cNvPr id="1" name=""/>
+        <p:cNvGrpSpPr/>
+        <p:nvPr/>
+      </p:nvGrpSpPr>
+      <p:grpSpPr/>
+      <p:sp>
+        <p:nvSpPr>
+          <p:cNvPr id="2" name="Rectangle 1"/>
+          <p:cNvSpPr/>
+          <p:nvPr/>
+        </p:nvSpPr>
+        <p:spPr>
+          <a:xfrm>
+            <a:off x="0" y="0"/>
+            <a:ext cx="12192119" cy="6858000"/>
+          </a:xfrm>
+          <a:prstGeom prst="rect">
+            <a:avLst/>
+          </a:prstGeom>
+          <a:solidFill>
+            <a:srgbClr val="FFFFFF"/>
+          </a:solidFill>
+          <a:ln>
+            <a:noFill/>
+          </a:ln>
+          <a:effectLst/>
+        </p:spPr>
+        <p:style>
+          <a:lnRef idx="1">
+            <a:schemeClr val="accent1"/>
+          </a:lnRef>
+          <a:fillRef idx="3">
+            <a:schemeClr val="accent1"/>
+          </a:fillRef>
+          <a:effectRef idx="2">
+            <a:schemeClr val="accent1"/>
+          </a:effectRef>
+          <a:fontRef idx="minor">
+            <a:schemeClr val="lt1"/>
+          </a:fontRef>
+        </p:style>
+        <p:txBody>
+          <a:bodyPr rtlCol="0" anchor="ctr"/>
+          <a:lstStyle/>
+          <a:p>
+            <a:pPr algn="ctr"/>
+          </a:p>
+        </p:txBody>
+      </p:sp>
+      <p:sp>
+        <p:nvSpPr>
+          <p:cNvPr id="3" name="Rectangle 2"/>
+          <p:cNvSpPr/>
+          <p:nvPr/>
+        </p:nvSpPr>
+        <p:spPr>
+          <a:xfrm>
+            <a:off x="0" y="0"/>
+            <a:ext cx="180000" cy="6858000"/>
+          </a:xfrm>
+          <a:prstGeom prst="rect">
+            <a:avLst/>
+          </a:prstGeom>
+          <a:solidFill>
+            <a:srgbClr val="E84E0E"/>
+          </a:solidFill>
+          <a:ln>
+            <a:noFill/>
+          </a:ln>
+          <a:effectLst/>
+        </p:spPr>
+        <p:style>
+          <a:lnRef idx="1">
+            <a:schemeClr val="accent1"/>
+          </a:lnRef>
+          <a:fillRef idx="3">
+            <a:schemeClr val="accent1"/>
+          </a:fillRef>
+          <a:effectRef idx="2">
+            <a:schemeClr val="accent1"/>
+          </a:effectRef>
+          <a:fontRef idx="minor">
+            <a:schemeClr val="lt1"/>
+          </a:fontRef>
+        </p:style>
+        <p:txBody>
+          <a:bodyPr rtlCol="0" anchor="ctr"/>
+          <a:lstStyle/>
+          <a:p>
+            <a:pPr algn="ctr"/>
+          </a:p>
+        </p:txBody>
+      </p:sp>
+      <p:pic>
+        <p:nvPicPr>
+          <p:cNvPr id="4" name="Picture 3" descr="logo-taj-seul.png"/>
+          <p:cNvPicPr>
+            <a:picLocks noChangeAspect="1"/>
+          </p:cNvPicPr>
+          <p:nvPr/>
+        </p:nvPicPr>
+        <p:blipFill>
+          <a:blip r:embed="rId2"/>
+          <a:stretch>
+            <a:fillRect/>
+          </a:stretch>
+        </p:blipFill>
+        <p:spPr>
+          <a:xfrm>
+            <a:off x="10248119" y="283729"/>
+            <a:ext cx="1584000" cy="440539"/>
+          </a:xfrm>
+          <a:prstGeom prst="rect">
+            <a:avLst/>
+          </a:prstGeom>
+        </p:spPr>
+      </p:pic>
+      <p:sp>
+        <p:nvSpPr>
+          <p:cNvPr id="5" name="TextBox 4"/>
+          <p:cNvSpPr txBox="1"/>
+          <p:nvPr/>
+        </p:nvSpPr>
+        <p:spPr>
+          <a:xfrm>
+            <a:off x="576000" y="324000"/>
+            <a:ext cx="8640000" cy="288000"/>
+          </a:xfrm>
+          <a:prstGeom prst="rect">
+            <a:avLst/>
+          </a:prstGeom>
+          <a:noFill/>
+        </p:spPr>
+        <p:txBody>
+          <a:bodyPr wrap="square" lIns="36000" rIns="36000" tIns="18000" bIns="18000" anchor="t">
+            <a:spAutoFit/>
+          </a:bodyPr>
+          <a:lstStyle/>
+          <a:p>
+            <a:pPr algn="l">
+              <a:lnSpc>
+                <a:spcPct val="110000"/>
+              </a:lnSpc>
+            </a:pPr>
+            <a:r>
+              <a:rPr sz="1100" b="1">
+                <a:solidFill>
+                  <a:srgbClr val="E84E0E"/>
+                </a:solidFill>
+                <a:latin typeface="Arial"/>
+              </a:rPr>
+              <a:t>VERSION 2 · 3 SUR 3</a:t>
+            </a:r>
+          </a:p>
+        </p:txBody>
+      </p:sp>
+      <p:sp>
+        <p:nvSpPr>
+          <p:cNvPr id="6" name="TextBox 5"/>
+          <p:cNvSpPr txBox="1"/>
+          <p:nvPr/>
+        </p:nvSpPr>
+        <p:spPr>
+          <a:xfrm>
+            <a:off x="576000" y="576000"/>
+            <a:ext cx="9000000" cy="720000"/>
+          </a:xfrm>
+          <a:prstGeom prst="rect">
+            <a:avLst/>
+          </a:prstGeom>
+          <a:noFill/>
+        </p:spPr>
+        <p:txBody>
+          <a:bodyPr wrap="square" lIns="36000" rIns="36000" tIns="18000" bIns="18000" anchor="t">
+            <a:spAutoFit/>
+          </a:bodyPr>
+          <a:lstStyle/>
+          <a:p>
+            <a:pPr algn="l">
+              <a:lnSpc>
+                <a:spcPct val="110000"/>
+              </a:lnSpc>
+            </a:pPr>
+            <a:r>
+              <a:rPr sz="2600" b="1">
+                <a:solidFill>
+                  <a:srgbClr val="111111"/>
+                </a:solidFill>
+                <a:latin typeface="Arial"/>
+              </a:rPr>
+              <a:t>Raconter une scène</a:t>
+            </a:r>
+          </a:p>
+        </p:txBody>
+      </p:sp>
+      <p:sp>
+        <p:nvSpPr>
+          <p:cNvPr id="7" name="Rectangle 6"/>
+          <p:cNvSpPr/>
+          <p:nvPr/>
+        </p:nvSpPr>
+        <p:spPr>
+          <a:xfrm>
+            <a:off x="576000" y="1278000"/>
+            <a:ext cx="792000" cy="50400"/>
+          </a:xfrm>
+          <a:prstGeom prst="rect">
+            <a:avLst/>
+          </a:prstGeom>
+          <a:solidFill>
+            <a:srgbClr val="159641"/>
+          </a:solidFill>
+          <a:ln>
+            <a:noFill/>
+          </a:ln>
+          <a:effectLst/>
+        </p:spPr>
+        <p:style>
+          <a:lnRef idx="1">
+            <a:schemeClr val="accent1"/>
+          </a:lnRef>
+          <a:fillRef idx="3">
+            <a:schemeClr val="accent1"/>
+          </a:fillRef>
+          <a:effectRef idx="2">
+            <a:schemeClr val="accent1"/>
+          </a:effectRef>
+          <a:fontRef idx="minor">
+            <a:schemeClr val="lt1"/>
+          </a:fontRef>
+        </p:style>
+        <p:txBody>
+          <a:bodyPr rtlCol="0" anchor="ctr"/>
+          <a:lstStyle/>
+          <a:p>
+            <a:pPr algn="ctr"/>
+          </a:p>
+        </p:txBody>
+      </p:sp>
+      <p:sp>
+        <p:nvSpPr>
+          <p:cNvPr id="8" name="TextBox 7"/>
+          <p:cNvSpPr txBox="1"/>
+          <p:nvPr/>
+        </p:nvSpPr>
+        <p:spPr>
+          <a:xfrm>
+            <a:off x="10572119" y="6498000"/>
+            <a:ext cx="1296000" cy="216000"/>
+          </a:xfrm>
+          <a:prstGeom prst="rect">
+            <a:avLst/>
+          </a:prstGeom>
+          <a:noFill/>
+        </p:spPr>
+        <p:txBody>
+          <a:bodyPr wrap="square" lIns="36000" rIns="36000" tIns="18000" bIns="18000" anchor="t">
+            <a:spAutoFit/>
+          </a:bodyPr>
+          <a:lstStyle/>
+          <a:p>
+            <a:pPr algn="r">
+              <a:lnSpc>
+                <a:spcPct val="110000"/>
+              </a:lnSpc>
+            </a:pPr>
+            <a:r>
+              <a:rPr sz="900" b="0">
+                <a:solidFill>
+                  <a:srgbClr val="5A5A5A"/>
+                </a:solidFill>
+                <a:latin typeface="Arial"/>
+              </a:rPr>
+              <a:t>20 / 23</a:t>
+            </a:r>
+          </a:p>
+        </p:txBody>
+      </p:sp>
+      <p:sp>
+        <p:nvSpPr>
+          <p:cNvPr id="9" name="TextBox 8"/>
+          <p:cNvSpPr txBox="1"/>
+          <p:nvPr/>
+        </p:nvSpPr>
+        <p:spPr>
+          <a:xfrm>
+            <a:off x="576000" y="6498000"/>
+            <a:ext cx="7200000" cy="216000"/>
+          </a:xfrm>
+          <a:prstGeom prst="rect">
+            <a:avLst/>
+          </a:prstGeom>
+          <a:noFill/>
+        </p:spPr>
+        <p:txBody>
+          <a:bodyPr wrap="square" lIns="36000" rIns="36000" tIns="18000" bIns="18000" anchor="t">
+            <a:spAutoFit/>
+          </a:bodyPr>
+          <a:lstStyle/>
+          <a:p>
+            <a:pPr algn="l">
+              <a:lnSpc>
+                <a:spcPct val="110000"/>
+              </a:lnSpc>
+            </a:pPr>
+            <a:r>
+              <a:rPr sz="900" b="0">
+                <a:solidFill>
+                  <a:srgbClr val="5A5A5A"/>
+                </a:solidFill>
+                <a:latin typeface="Arial"/>
+              </a:rPr>
+              <a:t>TAJ PLAST · Audit réseaux sociaux · relevé du 27/10/2026</a:t>
+            </a:r>
+          </a:p>
+        </p:txBody>
+      </p:sp>
+      <p:sp>
+        <p:nvSpPr>
+          <p:cNvPr id="10" name="Rounded Rectangle 9"/>
+          <p:cNvSpPr/>
+          <p:nvPr/>
+        </p:nvSpPr>
+        <p:spPr>
+          <a:xfrm>
+            <a:off x="576000" y="1548000"/>
+            <a:ext cx="5364000" cy="4824000"/>
+          </a:xfrm>
+          <a:prstGeom prst="roundRect">
+            <a:avLst>
+              <a:gd name="adj" fmla="val 6000"/>
+            </a:avLst>
+          </a:prstGeom>
+          <a:solidFill>
+            <a:srgbClr val="F4F4F2"/>
+          </a:solidFill>
+          <a:ln>
+            <a:noFill/>
+          </a:ln>
+          <a:effectLst/>
+        </p:spPr>
+        <p:style>
+          <a:lnRef idx="1">
+            <a:schemeClr val="accent1"/>
+          </a:lnRef>
+          <a:fillRef idx="3">
+            <a:schemeClr val="accent1"/>
+          </a:fillRef>
+          <a:effectRef idx="2">
+            <a:schemeClr val="accent1"/>
+          </a:effectRef>
+          <a:fontRef idx="minor">
+            <a:schemeClr val="lt1"/>
+          </a:fontRef>
+        </p:style>
+        <p:txBody>
+          <a:bodyPr rtlCol="0" anchor="ctr"/>
+          <a:lstStyle/>
+          <a:p>
+            <a:pPr algn="ctr"/>
+          </a:p>
+        </p:txBody>
+      </p:sp>
+      <p:pic>
+        <p:nvPicPr>
+          <p:cNvPr id="11" name="Picture 10" descr="v2_tiroirs.jpg"/>
+          <p:cNvPicPr>
+            <a:picLocks noChangeAspect="1"/>
+          </p:cNvPicPr>
+          <p:nvPr/>
+        </p:nvPicPr>
+        <p:blipFill>
+          <a:blip r:embed="rId3"/>
+          <a:stretch>
+            <a:fillRect/>
+          </a:stretch>
+        </p:blipFill>
+        <p:spPr>
+          <a:xfrm>
+            <a:off x="756000" y="1755000"/>
+            <a:ext cx="3528000" cy="4410000"/>
+          </a:xfrm>
+          <a:prstGeom prst="rect">
+            <a:avLst/>
+          </a:prstGeom>
+        </p:spPr>
+      </p:pic>
+      <p:sp>
+        <p:nvSpPr>
+          <p:cNvPr id="12" name="TextBox 11"/>
+          <p:cNvSpPr txBox="1"/>
+          <p:nvPr/>
+        </p:nvSpPr>
+        <p:spPr>
+          <a:xfrm>
+            <a:off x="4392000" y="1800000"/>
+            <a:ext cx="1440000" cy="576000"/>
+          </a:xfrm>
+          <a:prstGeom prst="rect">
+            <a:avLst/>
+          </a:prstGeom>
+          <a:noFill/>
+        </p:spPr>
+        <p:txBody>
+          <a:bodyPr wrap="square" lIns="36000" rIns="36000" tIns="18000" bIns="18000" anchor="t">
+            <a:spAutoFit/>
+          </a:bodyPr>
+          <a:lstStyle/>
+          <a:p>
+            <a:pPr algn="l">
+              <a:lnSpc>
+                <a:spcPct val="110000"/>
+              </a:lnSpc>
+            </a:pPr>
+            <a:r>
+              <a:rPr sz="1500" b="1">
+                <a:solidFill>
+                  <a:srgbClr val="E84E0E"/>
+                </a:solidFill>
+                <a:latin typeface="Arial"/>
+              </a:rPr>
+              <a:t>Tiroirs</a:t>
+            </a:r>
+          </a:p>
+        </p:txBody>
+      </p:sp>
+      <p:sp>
+        <p:nvSpPr>
+          <p:cNvPr id="13" name="TextBox 12"/>
+          <p:cNvSpPr txBox="1"/>
+          <p:nvPr/>
+        </p:nvSpPr>
+        <p:spPr>
+          <a:xfrm>
+            <a:off x="4392000" y="2520000"/>
+            <a:ext cx="1440000" cy="3420000"/>
+          </a:xfrm>
+          <a:prstGeom prst="rect">
+            <a:avLst/>
+          </a:prstGeom>
+          <a:noFill/>
+        </p:spPr>
+        <p:txBody>
+          <a:bodyPr wrap="square" lIns="36000" rIns="36000" tIns="18000" bIns="18000" anchor="t">
+            <a:spAutoFit/>
+          </a:bodyPr>
+          <a:lstStyle/>
+          <a:p>
+            <a:pPr algn="l">
+              <a:lnSpc>
+                <a:spcPct val="110000"/>
+              </a:lnSpc>
+            </a:pPr>
+            <a:r>
+              <a:rPr sz="1200" b="0">
+                <a:solidFill>
+                  <a:srgbClr val="111111"/>
+                </a:solidFill>
+                <a:latin typeface="Arial"/>
+              </a:rPr>
+              <a:t>Une scène que tous les parents connaissent à 6 h 45.</a:t>
+            </a:r>
+          </a:p>
+        </p:txBody>
+      </p:sp>
+      <p:sp>
+        <p:nvSpPr>
+          <p:cNvPr id="14" name="Rounded Rectangle 13"/>
+          <p:cNvSpPr/>
+          <p:nvPr/>
+        </p:nvSpPr>
+        <p:spPr>
+          <a:xfrm>
+            <a:off x="6192000" y="1548000"/>
+            <a:ext cx="5364000" cy="4824000"/>
+          </a:xfrm>
+          <a:prstGeom prst="roundRect">
+            <a:avLst>
+              <a:gd name="adj" fmla="val 6000"/>
+            </a:avLst>
+          </a:prstGeom>
+          <a:solidFill>
+            <a:srgbClr val="F4F4F2"/>
+          </a:solidFill>
+          <a:ln>
+            <a:noFill/>
+          </a:ln>
+          <a:effectLst/>
+        </p:spPr>
+        <p:style>
+          <a:lnRef idx="1">
+            <a:schemeClr val="accent1"/>
+          </a:lnRef>
+          <a:fillRef idx="3">
+            <a:schemeClr val="accent1"/>
+          </a:fillRef>
+          <a:effectRef idx="2">
+            <a:schemeClr val="accent1"/>
+          </a:effectRef>
+          <a:fontRef idx="minor">
+            <a:schemeClr val="lt1"/>
+          </a:fontRef>
+        </p:style>
+        <p:txBody>
+          <a:bodyPr rtlCol="0" anchor="ctr"/>
+          <a:lstStyle/>
+          <a:p>
+            <a:pPr algn="ctr"/>
+          </a:p>
+        </p:txBody>
+      </p:sp>
+      <p:pic>
+        <p:nvPicPr>
+          <p:cNvPr id="15" name="Picture 14" descr="v2_choco.jpg"/>
+          <p:cNvPicPr>
+            <a:picLocks noChangeAspect="1"/>
+          </p:cNvPicPr>
+          <p:nvPr/>
+        </p:nvPicPr>
+        <p:blipFill>
+          <a:blip r:embed="rId4"/>
+          <a:stretch>
+            <a:fillRect/>
+          </a:stretch>
+        </p:blipFill>
+        <p:spPr>
+          <a:xfrm>
+            <a:off x="6372000" y="1755000"/>
+            <a:ext cx="3528000" cy="4410000"/>
+          </a:xfrm>
+          <a:prstGeom prst="rect">
+            <a:avLst/>
+          </a:prstGeom>
+        </p:spPr>
+      </p:pic>
+      <p:sp>
+        <p:nvSpPr>
+          <p:cNvPr id="16" name="TextBox 15"/>
+          <p:cNvSpPr txBox="1"/>
+          <p:nvPr/>
+        </p:nvSpPr>
+        <p:spPr>
+          <a:xfrm>
+            <a:off x="10008000" y="1800000"/>
+            <a:ext cx="1440000" cy="576000"/>
+          </a:xfrm>
+          <a:prstGeom prst="rect">
+            <a:avLst/>
+          </a:prstGeom>
+          <a:noFill/>
+        </p:spPr>
+        <p:txBody>
+          <a:bodyPr wrap="square" lIns="36000" rIns="36000" tIns="18000" bIns="18000" anchor="t">
+            <a:spAutoFit/>
+          </a:bodyPr>
+          <a:lstStyle/>
+          <a:p>
+            <a:pPr algn="l">
+              <a:lnSpc>
+                <a:spcPct val="110000"/>
+              </a:lnSpc>
+            </a:pPr>
+            <a:r>
+              <a:rPr sz="1500" b="1">
+                <a:solidFill>
+                  <a:srgbClr val="E84E0E"/>
+                </a:solidFill>
+                <a:latin typeface="Arial"/>
+              </a:rPr>
+              <a:t>Table Choco</a:t>
+            </a:r>
+          </a:p>
+        </p:txBody>
+      </p:sp>
+      <p:sp>
+        <p:nvSpPr>
+          <p:cNvPr id="17" name="TextBox 16"/>
+          <p:cNvSpPr txBox="1"/>
+          <p:nvPr/>
+        </p:nvSpPr>
+        <p:spPr>
+          <a:xfrm>
+            <a:off x="10008000" y="2520000"/>
+            <a:ext cx="1440000" cy="3420000"/>
+          </a:xfrm>
+          <a:prstGeom prst="rect">
+            <a:avLst/>
+          </a:prstGeom>
+          <a:noFill/>
+        </p:spPr>
+        <p:txBody>
+          <a:bodyPr wrap="square" lIns="36000" rIns="36000" tIns="18000" bIns="18000" anchor="t">
+            <a:spAutoFit/>
+          </a:bodyPr>
+          <a:lstStyle/>
+          <a:p>
+            <a:pPr algn="l">
+              <a:lnSpc>
+                <a:spcPct val="110000"/>
+              </a:lnSpc>
+            </a:pPr>
+            <a:r>
+              <a:rPr sz="1200" b="0">
+                <a:solidFill>
+                  <a:srgbClr val="111111"/>
+                </a:solidFill>
+                <a:latin typeface="Arial"/>
+              </a:rPr>
+              <a:t>Un effet de surprise pour lancer la nouveauté.</a:t>
+            </a:r>
+          </a:p>
+        </p:txBody>
+      </p:sp>
+    </p:spTree>
+  </p:cSld>
+  <p:clrMapOvr>
+    <a:masterClrMapping/>
+  </p:clrMapOvr>
+</p:sld>
+</file>
+
+<file path=ppt/slides/slide21.xml><?xml version="1.0" encoding="utf-8"?>
+<p:sld xmlns:a="http://schemas.openxmlformats.org/drawingml/2006/main" xmlns:p="http://schemas.openxmlformats.org/presentationml/2006/main" xmlns:r="http://schemas.openxmlformats.org/officeDocument/2006/relationships">
+  <p:cSld>
+    <p:spTree>
+      <p:nvGrpSpPr>
+        <p:cNvPr id="1" name=""/>
+        <p:cNvGrpSpPr/>
+        <p:nvPr/>
+      </p:nvGrpSpPr>
+      <p:grpSpPr/>
+      <p:sp>
+        <p:nvSpPr>
+          <p:cNvPr id="2" name="Rectangle 1"/>
+          <p:cNvSpPr/>
+          <p:nvPr/>
+        </p:nvSpPr>
+        <p:spPr>
+          <a:xfrm>
+            <a:off x="0" y="0"/>
+            <a:ext cx="12192119" cy="6858000"/>
+          </a:xfrm>
+          <a:prstGeom prst="rect">
+            <a:avLst/>
+          </a:prstGeom>
+          <a:solidFill>
+            <a:srgbClr val="FFFFFF"/>
+          </a:solidFill>
+          <a:ln>
+            <a:noFill/>
+          </a:ln>
+          <a:effectLst/>
+        </p:spPr>
+        <p:style>
+          <a:lnRef idx="1">
+            <a:schemeClr val="accent1"/>
+          </a:lnRef>
+          <a:fillRef idx="3">
+            <a:schemeClr val="accent1"/>
+          </a:fillRef>
+          <a:effectRef idx="2">
+            <a:schemeClr val="accent1"/>
+          </a:effectRef>
+          <a:fontRef idx="minor">
+            <a:schemeClr val="lt1"/>
+          </a:fontRef>
+        </p:style>
+        <p:txBody>
+          <a:bodyPr rtlCol="0" anchor="ctr"/>
+          <a:lstStyle/>
+          <a:p>
+            <a:pPr algn="ctr"/>
+          </a:p>
+        </p:txBody>
+      </p:sp>
+      <p:sp>
+        <p:nvSpPr>
+          <p:cNvPr id="3" name="Rectangle 2"/>
+          <p:cNvSpPr/>
+          <p:nvPr/>
+        </p:nvSpPr>
+        <p:spPr>
+          <a:xfrm>
+            <a:off x="0" y="0"/>
+            <a:ext cx="180000" cy="6858000"/>
+          </a:xfrm>
+          <a:prstGeom prst="rect">
+            <a:avLst/>
+          </a:prstGeom>
+          <a:solidFill>
+            <a:srgbClr val="E84E0E"/>
+          </a:solidFill>
+          <a:ln>
+            <a:noFill/>
+          </a:ln>
+          <a:effectLst/>
+        </p:spPr>
+        <p:style>
+          <a:lnRef idx="1">
+            <a:schemeClr val="accent1"/>
+          </a:lnRef>
+          <a:fillRef idx="3">
+            <a:schemeClr val="accent1"/>
+          </a:fillRef>
+          <a:effectRef idx="2">
+            <a:schemeClr val="accent1"/>
+          </a:effectRef>
+          <a:fontRef idx="minor">
+            <a:schemeClr val="lt1"/>
+          </a:fontRef>
+        </p:style>
+        <p:txBody>
+          <a:bodyPr rtlCol="0" anchor="ctr"/>
+          <a:lstStyle/>
+          <a:p>
+            <a:pPr algn="ctr"/>
+          </a:p>
+        </p:txBody>
+      </p:sp>
+      <p:pic>
+        <p:nvPicPr>
+          <p:cNvPr id="4" name="Picture 3" descr="logo-taj-seul.png"/>
+          <p:cNvPicPr>
+            <a:picLocks noChangeAspect="1"/>
+          </p:cNvPicPr>
+          <p:nvPr/>
+        </p:nvPicPr>
+        <p:blipFill>
+          <a:blip r:embed="rId2"/>
+          <a:stretch>
+            <a:fillRect/>
+          </a:stretch>
+        </p:blipFill>
+        <p:spPr>
+          <a:xfrm>
+            <a:off x="10248119" y="283729"/>
+            <a:ext cx="1584000" cy="440539"/>
+          </a:xfrm>
+          <a:prstGeom prst="rect">
+            <a:avLst/>
+          </a:prstGeom>
+        </p:spPr>
+      </p:pic>
+      <p:sp>
+        <p:nvSpPr>
+          <p:cNvPr id="5" name="TextBox 4"/>
+          <p:cNvSpPr txBox="1"/>
+          <p:nvPr/>
+        </p:nvSpPr>
+        <p:spPr>
+          <a:xfrm>
+            <a:off x="576000" y="324000"/>
+            <a:ext cx="8640000" cy="288000"/>
+          </a:xfrm>
+          <a:prstGeom prst="rect">
+            <a:avLst/>
+          </a:prstGeom>
+          <a:noFill/>
+        </p:spPr>
+        <p:txBody>
+          <a:bodyPr wrap="square" lIns="36000" rIns="36000" tIns="18000" bIns="18000" anchor="t">
+            <a:spAutoFit/>
+          </a:bodyPr>
+          <a:lstStyle/>
+          <a:p>
+            <a:pPr algn="l">
+              <a:lnSpc>
+                <a:spcPct val="110000"/>
+              </a:lnSpc>
+            </a:pPr>
+            <a:r>
+              <a:rPr sz="1100" b="1">
+                <a:solidFill>
+                  <a:srgbClr val="E84E0E"/>
+                </a:solidFill>
+                <a:latin typeface="Arial"/>
+              </a:rPr>
+              <a:t>RECOMMANDATIONS</a:t>
+            </a:r>
+          </a:p>
+        </p:txBody>
+      </p:sp>
+      <p:sp>
+        <p:nvSpPr>
+          <p:cNvPr id="6" name="TextBox 5"/>
+          <p:cNvSpPr txBox="1"/>
+          <p:nvPr/>
+        </p:nvSpPr>
+        <p:spPr>
+          <a:xfrm>
+            <a:off x="576000" y="576000"/>
+            <a:ext cx="9000000" cy="720000"/>
+          </a:xfrm>
+          <a:prstGeom prst="rect">
+            <a:avLst/>
+          </a:prstGeom>
+          <a:noFill/>
+        </p:spPr>
+        <p:txBody>
+          <a:bodyPr wrap="square" lIns="36000" rIns="36000" tIns="18000" bIns="18000" anchor="t">
+            <a:spAutoFit/>
+          </a:bodyPr>
+          <a:lstStyle/>
+          <a:p>
+            <a:pPr algn="l">
+              <a:lnSpc>
+                <a:spcPct val="110000"/>
+              </a:lnSpc>
+            </a:pPr>
+            <a:r>
+              <a:rPr sz="2600" b="1">
+                <a:solidFill>
+                  <a:srgbClr val="111111"/>
+                </a:solidFill>
+                <a:latin typeface="Arial"/>
+              </a:rPr>
+              <a:t>5 décisions pour faire réagir, puis faire commander</a:t>
+            </a:r>
+          </a:p>
+        </p:txBody>
+      </p:sp>
+      <p:sp>
+        <p:nvSpPr>
+          <p:cNvPr id="7" name="Rectangle 6"/>
+          <p:cNvSpPr/>
+          <p:nvPr/>
+        </p:nvSpPr>
+        <p:spPr>
+          <a:xfrm>
+            <a:off x="576000" y="1278000"/>
+            <a:ext cx="792000" cy="50400"/>
+          </a:xfrm>
+          <a:prstGeom prst="rect">
+            <a:avLst/>
+          </a:prstGeom>
+          <a:solidFill>
+            <a:srgbClr val="159641"/>
+          </a:solidFill>
+          <a:ln>
+            <a:noFill/>
+          </a:ln>
+          <a:effectLst/>
+        </p:spPr>
+        <p:style>
+          <a:lnRef idx="1">
+            <a:schemeClr val="accent1"/>
+          </a:lnRef>
+          <a:fillRef idx="3">
+            <a:schemeClr val="accent1"/>
+          </a:fillRef>
+          <a:effectRef idx="2">
+            <a:schemeClr val="accent1"/>
+          </a:effectRef>
+          <a:fontRef idx="minor">
+            <a:schemeClr val="lt1"/>
+          </a:fontRef>
+        </p:style>
+        <p:txBody>
+          <a:bodyPr rtlCol="0" anchor="ctr"/>
+          <a:lstStyle/>
+          <a:p>
+            <a:pPr algn="ctr"/>
+          </a:p>
+        </p:txBody>
+      </p:sp>
+      <p:sp>
+        <p:nvSpPr>
+          <p:cNvPr id="8" name="TextBox 7"/>
+          <p:cNvSpPr txBox="1"/>
+          <p:nvPr/>
+        </p:nvSpPr>
+        <p:spPr>
+          <a:xfrm>
+            <a:off x="10572119" y="6498000"/>
+            <a:ext cx="1296000" cy="216000"/>
+          </a:xfrm>
+          <a:prstGeom prst="rect">
+            <a:avLst/>
+          </a:prstGeom>
+          <a:noFill/>
+        </p:spPr>
+        <p:txBody>
+          <a:bodyPr wrap="square" lIns="36000" rIns="36000" tIns="18000" bIns="18000" anchor="t">
+            <a:spAutoFit/>
+          </a:bodyPr>
+          <a:lstStyle/>
+          <a:p>
+            <a:pPr algn="r">
+              <a:lnSpc>
+                <a:spcPct val="110000"/>
+              </a:lnSpc>
+            </a:pPr>
+            <a:r>
+              <a:rPr sz="900" b="0">
+                <a:solidFill>
+                  <a:srgbClr val="5A5A5A"/>
+                </a:solidFill>
+                <a:latin typeface="Arial"/>
+              </a:rPr>
+              <a:t>21 / 23</a:t>
+            </a:r>
+          </a:p>
+        </p:txBody>
+      </p:sp>
+      <p:sp>
+        <p:nvSpPr>
+          <p:cNvPr id="9" name="TextBox 8"/>
+          <p:cNvSpPr txBox="1"/>
+          <p:nvPr/>
+        </p:nvSpPr>
+        <p:spPr>
+          <a:xfrm>
+            <a:off x="576000" y="6498000"/>
+            <a:ext cx="7200000" cy="216000"/>
+          </a:xfrm>
+          <a:prstGeom prst="rect">
+            <a:avLst/>
+          </a:prstGeom>
+          <a:noFill/>
+        </p:spPr>
+        <p:txBody>
+          <a:bodyPr wrap="square" lIns="36000" rIns="36000" tIns="18000" bIns="18000" anchor="t">
+            <a:spAutoFit/>
+          </a:bodyPr>
+          <a:lstStyle/>
+          <a:p>
+            <a:pPr algn="l">
+              <a:lnSpc>
+                <a:spcPct val="110000"/>
+              </a:lnSpc>
+            </a:pPr>
+            <a:r>
+              <a:rPr sz="900" b="0">
+                <a:solidFill>
+                  <a:srgbClr val="5A5A5A"/>
+                </a:solidFill>
+                <a:latin typeface="Arial"/>
+              </a:rPr>
+              <a:t>TAJ PLAST · Audit réseaux sociaux · relevé du 27/10/2026</a:t>
+            </a:r>
+          </a:p>
+        </p:txBody>
+      </p:sp>
+      <p:sp>
+        <p:nvSpPr>
+          <p:cNvPr id="10" name="Rounded Rectangle 9"/>
+          <p:cNvSpPr/>
+          <p:nvPr/>
+        </p:nvSpPr>
+        <p:spPr>
+          <a:xfrm>
+            <a:off x="576000" y="1584000"/>
+            <a:ext cx="11052000" cy="846000"/>
+          </a:xfrm>
+          <a:prstGeom prst="roundRect">
+            <a:avLst>
+              <a:gd name="adj" fmla="val 6000"/>
+            </a:avLst>
+          </a:prstGeom>
+          <a:solidFill>
+            <a:srgbClr val="FFFFFF"/>
+          </a:solidFill>
+          <a:ln>
+            <a:noFill/>
+          </a:ln>
+          <a:effectLst/>
+        </p:spPr>
+        <p:style>
+          <a:lnRef idx="1">
+            <a:schemeClr val="accent1"/>
+          </a:lnRef>
+          <a:fillRef idx="3">
+            <a:schemeClr val="accent1"/>
+          </a:fillRef>
+          <a:effectRef idx="2">
+            <a:schemeClr val="accent1"/>
+          </a:effectRef>
+          <a:fontRef idx="minor">
+            <a:schemeClr val="lt1"/>
+          </a:fontRef>
+        </p:style>
+        <p:txBody>
+          <a:bodyPr rtlCol="0" anchor="ctr"/>
+          <a:lstStyle/>
+          <a:p>
+            <a:pPr algn="ctr"/>
+          </a:p>
+        </p:txBody>
+      </p:sp>
+      <p:sp>
+        <p:nvSpPr>
+          <p:cNvPr id="11" name="Rectangle 10"/>
+          <p:cNvSpPr/>
+          <p:nvPr/>
+        </p:nvSpPr>
+        <p:spPr>
+          <a:xfrm>
+            <a:off x="576000" y="1584000"/>
+            <a:ext cx="90000" cy="846000"/>
+          </a:xfrm>
+          <a:prstGeom prst="rect">
+            <a:avLst/>
+          </a:prstGeom>
+          <a:solidFill>
+            <a:srgbClr val="E84E0E"/>
+          </a:solidFill>
+          <a:ln>
+            <a:noFill/>
+          </a:ln>
+          <a:effectLst/>
+        </p:spPr>
+        <p:style>
+          <a:lnRef idx="1">
+            <a:schemeClr val="accent1"/>
+          </a:lnRef>
+          <a:fillRef idx="3">
+            <a:schemeClr val="accent1"/>
+          </a:fillRef>
+          <a:effectRef idx="2">
+            <a:schemeClr val="accent1"/>
+          </a:effectRef>
+          <a:fontRef idx="minor">
+            <a:schemeClr val="lt1"/>
+          </a:fontRef>
+        </p:style>
+        <p:txBody>
+          <a:bodyPr rtlCol="0" anchor="ctr"/>
+          <a:lstStyle/>
+          <a:p>
+            <a:pPr algn="ctr"/>
+          </a:p>
+        </p:txBody>
+      </p:sp>
+      <p:sp>
+        <p:nvSpPr>
+          <p:cNvPr id="12" name="TextBox 11"/>
+          <p:cNvSpPr txBox="1"/>
+          <p:nvPr/>
+        </p:nvSpPr>
+        <p:spPr>
+          <a:xfrm>
+            <a:off x="792000" y="1584000"/>
+            <a:ext cx="503999" cy="846000"/>
+          </a:xfrm>
+          <a:prstGeom prst="rect">
+            <a:avLst/>
+          </a:prstGeom>
+          <a:noFill/>
+        </p:spPr>
+        <p:txBody>
+          <a:bodyPr wrap="square" lIns="36000" rIns="36000" tIns="18000" bIns="18000" anchor="ctr">
+            <a:spAutoFit/>
+          </a:bodyPr>
+          <a:lstStyle/>
+          <a:p>
+            <a:pPr algn="ctr">
+              <a:lnSpc>
+                <a:spcPct val="110000"/>
+              </a:lnSpc>
+            </a:pPr>
+            <a:r>
+              <a:rPr sz="2400" b="1">
+                <a:solidFill>
+                  <a:srgbClr val="E84E0E"/>
+                </a:solidFill>
+                <a:latin typeface="Arial"/>
+              </a:rPr>
+              <a:t>1</a:t>
+            </a:r>
+          </a:p>
+        </p:txBody>
+      </p:sp>
+      <p:sp>
+        <p:nvSpPr>
+          <p:cNvPr id="13" name="Oval 12"/>
+          <p:cNvSpPr/>
+          <p:nvPr/>
+        </p:nvSpPr>
+        <p:spPr>
+          <a:xfrm>
+            <a:off x="1404000" y="1709999"/>
+            <a:ext cx="594000" cy="594000"/>
+          </a:xfrm>
+          <a:prstGeom prst="ellipse">
+            <a:avLst/>
+          </a:prstGeom>
+          <a:solidFill>
+            <a:srgbClr val="159641"/>
+          </a:solidFill>
+          <a:ln>
+            <a:noFill/>
+          </a:ln>
+          <a:effectLst/>
+        </p:spPr>
+        <p:style>
+          <a:lnRef idx="1">
+            <a:schemeClr val="accent1"/>
+          </a:lnRef>
+          <a:fillRef idx="3">
+            <a:schemeClr val="accent1"/>
+          </a:fillRef>
+          <a:effectRef idx="2">
+            <a:schemeClr val="accent1"/>
+          </a:effectRef>
+          <a:fontRef idx="minor">
+            <a:schemeClr val="lt1"/>
+          </a:fontRef>
+        </p:style>
+        <p:txBody>
+          <a:bodyPr rtlCol="0" anchor="ctr"/>
+          <a:lstStyle/>
+          <a:p>
+            <a:pPr algn="ctr"/>
+          </a:p>
+        </p:txBody>
+      </p:sp>
+      <p:pic>
+        <p:nvPicPr>
+          <p:cNvPr id="14" name="Picture 13" descr="repeat_bl.png"/>
+          <p:cNvPicPr>
+            <a:picLocks noChangeAspect="1"/>
+          </p:cNvPicPr>
+          <p:nvPr/>
+        </p:nvPicPr>
+        <p:blipFill>
+          <a:blip r:embed="rId3"/>
+          <a:stretch>
+            <a:fillRect/>
+          </a:stretch>
+        </p:blipFill>
+        <p:spPr>
+          <a:xfrm>
+            <a:off x="1534680" y="1840679"/>
+            <a:ext cx="332640" cy="332640"/>
+          </a:xfrm>
+          <a:prstGeom prst="rect">
+            <a:avLst/>
+          </a:prstGeom>
+        </p:spPr>
+      </p:pic>
+      <p:sp>
+        <p:nvSpPr>
+          <p:cNvPr id="15" name="TextBox 14"/>
+          <p:cNvSpPr txBox="1"/>
+          <p:nvPr/>
+        </p:nvSpPr>
+        <p:spPr>
+          <a:xfrm>
+            <a:off x="2196000" y="1584000"/>
+            <a:ext cx="3060000" cy="846000"/>
+          </a:xfrm>
+          <a:prstGeom prst="rect">
+            <a:avLst/>
+          </a:prstGeom>
+          <a:noFill/>
+        </p:spPr>
+        <p:txBody>
+          <a:bodyPr wrap="square" lIns="36000" rIns="36000" tIns="18000" bIns="18000" anchor="ctr">
+            <a:spAutoFit/>
+          </a:bodyPr>
+          <a:lstStyle/>
+          <a:p>
+            <a:pPr algn="l">
+              <a:lnSpc>
+                <a:spcPct val="110000"/>
+              </a:lnSpc>
+            </a:pPr>
+            <a:r>
+              <a:rPr sz="1500" b="1">
+                <a:solidFill>
+                  <a:srgbClr val="111111"/>
+                </a:solidFill>
+                <a:latin typeface="Arial"/>
+              </a:rPr>
+              <a:t>Publier moins, mieux</a:t>
+            </a:r>
+          </a:p>
+        </p:txBody>
+      </p:sp>
+      <p:sp>
+        <p:nvSpPr>
+          <p:cNvPr id="16" name="TextBox 15"/>
+          <p:cNvSpPr txBox="1"/>
+          <p:nvPr/>
+        </p:nvSpPr>
+        <p:spPr>
+          <a:xfrm>
+            <a:off x="5256000" y="1584000"/>
+            <a:ext cx="6228000" cy="846000"/>
+          </a:xfrm>
+          <a:prstGeom prst="rect">
+            <a:avLst/>
+          </a:prstGeom>
+          <a:noFill/>
+        </p:spPr>
+        <p:txBody>
+          <a:bodyPr wrap="square" lIns="36000" rIns="36000" tIns="18000" bIns="18000" anchor="ctr">
+            <a:spAutoFit/>
+          </a:bodyPr>
+          <a:lstStyle/>
+          <a:p>
+            <a:pPr algn="l">
+              <a:lnSpc>
+                <a:spcPct val="110000"/>
+              </a:lnSpc>
+            </a:pPr>
+            <a:r>
+              <a:rPr sz="1250" b="0">
+                <a:solidFill>
+                  <a:srgbClr val="5A5A5A"/>
+                </a:solidFill>
+                <a:latin typeface="Arial"/>
+              </a:rPr>
+              <a:t>Une publication par jour au lieu de trois, jamais deux fois le même visuel dans le mois.</a:t>
+            </a:r>
+          </a:p>
+        </p:txBody>
+      </p:sp>
+      <p:sp>
+        <p:nvSpPr>
+          <p:cNvPr id="17" name="Rounded Rectangle 16"/>
+          <p:cNvSpPr/>
+          <p:nvPr/>
+        </p:nvSpPr>
+        <p:spPr>
+          <a:xfrm>
+            <a:off x="576000" y="2538000"/>
+            <a:ext cx="11052000" cy="846000"/>
+          </a:xfrm>
+          <a:prstGeom prst="roundRect">
+            <a:avLst>
+              <a:gd name="adj" fmla="val 6000"/>
+            </a:avLst>
+          </a:prstGeom>
+          <a:solidFill>
+            <a:srgbClr val="F4F4F2"/>
+          </a:solidFill>
+          <a:ln>
+            <a:noFill/>
+          </a:ln>
+          <a:effectLst/>
+        </p:spPr>
+        <p:style>
+          <a:lnRef idx="1">
+            <a:schemeClr val="accent1"/>
+          </a:lnRef>
+          <a:fillRef idx="3">
+            <a:schemeClr val="accent1"/>
+          </a:fillRef>
+          <a:effectRef idx="2">
+            <a:schemeClr val="accent1"/>
+          </a:effectRef>
+          <a:fontRef idx="minor">
+            <a:schemeClr val="lt1"/>
+          </a:fontRef>
+        </p:style>
+        <p:txBody>
+          <a:bodyPr rtlCol="0" anchor="ctr"/>
+          <a:lstStyle/>
+          <a:p>
+            <a:pPr algn="ctr"/>
+          </a:p>
+        </p:txBody>
+      </p:sp>
+      <p:sp>
+        <p:nvSpPr>
+          <p:cNvPr id="18" name="Rectangle 17"/>
+          <p:cNvSpPr/>
+          <p:nvPr/>
+        </p:nvSpPr>
+        <p:spPr>
+          <a:xfrm>
+            <a:off x="576000" y="2538000"/>
+            <a:ext cx="90000" cy="846000"/>
+          </a:xfrm>
+          <a:prstGeom prst="rect">
+            <a:avLst/>
+          </a:prstGeom>
+          <a:solidFill>
+            <a:srgbClr val="E84E0E"/>
+          </a:solidFill>
+          <a:ln>
+            <a:noFill/>
+          </a:ln>
+          <a:effectLst/>
+        </p:spPr>
+        <p:style>
+          <a:lnRef idx="1">
+            <a:schemeClr val="accent1"/>
+          </a:lnRef>
+          <a:fillRef idx="3">
+            <a:schemeClr val="accent1"/>
+          </a:fillRef>
+          <a:effectRef idx="2">
+            <a:schemeClr val="accent1"/>
+          </a:effectRef>
+          <a:fontRef idx="minor">
+            <a:schemeClr val="lt1"/>
+          </a:fontRef>
+        </p:style>
+        <p:txBody>
+          <a:bodyPr rtlCol="0" anchor="ctr"/>
+          <a:lstStyle/>
+          <a:p>
+            <a:pPr algn="ctr"/>
+          </a:p>
+        </p:txBody>
+      </p:sp>
+      <p:sp>
+        <p:nvSpPr>
+          <p:cNvPr id="19" name="TextBox 18"/>
+          <p:cNvSpPr txBox="1"/>
+          <p:nvPr/>
+        </p:nvSpPr>
+        <p:spPr>
+          <a:xfrm>
+            <a:off x="792000" y="2538000"/>
+            <a:ext cx="503999" cy="846000"/>
+          </a:xfrm>
+          <a:prstGeom prst="rect">
+            <a:avLst/>
+          </a:prstGeom>
+          <a:noFill/>
+        </p:spPr>
+        <p:txBody>
+          <a:bodyPr wrap="square" lIns="36000" rIns="36000" tIns="18000" bIns="18000" anchor="ctr">
+            <a:spAutoFit/>
+          </a:bodyPr>
+          <a:lstStyle/>
+          <a:p>
+            <a:pPr algn="ctr">
+              <a:lnSpc>
+                <a:spcPct val="110000"/>
+              </a:lnSpc>
+            </a:pPr>
+            <a:r>
+              <a:rPr sz="2400" b="1">
+                <a:solidFill>
+                  <a:srgbClr val="E84E0E"/>
+                </a:solidFill>
+                <a:latin typeface="Arial"/>
+              </a:rPr>
+              <a:t>2</a:t>
+            </a:r>
+          </a:p>
+        </p:txBody>
+      </p:sp>
+      <p:sp>
+        <p:nvSpPr>
+          <p:cNvPr id="20" name="Oval 19"/>
+          <p:cNvSpPr/>
+          <p:nvPr/>
+        </p:nvSpPr>
+        <p:spPr>
+          <a:xfrm>
+            <a:off x="1404000" y="2663999"/>
+            <a:ext cx="594000" cy="594000"/>
+          </a:xfrm>
+          <a:prstGeom prst="ellipse">
+            <a:avLst/>
+          </a:prstGeom>
+          <a:solidFill>
+            <a:srgbClr val="159641"/>
+          </a:solidFill>
+          <a:ln>
+            <a:noFill/>
+          </a:ln>
+          <a:effectLst/>
+        </p:spPr>
+        <p:style>
+          <a:lnRef idx="1">
+            <a:schemeClr val="accent1"/>
+          </a:lnRef>
+          <a:fillRef idx="3">
+            <a:schemeClr val="accent1"/>
+          </a:fillRef>
+          <a:effectRef idx="2">
+            <a:schemeClr val="accent1"/>
+          </a:effectRef>
+          <a:fontRef idx="minor">
+            <a:schemeClr val="lt1"/>
+          </a:fontRef>
+        </p:style>
+        <p:txBody>
+          <a:bodyPr rtlCol="0" anchor="ctr"/>
+          <a:lstStyle/>
+          <a:p>
+            <a:pPr algn="ctr"/>
+          </a:p>
+        </p:txBody>
+      </p:sp>
+      <p:pic>
+        <p:nvPicPr>
+          <p:cNvPr id="21" name="Picture 20" descr="pencil_bl.png"/>
+          <p:cNvPicPr>
+            <a:picLocks noChangeAspect="1"/>
+          </p:cNvPicPr>
+          <p:nvPr/>
+        </p:nvPicPr>
+        <p:blipFill>
+          <a:blip r:embed="rId4"/>
+          <a:stretch>
+            <a:fillRect/>
+          </a:stretch>
+        </p:blipFill>
+        <p:spPr>
+          <a:xfrm>
+            <a:off x="1534680" y="2794679"/>
+            <a:ext cx="332640" cy="332640"/>
+          </a:xfrm>
+          <a:prstGeom prst="rect">
+            <a:avLst/>
+          </a:prstGeom>
+        </p:spPr>
+      </p:pic>
+      <p:sp>
+        <p:nvSpPr>
+          <p:cNvPr id="22" name="TextBox 21"/>
+          <p:cNvSpPr txBox="1"/>
+          <p:nvPr/>
+        </p:nvSpPr>
+        <p:spPr>
+          <a:xfrm>
+            <a:off x="2196000" y="2538000"/>
+            <a:ext cx="3060000" cy="846000"/>
+          </a:xfrm>
+          <a:prstGeom prst="rect">
+            <a:avLst/>
+          </a:prstGeom>
+          <a:noFill/>
+        </p:spPr>
+        <p:txBody>
+          <a:bodyPr wrap="square" lIns="36000" rIns="36000" tIns="18000" bIns="18000" anchor="ctr">
+            <a:spAutoFit/>
+          </a:bodyPr>
+          <a:lstStyle/>
+          <a:p>
+            <a:pPr algn="l">
+              <a:lnSpc>
+                <a:spcPct val="110000"/>
+              </a:lnSpc>
+            </a:pPr>
+            <a:r>
+              <a:rPr sz="1500" b="1">
+                <a:solidFill>
+                  <a:srgbClr val="111111"/>
+                </a:solidFill>
+                <a:latin typeface="Arial"/>
+              </a:rPr>
+              <a:t>Écrire un vrai texte</a:t>
+            </a:r>
+          </a:p>
+        </p:txBody>
+      </p:sp>
+      <p:sp>
+        <p:nvSpPr>
+          <p:cNvPr id="23" name="TextBox 22"/>
+          <p:cNvSpPr txBox="1"/>
+          <p:nvPr/>
+        </p:nvSpPr>
+        <p:spPr>
+          <a:xfrm>
+            <a:off x="5256000" y="2538000"/>
+            <a:ext cx="6228000" cy="846000"/>
+          </a:xfrm>
+          <a:prstGeom prst="rect">
+            <a:avLst/>
+          </a:prstGeom>
+          <a:noFill/>
+        </p:spPr>
+        <p:txBody>
+          <a:bodyPr wrap="square" lIns="36000" rIns="36000" tIns="18000" bIns="18000" anchor="ctr">
+            <a:spAutoFit/>
+          </a:bodyPr>
+          <a:lstStyle/>
+          <a:p>
+            <a:pPr algn="l">
+              <a:lnSpc>
+                <a:spcPct val="110000"/>
+              </a:lnSpc>
+            </a:pPr>
+            <a:r>
+              <a:rPr sz="1250" b="0">
+                <a:solidFill>
+                  <a:srgbClr val="5A5A5A"/>
+                </a:solidFill>
+                <a:latin typeface="Arial"/>
+              </a:rPr>
+              <a:t>Bénéfice, question, numéro : la règle des avant / après, sur chaque publication.</a:t>
+            </a:r>
+          </a:p>
+        </p:txBody>
+      </p:sp>
+      <p:sp>
+        <p:nvSpPr>
+          <p:cNvPr id="24" name="Rounded Rectangle 23"/>
+          <p:cNvSpPr/>
+          <p:nvPr/>
+        </p:nvSpPr>
+        <p:spPr>
+          <a:xfrm>
+            <a:off x="576000" y="3492000"/>
+            <a:ext cx="11052000" cy="846000"/>
+          </a:xfrm>
+          <a:prstGeom prst="roundRect">
+            <a:avLst>
+              <a:gd name="adj" fmla="val 6000"/>
+            </a:avLst>
+          </a:prstGeom>
+          <a:solidFill>
+            <a:srgbClr val="FFFFFF"/>
+          </a:solidFill>
+          <a:ln>
+            <a:noFill/>
+          </a:ln>
+          <a:effectLst/>
+        </p:spPr>
+        <p:style>
+          <a:lnRef idx="1">
+            <a:schemeClr val="accent1"/>
+          </a:lnRef>
+          <a:fillRef idx="3">
+            <a:schemeClr val="accent1"/>
+          </a:fillRef>
+          <a:effectRef idx="2">
+            <a:schemeClr val="accent1"/>
+          </a:effectRef>
+          <a:fontRef idx="minor">
+            <a:schemeClr val="lt1"/>
+          </a:fontRef>
+        </p:style>
+        <p:txBody>
+          <a:bodyPr rtlCol="0" anchor="ctr"/>
+          <a:lstStyle/>
+          <a:p>
+            <a:pPr algn="ctr"/>
+          </a:p>
+        </p:txBody>
+      </p:sp>
+      <p:sp>
+        <p:nvSpPr>
+          <p:cNvPr id="25" name="Rectangle 24"/>
+          <p:cNvSpPr/>
+          <p:nvPr/>
+        </p:nvSpPr>
+        <p:spPr>
+          <a:xfrm>
+            <a:off x="576000" y="3492000"/>
+            <a:ext cx="90000" cy="846000"/>
+          </a:xfrm>
+          <a:prstGeom prst="rect">
+            <a:avLst/>
+          </a:prstGeom>
+          <a:solidFill>
+            <a:srgbClr val="E84E0E"/>
+          </a:solidFill>
+          <a:ln>
+            <a:noFill/>
+          </a:ln>
+          <a:effectLst/>
+        </p:spPr>
+        <p:style>
+          <a:lnRef idx="1">
+            <a:schemeClr val="accent1"/>
+          </a:lnRef>
+          <a:fillRef idx="3">
+            <a:schemeClr val="accent1"/>
+          </a:fillRef>
+          <a:effectRef idx="2">
+            <a:schemeClr val="accent1"/>
+          </a:effectRef>
+          <a:fontRef idx="minor">
+            <a:schemeClr val="lt1"/>
+          </a:fontRef>
+        </p:style>
+        <p:txBody>
+          <a:bodyPr rtlCol="0" anchor="ctr"/>
+          <a:lstStyle/>
+          <a:p>
+            <a:pPr algn="ctr"/>
+          </a:p>
+        </p:txBody>
+      </p:sp>
+      <p:sp>
+        <p:nvSpPr>
+          <p:cNvPr id="26" name="TextBox 25"/>
+          <p:cNvSpPr txBox="1"/>
+          <p:nvPr/>
+        </p:nvSpPr>
+        <p:spPr>
+          <a:xfrm>
+            <a:off x="792000" y="3492000"/>
+            <a:ext cx="503999" cy="846000"/>
+          </a:xfrm>
+          <a:prstGeom prst="rect">
+            <a:avLst/>
+          </a:prstGeom>
+          <a:noFill/>
+        </p:spPr>
+        <p:txBody>
+          <a:bodyPr wrap="square" lIns="36000" rIns="36000" tIns="18000" bIns="18000" anchor="ctr">
+            <a:spAutoFit/>
+          </a:bodyPr>
+          <a:lstStyle/>
+          <a:p>
+            <a:pPr algn="ctr">
+              <a:lnSpc>
+                <a:spcPct val="110000"/>
+              </a:lnSpc>
+            </a:pPr>
+            <a:r>
+              <a:rPr sz="2400" b="1">
+                <a:solidFill>
+                  <a:srgbClr val="E84E0E"/>
+                </a:solidFill>
+                <a:latin typeface="Arial"/>
+              </a:rPr>
+              <a:t>3</a:t>
+            </a:r>
+          </a:p>
+        </p:txBody>
+      </p:sp>
+      <p:sp>
+        <p:nvSpPr>
+          <p:cNvPr id="27" name="Oval 26"/>
+          <p:cNvSpPr/>
+          <p:nvPr/>
+        </p:nvSpPr>
+        <p:spPr>
+          <a:xfrm>
+            <a:off x="1404000" y="3617999"/>
+            <a:ext cx="594000" cy="594000"/>
+          </a:xfrm>
+          <a:prstGeom prst="ellipse">
+            <a:avLst/>
+          </a:prstGeom>
+          <a:solidFill>
+            <a:srgbClr val="159641"/>
+          </a:solidFill>
+          <a:ln>
+            <a:noFill/>
+          </a:ln>
+          <a:effectLst/>
+        </p:spPr>
+        <p:style>
+          <a:lnRef idx="1">
+            <a:schemeClr val="accent1"/>
+          </a:lnRef>
+          <a:fillRef idx="3">
+            <a:schemeClr val="accent1"/>
+          </a:fillRef>
+          <a:effectRef idx="2">
+            <a:schemeClr val="accent1"/>
+          </a:effectRef>
+          <a:fontRef idx="minor">
+            <a:schemeClr val="lt1"/>
+          </a:fontRef>
+        </p:style>
+        <p:txBody>
+          <a:bodyPr rtlCol="0" anchor="ctr"/>
+          <a:lstStyle/>
+          <a:p>
+            <a:pPr algn="ctr"/>
+          </a:p>
+        </p:txBody>
+      </p:sp>
+      <p:pic>
+        <p:nvPicPr>
+          <p:cNvPr id="28" name="Picture 27" descr="video_bl.png"/>
+          <p:cNvPicPr>
+            <a:picLocks noChangeAspect="1"/>
+          </p:cNvPicPr>
+          <p:nvPr/>
+        </p:nvPicPr>
+        <p:blipFill>
+          <a:blip r:embed="rId5"/>
+          <a:stretch>
+            <a:fillRect/>
+          </a:stretch>
+        </p:blipFill>
+        <p:spPr>
+          <a:xfrm>
+            <a:off x="1534680" y="3748679"/>
+            <a:ext cx="332640" cy="332640"/>
+          </a:xfrm>
+          <a:prstGeom prst="rect">
+            <a:avLst/>
+          </a:prstGeom>
+        </p:spPr>
+      </p:pic>
+      <p:sp>
+        <p:nvSpPr>
+          <p:cNvPr id="29" name="TextBox 28"/>
+          <p:cNvSpPr txBox="1"/>
+          <p:nvPr/>
+        </p:nvSpPr>
+        <p:spPr>
+          <a:xfrm>
+            <a:off x="2196000" y="3492000"/>
+            <a:ext cx="3060000" cy="846000"/>
+          </a:xfrm>
+          <a:prstGeom prst="rect">
+            <a:avLst/>
+          </a:prstGeom>
+          <a:noFill/>
+        </p:spPr>
+        <p:txBody>
+          <a:bodyPr wrap="square" lIns="36000" rIns="36000" tIns="18000" bIns="18000" anchor="ctr">
+            <a:spAutoFit/>
+          </a:bodyPr>
+          <a:lstStyle/>
+          <a:p>
+            <a:pPr algn="l">
+              <a:lnSpc>
+                <a:spcPct val="110000"/>
+              </a:lnSpc>
+            </a:pPr>
+            <a:r>
+              <a:rPr sz="1500" b="1">
+                <a:solidFill>
+                  <a:srgbClr val="111111"/>
+                </a:solidFill>
+                <a:latin typeface="Arial"/>
+              </a:rPr>
+              <a:t>Passer à la vidéo</a:t>
+            </a:r>
+          </a:p>
+        </p:txBody>
+      </p:sp>
+      <p:sp>
+        <p:nvSpPr>
+          <p:cNvPr id="30" name="TextBox 29"/>
+          <p:cNvSpPr txBox="1"/>
+          <p:nvPr/>
+        </p:nvSpPr>
+        <p:spPr>
+          <a:xfrm>
+            <a:off x="5256000" y="3492000"/>
+            <a:ext cx="6228000" cy="846000"/>
+          </a:xfrm>
+          <a:prstGeom prst="rect">
+            <a:avLst/>
+          </a:prstGeom>
+          <a:noFill/>
+        </p:spPr>
+        <p:txBody>
+          <a:bodyPr wrap="square" lIns="36000" rIns="36000" tIns="18000" bIns="18000" anchor="ctr">
+            <a:spAutoFit/>
+          </a:bodyPr>
+          <a:lstStyle/>
+          <a:p>
+            <a:pPr algn="l">
+              <a:lnSpc>
+                <a:spcPct val="110000"/>
+              </a:lnSpc>
+            </a:pPr>
+            <a:r>
+              <a:rPr sz="1250" b="0">
+                <a:solidFill>
+                  <a:srgbClr val="5A5A5A"/>
+                </a:solidFill>
+                <a:latin typeface="Arial"/>
+              </a:rPr>
+              <a:t>Deux vidéos courtes par semaine : l’usine, un produit en usage, une livraison.</a:t>
+            </a:r>
+          </a:p>
+        </p:txBody>
+      </p:sp>
+      <p:sp>
+        <p:nvSpPr>
+          <p:cNvPr id="31" name="Rounded Rectangle 30"/>
+          <p:cNvSpPr/>
+          <p:nvPr/>
+        </p:nvSpPr>
+        <p:spPr>
+          <a:xfrm>
+            <a:off x="576000" y="4446000"/>
+            <a:ext cx="11052000" cy="846000"/>
+          </a:xfrm>
+          <a:prstGeom prst="roundRect">
+            <a:avLst>
+              <a:gd name="adj" fmla="val 6000"/>
+            </a:avLst>
+          </a:prstGeom>
+          <a:solidFill>
+            <a:srgbClr val="F4F4F2"/>
+          </a:solidFill>
+          <a:ln>
+            <a:noFill/>
+          </a:ln>
+          <a:effectLst/>
+        </p:spPr>
+        <p:style>
+          <a:lnRef idx="1">
+            <a:schemeClr val="accent1"/>
+          </a:lnRef>
+          <a:fillRef idx="3">
+            <a:schemeClr val="accent1"/>
+          </a:fillRef>
+          <a:effectRef idx="2">
+            <a:schemeClr val="accent1"/>
+          </a:effectRef>
+          <a:fontRef idx="minor">
+            <a:schemeClr val="lt1"/>
+          </a:fontRef>
+        </p:style>
+        <p:txBody>
+          <a:bodyPr rtlCol="0" anchor="ctr"/>
+          <a:lstStyle/>
+          <a:p>
+            <a:pPr algn="ctr"/>
+          </a:p>
+        </p:txBody>
+      </p:sp>
+      <p:sp>
+        <p:nvSpPr>
+          <p:cNvPr id="32" name="Rectangle 31"/>
+          <p:cNvSpPr/>
+          <p:nvPr/>
+        </p:nvSpPr>
+        <p:spPr>
+          <a:xfrm>
+            <a:off x="576000" y="4446000"/>
+            <a:ext cx="90000" cy="846000"/>
+          </a:xfrm>
+          <a:prstGeom prst="rect">
+            <a:avLst/>
+          </a:prstGeom>
+          <a:solidFill>
+            <a:srgbClr val="E84E0E"/>
+          </a:solidFill>
+          <a:ln>
+            <a:noFill/>
+          </a:ln>
+          <a:effectLst/>
+        </p:spPr>
+        <p:style>
+          <a:lnRef idx="1">
+            <a:schemeClr val="accent1"/>
+          </a:lnRef>
+          <a:fillRef idx="3">
+            <a:schemeClr val="accent1"/>
+          </a:fillRef>
+          <a:effectRef idx="2">
+            <a:schemeClr val="accent1"/>
+          </a:effectRef>
+          <a:fontRef idx="minor">
+            <a:schemeClr val="lt1"/>
+          </a:fontRef>
+        </p:style>
+        <p:txBody>
+          <a:bodyPr rtlCol="0" anchor="ctr"/>
+          <a:lstStyle/>
+          <a:p>
+            <a:pPr algn="ctr"/>
+          </a:p>
+        </p:txBody>
+      </p:sp>
+      <p:sp>
+        <p:nvSpPr>
+          <p:cNvPr id="33" name="TextBox 32"/>
+          <p:cNvSpPr txBox="1"/>
+          <p:nvPr/>
+        </p:nvSpPr>
+        <p:spPr>
+          <a:xfrm>
+            <a:off x="792000" y="4446000"/>
+            <a:ext cx="503999" cy="846000"/>
+          </a:xfrm>
+          <a:prstGeom prst="rect">
+            <a:avLst/>
+          </a:prstGeom>
+          <a:noFill/>
+        </p:spPr>
+        <p:txBody>
+          <a:bodyPr wrap="square" lIns="36000" rIns="36000" tIns="18000" bIns="18000" anchor="ctr">
+            <a:spAutoFit/>
+          </a:bodyPr>
+          <a:lstStyle/>
+          <a:p>
+            <a:pPr algn="ctr">
+              <a:lnSpc>
+                <a:spcPct val="110000"/>
+              </a:lnSpc>
+            </a:pPr>
+            <a:r>
+              <a:rPr sz="2400" b="1">
+                <a:solidFill>
+                  <a:srgbClr val="E84E0E"/>
+                </a:solidFill>
+                <a:latin typeface="Arial"/>
+              </a:rPr>
+              <a:t>4</a:t>
+            </a:r>
+          </a:p>
+        </p:txBody>
+      </p:sp>
+      <p:sp>
+        <p:nvSpPr>
+          <p:cNvPr id="34" name="Oval 33"/>
+          <p:cNvSpPr/>
+          <p:nvPr/>
+        </p:nvSpPr>
+        <p:spPr>
+          <a:xfrm>
+            <a:off x="1404000" y="4571999"/>
+            <a:ext cx="594000" cy="594000"/>
+          </a:xfrm>
+          <a:prstGeom prst="ellipse">
+            <a:avLst/>
+          </a:prstGeom>
+          <a:solidFill>
+            <a:srgbClr val="159641"/>
+          </a:solidFill>
+          <a:ln>
+            <a:noFill/>
+          </a:ln>
+          <a:effectLst/>
+        </p:spPr>
+        <p:style>
+          <a:lnRef idx="1">
+            <a:schemeClr val="accent1"/>
+          </a:lnRef>
+          <a:fillRef idx="3">
+            <a:schemeClr val="accent1"/>
+          </a:fillRef>
+          <a:effectRef idx="2">
+            <a:schemeClr val="accent1"/>
+          </a:effectRef>
+          <a:fontRef idx="minor">
+            <a:schemeClr val="lt1"/>
+          </a:fontRef>
+        </p:style>
+        <p:txBody>
+          <a:bodyPr rtlCol="0" anchor="ctr"/>
+          <a:lstStyle/>
+          <a:p>
+            <a:pPr algn="ctr"/>
+          </a:p>
+        </p:txBody>
+      </p:sp>
+      <p:pic>
+        <p:nvPicPr>
+          <p:cNvPr id="35" name="Picture 34" descr="currency-dollar_bl.png"/>
+          <p:cNvPicPr>
+            <a:picLocks noChangeAspect="1"/>
+          </p:cNvPicPr>
+          <p:nvPr/>
+        </p:nvPicPr>
+        <p:blipFill>
+          <a:blip r:embed="rId6"/>
+          <a:stretch>
+            <a:fillRect/>
+          </a:stretch>
+        </p:blipFill>
+        <p:spPr>
+          <a:xfrm>
+            <a:off x="1534680" y="4702679"/>
+            <a:ext cx="332640" cy="332640"/>
+          </a:xfrm>
+          <a:prstGeom prst="rect">
+            <a:avLst/>
+          </a:prstGeom>
+        </p:spPr>
+      </p:pic>
+      <p:sp>
+        <p:nvSpPr>
+          <p:cNvPr id="36" name="TextBox 35"/>
+          <p:cNvSpPr txBox="1"/>
+          <p:nvPr/>
+        </p:nvSpPr>
+        <p:spPr>
+          <a:xfrm>
+            <a:off x="2196000" y="4446000"/>
+            <a:ext cx="3060000" cy="846000"/>
+          </a:xfrm>
+          <a:prstGeom prst="rect">
+            <a:avLst/>
+          </a:prstGeom>
+          <a:noFill/>
+        </p:spPr>
+        <p:txBody>
+          <a:bodyPr wrap="square" lIns="36000" rIns="36000" tIns="18000" bIns="18000" anchor="ctr">
+            <a:spAutoFit/>
+          </a:bodyPr>
+          <a:lstStyle/>
+          <a:p>
+            <a:pPr algn="l">
+              <a:lnSpc>
+                <a:spcPct val="110000"/>
+              </a:lnSpc>
+            </a:pPr>
+            <a:r>
+              <a:rPr sz="1500" b="1">
+                <a:solidFill>
+                  <a:srgbClr val="111111"/>
+                </a:solidFill>
+                <a:latin typeface="Arial"/>
+              </a:rPr>
+              <a:t>Afficher les prix</a:t>
+            </a:r>
+          </a:p>
+        </p:txBody>
+      </p:sp>
+      <p:sp>
+        <p:nvSpPr>
+          <p:cNvPr id="37" name="TextBox 36"/>
+          <p:cNvSpPr txBox="1"/>
+          <p:nvPr/>
+        </p:nvSpPr>
+        <p:spPr>
+          <a:xfrm>
+            <a:off x="5256000" y="4446000"/>
+            <a:ext cx="6228000" cy="846000"/>
+          </a:xfrm>
+          <a:prstGeom prst="rect">
+            <a:avLst/>
+          </a:prstGeom>
+          <a:noFill/>
+        </p:spPr>
+        <p:txBody>
+          <a:bodyPr wrap="square" lIns="36000" rIns="36000" tIns="18000" bIns="18000" anchor="ctr">
+            <a:spAutoFit/>
+          </a:bodyPr>
+          <a:lstStyle/>
+          <a:p>
+            <a:pPr algn="l">
+              <a:lnSpc>
+                <a:spcPct val="110000"/>
+              </a:lnSpc>
+            </a:pPr>
+            <a:r>
+              <a:rPr sz="1250" b="0">
+                <a:solidFill>
+                  <a:srgbClr val="5A5A5A"/>
+                </a:solidFill>
+                <a:latin typeface="Arial"/>
+              </a:rPr>
+              <a:t>Une offre datée par mois, comme Metaplast, avec un prix et une date de fin.</a:t>
+            </a:r>
+          </a:p>
+        </p:txBody>
+      </p:sp>
+      <p:sp>
+        <p:nvSpPr>
+          <p:cNvPr id="38" name="Rounded Rectangle 37"/>
+          <p:cNvSpPr/>
+          <p:nvPr/>
+        </p:nvSpPr>
+        <p:spPr>
+          <a:xfrm>
+            <a:off x="576000" y="5400000"/>
+            <a:ext cx="11052000" cy="846000"/>
+          </a:xfrm>
+          <a:prstGeom prst="roundRect">
+            <a:avLst>
+              <a:gd name="adj" fmla="val 6000"/>
+            </a:avLst>
+          </a:prstGeom>
+          <a:solidFill>
+            <a:srgbClr val="FFFFFF"/>
+          </a:solidFill>
+          <a:ln>
+            <a:noFill/>
+          </a:ln>
+          <a:effectLst/>
+        </p:spPr>
+        <p:style>
+          <a:lnRef idx="1">
+            <a:schemeClr val="accent1"/>
+          </a:lnRef>
+          <a:fillRef idx="3">
+            <a:schemeClr val="accent1"/>
+          </a:fillRef>
+          <a:effectRef idx="2">
+            <a:schemeClr val="accent1"/>
+          </a:effectRef>
+          <a:fontRef idx="minor">
+            <a:schemeClr val="lt1"/>
+          </a:fontRef>
+        </p:style>
+        <p:txBody>
+          <a:bodyPr rtlCol="0" anchor="ctr"/>
+          <a:lstStyle/>
+          <a:p>
+            <a:pPr algn="ctr"/>
+          </a:p>
+        </p:txBody>
+      </p:sp>
+      <p:sp>
+        <p:nvSpPr>
+          <p:cNvPr id="39" name="Rectangle 38"/>
+          <p:cNvSpPr/>
+          <p:nvPr/>
+        </p:nvSpPr>
+        <p:spPr>
+          <a:xfrm>
+            <a:off x="576000" y="5400000"/>
+            <a:ext cx="90000" cy="846000"/>
+          </a:xfrm>
+          <a:prstGeom prst="rect">
+            <a:avLst/>
+          </a:prstGeom>
+          <a:solidFill>
+            <a:srgbClr val="E84E0E"/>
+          </a:solidFill>
+          <a:ln>
+            <a:noFill/>
+          </a:ln>
+          <a:effectLst/>
+        </p:spPr>
+        <p:style>
+          <a:lnRef idx="1">
+            <a:schemeClr val="accent1"/>
+          </a:lnRef>
+          <a:fillRef idx="3">
+            <a:schemeClr val="accent1"/>
+          </a:fillRef>
+          <a:effectRef idx="2">
+            <a:schemeClr val="accent1"/>
+          </a:effectRef>
+          <a:fontRef idx="minor">
+            <a:schemeClr val="lt1"/>
+          </a:fontRef>
+        </p:style>
+        <p:txBody>
+          <a:bodyPr rtlCol="0" anchor="ctr"/>
+          <a:lstStyle/>
+          <a:p>
+            <a:pPr algn="ctr"/>
+          </a:p>
+        </p:txBody>
+      </p:sp>
+      <p:sp>
+        <p:nvSpPr>
+          <p:cNvPr id="40" name="TextBox 39"/>
+          <p:cNvSpPr txBox="1"/>
+          <p:nvPr/>
+        </p:nvSpPr>
+        <p:spPr>
+          <a:xfrm>
+            <a:off x="792000" y="5400000"/>
+            <a:ext cx="503999" cy="846000"/>
+          </a:xfrm>
+          <a:prstGeom prst="rect">
+            <a:avLst/>
+          </a:prstGeom>
+          <a:noFill/>
+        </p:spPr>
+        <p:txBody>
+          <a:bodyPr wrap="square" lIns="36000" rIns="36000" tIns="18000" bIns="18000" anchor="ctr">
+            <a:spAutoFit/>
+          </a:bodyPr>
+          <a:lstStyle/>
+          <a:p>
+            <a:pPr algn="ctr">
+              <a:lnSpc>
+                <a:spcPct val="110000"/>
+              </a:lnSpc>
+            </a:pPr>
+            <a:r>
+              <a:rPr sz="2400" b="1">
+                <a:solidFill>
+                  <a:srgbClr val="E84E0E"/>
+                </a:solidFill>
+                <a:latin typeface="Arial"/>
+              </a:rPr>
+              <a:t>5</a:t>
+            </a:r>
+          </a:p>
+        </p:txBody>
+      </p:sp>
+      <p:sp>
+        <p:nvSpPr>
+          <p:cNvPr id="41" name="Oval 40"/>
+          <p:cNvSpPr/>
+          <p:nvPr/>
+        </p:nvSpPr>
+        <p:spPr>
+          <a:xfrm>
+            <a:off x="1404000" y="5525999"/>
+            <a:ext cx="594000" cy="594000"/>
+          </a:xfrm>
+          <a:prstGeom prst="ellipse">
+            <a:avLst/>
+          </a:prstGeom>
+          <a:solidFill>
+            <a:srgbClr val="159641"/>
+          </a:solidFill>
+          <a:ln>
+            <a:noFill/>
+          </a:ln>
+          <a:effectLst/>
+        </p:spPr>
+        <p:style>
+          <a:lnRef idx="1">
+            <a:schemeClr val="accent1"/>
+          </a:lnRef>
+          <a:fillRef idx="3">
+            <a:schemeClr val="accent1"/>
+          </a:fillRef>
+          <a:effectRef idx="2">
+            <a:schemeClr val="accent1"/>
+          </a:effectRef>
+          <a:fontRef idx="minor">
+            <a:schemeClr val="lt1"/>
+          </a:fontRef>
+        </p:style>
+        <p:txBody>
+          <a:bodyPr rtlCol="0" anchor="ctr"/>
+          <a:lstStyle/>
+          <a:p>
+            <a:pPr algn="ctr"/>
+          </a:p>
+        </p:txBody>
+      </p:sp>
+      <p:pic>
+        <p:nvPicPr>
+          <p:cNvPr id="42" name="Picture 41" descr="brand-linkedin_bl.png"/>
+          <p:cNvPicPr>
+            <a:picLocks noChangeAspect="1"/>
+          </p:cNvPicPr>
+          <p:nvPr/>
+        </p:nvPicPr>
+        <p:blipFill>
+          <a:blip r:embed="rId7"/>
+          <a:stretch>
+            <a:fillRect/>
+          </a:stretch>
+        </p:blipFill>
+        <p:spPr>
+          <a:xfrm>
+            <a:off x="1534680" y="5656679"/>
+            <a:ext cx="332640" cy="332640"/>
+          </a:xfrm>
+          <a:prstGeom prst="rect">
+            <a:avLst/>
+          </a:prstGeom>
+        </p:spPr>
+      </p:pic>
+      <p:sp>
+        <p:nvSpPr>
+          <p:cNvPr id="43" name="TextBox 42"/>
+          <p:cNvSpPr txBox="1"/>
+          <p:nvPr/>
+        </p:nvSpPr>
+        <p:spPr>
+          <a:xfrm>
+            <a:off x="2196000" y="5400000"/>
+            <a:ext cx="3060000" cy="846000"/>
+          </a:xfrm>
+          <a:prstGeom prst="rect">
+            <a:avLst/>
+          </a:prstGeom>
+          <a:noFill/>
+        </p:spPr>
+        <p:txBody>
+          <a:bodyPr wrap="square" lIns="36000" rIns="36000" tIns="18000" bIns="18000" anchor="ctr">
+            <a:spAutoFit/>
+          </a:bodyPr>
+          <a:lstStyle/>
+          <a:p>
+            <a:pPr algn="l">
+              <a:lnSpc>
+                <a:spcPct val="110000"/>
+              </a:lnSpc>
+            </a:pPr>
+            <a:r>
+              <a:rPr sz="1500" b="1">
+                <a:solidFill>
+                  <a:srgbClr val="111111"/>
+                </a:solidFill>
+                <a:latin typeface="Arial"/>
+              </a:rPr>
+              <a:t>Réveiller LinkedIn</a:t>
+            </a:r>
+          </a:p>
+        </p:txBody>
+      </p:sp>
+      <p:sp>
+        <p:nvSpPr>
+          <p:cNvPr id="44" name="TextBox 43"/>
+          <p:cNvSpPr txBox="1"/>
+          <p:nvPr/>
+        </p:nvSpPr>
+        <p:spPr>
+          <a:xfrm>
+            <a:off x="5256000" y="5400000"/>
+            <a:ext cx="6228000" cy="846000"/>
+          </a:xfrm>
+          <a:prstGeom prst="rect">
+            <a:avLst/>
+          </a:prstGeom>
+          <a:noFill/>
+        </p:spPr>
+        <p:txBody>
+          <a:bodyPr wrap="square" lIns="36000" rIns="36000" tIns="18000" bIns="18000" anchor="ctr">
+            <a:spAutoFit/>
+          </a:bodyPr>
+          <a:lstStyle/>
+          <a:p>
+            <a:pPr algn="l">
+              <a:lnSpc>
+                <a:spcPct val="110000"/>
+              </a:lnSpc>
+            </a:pPr>
+            <a:r>
+              <a:rPr sz="1250" b="0">
+                <a:solidFill>
+                  <a:srgbClr val="5A5A5A"/>
+                </a:solidFill>
+                <a:latin typeface="Arial"/>
+              </a:rPr>
+              <a:t>Une publication par semaine pour les acheteurs professionnels et les revendeurs, sans faute de nom.</a:t>
+            </a:r>
+          </a:p>
+        </p:txBody>
+      </p:sp>
+    </p:spTree>
+  </p:cSld>
+  <p:clrMapOvr>
+    <a:masterClrMapping/>
+  </p:clrMapOvr>
+</p:sld>
+</file>
+
+<file path=ppt/slides/slide22.xml><?xml version="1.0" encoding="utf-8"?>
+<p:sld xmlns:a="http://schemas.openxmlformats.org/drawingml/2006/main" xmlns:p="http://schemas.openxmlformats.org/presentationml/2006/main" xmlns:r="http://schemas.openxmlformats.org/officeDocument/2006/relationships">
+  <p:cSld>
+    <p:spTree>
+      <p:nvGrpSpPr>
+        <p:cNvPr id="1" name=""/>
+        <p:cNvGrpSpPr/>
+        <p:nvPr/>
+      </p:nvGrpSpPr>
+      <p:grpSpPr/>
+      <p:sp>
+        <p:nvSpPr>
+          <p:cNvPr id="2" name="Rectangle 1"/>
+          <p:cNvSpPr/>
+          <p:nvPr/>
+        </p:nvSpPr>
+        <p:spPr>
+          <a:xfrm>
+            <a:off x="0" y="0"/>
+            <a:ext cx="12192119" cy="6858000"/>
+          </a:xfrm>
+          <a:prstGeom prst="rect">
+            <a:avLst/>
+          </a:prstGeom>
+          <a:solidFill>
+            <a:srgbClr val="FFFFFF"/>
+          </a:solidFill>
+          <a:ln>
+            <a:noFill/>
+          </a:ln>
+          <a:effectLst/>
+        </p:spPr>
+        <p:style>
+          <a:lnRef idx="1">
+            <a:schemeClr val="accent1"/>
+          </a:lnRef>
+          <a:fillRef idx="3">
+            <a:schemeClr val="accent1"/>
+          </a:fillRef>
+          <a:effectRef idx="2">
+            <a:schemeClr val="accent1"/>
+          </a:effectRef>
+          <a:fontRef idx="minor">
+            <a:schemeClr val="lt1"/>
+          </a:fontRef>
+        </p:style>
+        <p:txBody>
+          <a:bodyPr rtlCol="0" anchor="ctr"/>
+          <a:lstStyle/>
+          <a:p>
+            <a:pPr algn="ctr"/>
+          </a:p>
+        </p:txBody>
+      </p:sp>
+      <p:sp>
+        <p:nvSpPr>
+          <p:cNvPr id="3" name="Rectangle 2"/>
+          <p:cNvSpPr/>
+          <p:nvPr/>
+        </p:nvSpPr>
+        <p:spPr>
+          <a:xfrm>
+            <a:off x="0" y="0"/>
+            <a:ext cx="180000" cy="6858000"/>
+          </a:xfrm>
+          <a:prstGeom prst="rect">
+            <a:avLst/>
+          </a:prstGeom>
+          <a:solidFill>
+            <a:srgbClr val="E84E0E"/>
+          </a:solidFill>
+          <a:ln>
+            <a:noFill/>
+          </a:ln>
+          <a:effectLst/>
+        </p:spPr>
+        <p:style>
+          <a:lnRef idx="1">
+            <a:schemeClr val="accent1"/>
+          </a:lnRef>
+          <a:fillRef idx="3">
+            <a:schemeClr val="accent1"/>
+          </a:fillRef>
+          <a:effectRef idx="2">
+            <a:schemeClr val="accent1"/>
+          </a:effectRef>
+          <a:fontRef idx="minor">
+            <a:schemeClr val="lt1"/>
+          </a:fontRef>
+        </p:style>
+        <p:txBody>
+          <a:bodyPr rtlCol="0" anchor="ctr"/>
+          <a:lstStyle/>
+          <a:p>
+            <a:pPr algn="ctr"/>
+          </a:p>
+        </p:txBody>
+      </p:sp>
+      <p:pic>
+        <p:nvPicPr>
+          <p:cNvPr id="4" name="Picture 3" descr="logo-taj-seul.png"/>
+          <p:cNvPicPr>
+            <a:picLocks noChangeAspect="1"/>
+          </p:cNvPicPr>
+          <p:nvPr/>
+        </p:nvPicPr>
+        <p:blipFill>
+          <a:blip r:embed="rId2"/>
+          <a:stretch>
+            <a:fillRect/>
+          </a:stretch>
+        </p:blipFill>
+        <p:spPr>
+          <a:xfrm>
+            <a:off x="10248119" y="283729"/>
+            <a:ext cx="1584000" cy="440539"/>
+          </a:xfrm>
+          <a:prstGeom prst="rect">
+            <a:avLst/>
+          </a:prstGeom>
+        </p:spPr>
+      </p:pic>
+      <p:sp>
+        <p:nvSpPr>
+          <p:cNvPr id="5" name="TextBox 4"/>
+          <p:cNvSpPr txBox="1"/>
+          <p:nvPr/>
+        </p:nvSpPr>
+        <p:spPr>
+          <a:xfrm>
+            <a:off x="576000" y="324000"/>
+            <a:ext cx="8640000" cy="288000"/>
+          </a:xfrm>
+          <a:prstGeom prst="rect">
+            <a:avLst/>
+          </a:prstGeom>
+          <a:noFill/>
+        </p:spPr>
+        <p:txBody>
+          <a:bodyPr wrap="square" lIns="36000" rIns="36000" tIns="18000" bIns="18000" anchor="t">
+            <a:spAutoFit/>
+          </a:bodyPr>
+          <a:lstStyle/>
+          <a:p>
+            <a:pPr algn="l">
+              <a:lnSpc>
+                <a:spcPct val="110000"/>
+              </a:lnSpc>
+            </a:pPr>
+            <a:r>
+              <a:rPr sz="1100" b="1">
+                <a:solidFill>
+                  <a:srgbClr val="E84E0E"/>
+                </a:solidFill>
+                <a:latin typeface="Arial"/>
+              </a:rPr>
+              <a:t>PLAN 30 JOURS</a:t>
+            </a:r>
+          </a:p>
+        </p:txBody>
+      </p:sp>
+      <p:sp>
+        <p:nvSpPr>
+          <p:cNvPr id="6" name="TextBox 5"/>
+          <p:cNvSpPr txBox="1"/>
+          <p:nvPr/>
+        </p:nvSpPr>
+        <p:spPr>
+          <a:xfrm>
+            <a:off x="576000" y="576000"/>
+            <a:ext cx="9000000" cy="720000"/>
+          </a:xfrm>
+          <a:prstGeom prst="rect">
+            <a:avLst/>
+          </a:prstGeom>
+          <a:noFill/>
+        </p:spPr>
+        <p:txBody>
+          <a:bodyPr wrap="square" lIns="36000" rIns="36000" tIns="18000" bIns="18000" anchor="t">
+            <a:spAutoFit/>
+          </a:bodyPr>
+          <a:lstStyle/>
+          <a:p>
+            <a:pPr algn="l">
+              <a:lnSpc>
+                <a:spcPct val="110000"/>
+              </a:lnSpc>
+            </a:pPr>
+            <a:r>
+              <a:rPr sz="2600" b="1">
+                <a:solidFill>
+                  <a:srgbClr val="111111"/>
+                </a:solidFill>
+                <a:latin typeface="Arial"/>
+              </a:rPr>
+              <a:t>Le premier mois, semaine par semaine</a:t>
+            </a:r>
+          </a:p>
+        </p:txBody>
+      </p:sp>
+      <p:sp>
+        <p:nvSpPr>
+          <p:cNvPr id="7" name="Rectangle 6"/>
+          <p:cNvSpPr/>
+          <p:nvPr/>
+        </p:nvSpPr>
+        <p:spPr>
+          <a:xfrm>
+            <a:off x="576000" y="1278000"/>
+            <a:ext cx="792000" cy="50400"/>
+          </a:xfrm>
+          <a:prstGeom prst="rect">
+            <a:avLst/>
+          </a:prstGeom>
+          <a:solidFill>
+            <a:srgbClr val="159641"/>
+          </a:solidFill>
+          <a:ln>
+            <a:noFill/>
+          </a:ln>
+          <a:effectLst/>
+        </p:spPr>
+        <p:style>
+          <a:lnRef idx="1">
+            <a:schemeClr val="accent1"/>
+          </a:lnRef>
+          <a:fillRef idx="3">
+            <a:schemeClr val="accent1"/>
+          </a:fillRef>
+          <a:effectRef idx="2">
+            <a:schemeClr val="accent1"/>
+          </a:effectRef>
+          <a:fontRef idx="minor">
+            <a:schemeClr val="lt1"/>
+          </a:fontRef>
+        </p:style>
+        <p:txBody>
+          <a:bodyPr rtlCol="0" anchor="ctr"/>
+          <a:lstStyle/>
+          <a:p>
+            <a:pPr algn="ctr"/>
+          </a:p>
+        </p:txBody>
+      </p:sp>
+      <p:sp>
+        <p:nvSpPr>
+          <p:cNvPr id="8" name="TextBox 7"/>
+          <p:cNvSpPr txBox="1"/>
+          <p:nvPr/>
+        </p:nvSpPr>
+        <p:spPr>
+          <a:xfrm>
+            <a:off x="10572119" y="6498000"/>
+            <a:ext cx="1296000" cy="216000"/>
+          </a:xfrm>
+          <a:prstGeom prst="rect">
+            <a:avLst/>
+          </a:prstGeom>
+          <a:noFill/>
+        </p:spPr>
+        <p:txBody>
+          <a:bodyPr wrap="square" lIns="36000" rIns="36000" tIns="18000" bIns="18000" anchor="t">
+            <a:spAutoFit/>
+          </a:bodyPr>
+          <a:lstStyle/>
+          <a:p>
+            <a:pPr algn="r">
+              <a:lnSpc>
+                <a:spcPct val="110000"/>
+              </a:lnSpc>
+            </a:pPr>
+            <a:r>
+              <a:rPr sz="900" b="0">
+                <a:solidFill>
+                  <a:srgbClr val="5A5A5A"/>
+                </a:solidFill>
+                <a:latin typeface="Arial"/>
+              </a:rPr>
+              <a:t>22 / 23</a:t>
+            </a:r>
+          </a:p>
+        </p:txBody>
+      </p:sp>
+      <p:sp>
+        <p:nvSpPr>
+          <p:cNvPr id="9" name="TextBox 8"/>
+          <p:cNvSpPr txBox="1"/>
+          <p:nvPr/>
+        </p:nvSpPr>
+        <p:spPr>
+          <a:xfrm>
+            <a:off x="576000" y="6498000"/>
+            <a:ext cx="7200000" cy="216000"/>
+          </a:xfrm>
+          <a:prstGeom prst="rect">
+            <a:avLst/>
+          </a:prstGeom>
+          <a:noFill/>
+        </p:spPr>
+        <p:txBody>
+          <a:bodyPr wrap="square" lIns="36000" rIns="36000" tIns="18000" bIns="18000" anchor="t">
+            <a:spAutoFit/>
+          </a:bodyPr>
+          <a:lstStyle/>
+          <a:p>
+            <a:pPr algn="l">
+              <a:lnSpc>
+                <a:spcPct val="110000"/>
+              </a:lnSpc>
+            </a:pPr>
+            <a:r>
+              <a:rPr sz="900" b="0">
+                <a:solidFill>
+                  <a:srgbClr val="5A5A5A"/>
+                </a:solidFill>
+                <a:latin typeface="Arial"/>
+              </a:rPr>
+              <a:t>TAJ PLAST · Audit réseaux sociaux · relevé du 27/10/2026</a:t>
+            </a:r>
+          </a:p>
+        </p:txBody>
+      </p:sp>
+      <p:sp>
+        <p:nvSpPr>
+          <p:cNvPr id="10" name="Rounded Rectangle 9"/>
+          <p:cNvSpPr/>
+          <p:nvPr/>
+        </p:nvSpPr>
+        <p:spPr>
+          <a:xfrm>
+            <a:off x="576000" y="1584000"/>
+            <a:ext cx="2628000" cy="576000"/>
+          </a:xfrm>
+          <a:prstGeom prst="roundRect">
+            <a:avLst/>
+          </a:prstGeom>
+          <a:solidFill>
+            <a:srgbClr val="E84E0E"/>
+          </a:solidFill>
+          <a:ln>
+            <a:noFill/>
+          </a:ln>
+          <a:effectLst/>
+        </p:spPr>
+        <p:style>
+          <a:lnRef idx="1">
+            <a:schemeClr val="accent1"/>
+          </a:lnRef>
+          <a:fillRef idx="3">
+            <a:schemeClr val="accent1"/>
+          </a:fillRef>
+          <a:effectRef idx="2">
+            <a:schemeClr val="accent1"/>
+          </a:effectRef>
+          <a:fontRef idx="minor">
+            <a:schemeClr val="lt1"/>
+          </a:fontRef>
+        </p:style>
+        <p:txBody>
+          <a:bodyPr rtlCol="0" anchor="ctr"/>
+          <a:lstStyle/>
+          <a:p>
+            <a:pPr algn="ctr"/>
+          </a:p>
+        </p:txBody>
+      </p:sp>
+      <p:pic>
+        <p:nvPicPr>
+          <p:cNvPr id="11" name="Picture 10" descr="calendar-event_bl.png"/>
+          <p:cNvPicPr>
+            <a:picLocks noChangeAspect="1"/>
+          </p:cNvPicPr>
+          <p:nvPr/>
+        </p:nvPicPr>
+        <p:blipFill>
+          <a:blip r:embed="rId3"/>
+          <a:stretch>
+            <a:fillRect/>
+          </a:stretch>
+        </p:blipFill>
+        <p:spPr>
+          <a:xfrm>
+            <a:off x="720000" y="1710000"/>
+            <a:ext cx="324000" cy="324000"/>
+          </a:xfrm>
+          <a:prstGeom prst="rect">
+            <a:avLst/>
+          </a:prstGeom>
+        </p:spPr>
+      </p:pic>
+      <p:sp>
+        <p:nvSpPr>
+          <p:cNvPr id="12" name="TextBox 11"/>
+          <p:cNvSpPr txBox="1"/>
+          <p:nvPr/>
+        </p:nvSpPr>
+        <p:spPr>
+          <a:xfrm>
+            <a:off x="1116000" y="1584000"/>
+            <a:ext cx="2015999" cy="576000"/>
+          </a:xfrm>
+          <a:prstGeom prst="rect">
+            <a:avLst/>
+          </a:prstGeom>
+          <a:noFill/>
+        </p:spPr>
+        <p:txBody>
+          <a:bodyPr wrap="square" lIns="36000" rIns="36000" tIns="18000" bIns="18000" anchor="ctr">
+            <a:spAutoFit/>
+          </a:bodyPr>
+          <a:lstStyle/>
+          <a:p>
+            <a:pPr algn="l">
+              <a:lnSpc>
+                <a:spcPct val="110000"/>
+              </a:lnSpc>
+            </a:pPr>
+            <a:r>
+              <a:rPr sz="1500" b="1">
+                <a:solidFill>
+                  <a:srgbClr val="FFFFFF"/>
+                </a:solidFill>
+                <a:latin typeface="Arial"/>
+              </a:rPr>
+              <a:t>Semaine 1</a:t>
+            </a:r>
+          </a:p>
+        </p:txBody>
+      </p:sp>
+      <p:sp>
+        <p:nvSpPr>
+          <p:cNvPr id="13" name="Rounded Rectangle 12"/>
+          <p:cNvSpPr/>
+          <p:nvPr/>
+        </p:nvSpPr>
+        <p:spPr>
+          <a:xfrm>
+            <a:off x="576000" y="2304000"/>
+            <a:ext cx="2628000" cy="2880000"/>
+          </a:xfrm>
+          <a:prstGeom prst="roundRect">
+            <a:avLst>
+              <a:gd name="adj" fmla="val 6000"/>
+            </a:avLst>
+          </a:prstGeom>
+          <a:solidFill>
+            <a:srgbClr val="F4F4F2"/>
+          </a:solidFill>
+          <a:ln>
+            <a:noFill/>
+          </a:ln>
+          <a:effectLst/>
+        </p:spPr>
+        <p:style>
+          <a:lnRef idx="1">
+            <a:schemeClr val="accent1"/>
+          </a:lnRef>
+          <a:fillRef idx="3">
+            <a:schemeClr val="accent1"/>
+          </a:fillRef>
+          <a:effectRef idx="2">
+            <a:schemeClr val="accent1"/>
+          </a:effectRef>
+          <a:fontRef idx="minor">
+            <a:schemeClr val="lt1"/>
+          </a:fontRef>
+        </p:style>
+        <p:txBody>
+          <a:bodyPr rtlCol="0" anchor="ctr"/>
+          <a:lstStyle/>
+          <a:p>
+            <a:pPr algn="ctr"/>
+          </a:p>
+        </p:txBody>
+      </p:sp>
+      <p:sp>
+        <p:nvSpPr>
+          <p:cNvPr id="14" name="TextBox 13"/>
+          <p:cNvSpPr txBox="1"/>
+          <p:nvPr/>
+        </p:nvSpPr>
+        <p:spPr>
+          <a:xfrm>
+            <a:off x="720000" y="2448000"/>
+            <a:ext cx="2376000" cy="2664000"/>
+          </a:xfrm>
+          <a:prstGeom prst="rect">
+            <a:avLst/>
+          </a:prstGeom>
+          <a:noFill/>
+        </p:spPr>
+        <p:txBody>
+          <a:bodyPr wrap="square">
+            <a:spAutoFit/>
+          </a:bodyPr>
+          <a:lstStyle/>
+          <a:p>
+            <a:pPr>
+              <a:lnSpc>
+                <a:spcPct val="110000"/>
+              </a:lnSpc>
+              <a:spcAft>
+                <a:spcPts val="700"/>
+              </a:spcAft>
+            </a:pPr>
+            <a:r>
+              <a:rPr sz="850">
+                <a:solidFill>
+                  <a:srgbClr val="E84E0E"/>
+                </a:solidFill>
+                <a:latin typeface="Arial"/>
+              </a:rPr>
+              <a:t>■  </a:t>
+            </a:r>
+            <a:r>
+              <a:rPr sz="1250">
+                <a:solidFill>
+                  <a:srgbClr val="111111"/>
+                </a:solidFill>
+                <a:latin typeface="Arial"/>
+              </a:rPr>
+              <a:t>Corriger « TAPLAST » sur LinkedIn</a:t>
+            </a:r>
+          </a:p>
+          <a:p>
+            <a:pPr>
+              <a:lnSpc>
+                <a:spcPct val="110000"/>
+              </a:lnSpc>
+              <a:spcAft>
+                <a:spcPts val="700"/>
+              </a:spcAft>
+            </a:pPr>
+            <a:r>
+              <a:rPr sz="850">
+                <a:solidFill>
+                  <a:srgbClr val="E84E0E"/>
+                </a:solidFill>
+                <a:latin typeface="Arial"/>
+              </a:rPr>
+              <a:t>■  </a:t>
+            </a:r>
+            <a:r>
+              <a:rPr sz="1250">
+                <a:solidFill>
+                  <a:srgbClr val="111111"/>
+                </a:solidFill>
+                <a:latin typeface="Arial"/>
+              </a:rPr>
+              <a:t>Retirer les publications en double</a:t>
+            </a:r>
+          </a:p>
+          <a:p>
+            <a:pPr>
+              <a:lnSpc>
+                <a:spcPct val="110000"/>
+              </a:lnSpc>
+              <a:spcAft>
+                <a:spcPts val="700"/>
+              </a:spcAft>
+            </a:pPr>
+            <a:r>
+              <a:rPr sz="850">
+                <a:solidFill>
+                  <a:srgbClr val="E84E0E"/>
+                </a:solidFill>
+                <a:latin typeface="Arial"/>
+              </a:rPr>
+              <a:t>■  </a:t>
+            </a:r>
+            <a:r>
+              <a:rPr sz="1250">
+                <a:solidFill>
+                  <a:srgbClr val="111111"/>
+                </a:solidFill>
+                <a:latin typeface="Arial"/>
+              </a:rPr>
+              <a:t>Valider les 6 publications refaites</a:t>
+            </a:r>
+          </a:p>
+        </p:txBody>
+      </p:sp>
+      <p:sp>
+        <p:nvSpPr>
+          <p:cNvPr id="15" name="Rounded Rectangle 14"/>
+          <p:cNvSpPr/>
+          <p:nvPr/>
+        </p:nvSpPr>
+        <p:spPr>
+          <a:xfrm>
+            <a:off x="3384000" y="1584000"/>
+            <a:ext cx="2628000" cy="576000"/>
+          </a:xfrm>
+          <a:prstGeom prst="roundRect">
+            <a:avLst/>
+          </a:prstGeom>
+          <a:solidFill>
+            <a:srgbClr val="159641"/>
+          </a:solidFill>
+          <a:ln>
+            <a:noFill/>
+          </a:ln>
+          <a:effectLst/>
+        </p:spPr>
+        <p:style>
+          <a:lnRef idx="1">
+            <a:schemeClr val="accent1"/>
+          </a:lnRef>
+          <a:fillRef idx="3">
+            <a:schemeClr val="accent1"/>
+          </a:fillRef>
+          <a:effectRef idx="2">
+            <a:schemeClr val="accent1"/>
+          </a:effectRef>
+          <a:fontRef idx="minor">
+            <a:schemeClr val="lt1"/>
+          </a:fontRef>
+        </p:style>
+        <p:txBody>
+          <a:bodyPr rtlCol="0" anchor="ctr"/>
+          <a:lstStyle/>
+          <a:p>
+            <a:pPr algn="ctr"/>
+          </a:p>
+        </p:txBody>
+      </p:sp>
+      <p:pic>
+        <p:nvPicPr>
+          <p:cNvPr id="16" name="Picture 15" descr="pencil_bl.png"/>
+          <p:cNvPicPr>
+            <a:picLocks noChangeAspect="1"/>
+          </p:cNvPicPr>
+          <p:nvPr/>
+        </p:nvPicPr>
+        <p:blipFill>
+          <a:blip r:embed="rId4"/>
+          <a:stretch>
+            <a:fillRect/>
+          </a:stretch>
+        </p:blipFill>
+        <p:spPr>
+          <a:xfrm>
+            <a:off x="3528000" y="1710000"/>
+            <a:ext cx="324000" cy="324000"/>
+          </a:xfrm>
+          <a:prstGeom prst="rect">
+            <a:avLst/>
+          </a:prstGeom>
+        </p:spPr>
+      </p:pic>
+      <p:sp>
+        <p:nvSpPr>
+          <p:cNvPr id="17" name="TextBox 16"/>
+          <p:cNvSpPr txBox="1"/>
+          <p:nvPr/>
+        </p:nvSpPr>
+        <p:spPr>
+          <a:xfrm>
+            <a:off x="3924000" y="1584000"/>
+            <a:ext cx="2015999" cy="576000"/>
+          </a:xfrm>
+          <a:prstGeom prst="rect">
+            <a:avLst/>
+          </a:prstGeom>
+          <a:noFill/>
+        </p:spPr>
+        <p:txBody>
+          <a:bodyPr wrap="square" lIns="36000" rIns="36000" tIns="18000" bIns="18000" anchor="ctr">
+            <a:spAutoFit/>
+          </a:bodyPr>
+          <a:lstStyle/>
+          <a:p>
+            <a:pPr algn="l">
+              <a:lnSpc>
+                <a:spcPct val="110000"/>
+              </a:lnSpc>
+            </a:pPr>
+            <a:r>
+              <a:rPr sz="1500" b="1">
+                <a:solidFill>
+                  <a:srgbClr val="FFFFFF"/>
+                </a:solidFill>
+                <a:latin typeface="Arial"/>
+              </a:rPr>
+              <a:t>Semaine 2</a:t>
+            </a:r>
+          </a:p>
+        </p:txBody>
+      </p:sp>
+      <p:sp>
+        <p:nvSpPr>
+          <p:cNvPr id="18" name="Rounded Rectangle 17"/>
+          <p:cNvSpPr/>
+          <p:nvPr/>
+        </p:nvSpPr>
+        <p:spPr>
+          <a:xfrm>
+            <a:off x="3384000" y="2304000"/>
+            <a:ext cx="2628000" cy="2880000"/>
+          </a:xfrm>
+          <a:prstGeom prst="roundRect">
+            <a:avLst>
+              <a:gd name="adj" fmla="val 6000"/>
+            </a:avLst>
+          </a:prstGeom>
+          <a:solidFill>
+            <a:srgbClr val="F4F4F2"/>
+          </a:solidFill>
+          <a:ln>
+            <a:noFill/>
+          </a:ln>
+          <a:effectLst/>
+        </p:spPr>
+        <p:style>
+          <a:lnRef idx="1">
+            <a:schemeClr val="accent1"/>
+          </a:lnRef>
+          <a:fillRef idx="3">
+            <a:schemeClr val="accent1"/>
+          </a:fillRef>
+          <a:effectRef idx="2">
+            <a:schemeClr val="accent1"/>
+          </a:effectRef>
+          <a:fontRef idx="minor">
+            <a:schemeClr val="lt1"/>
+          </a:fontRef>
+        </p:style>
+        <p:txBody>
+          <a:bodyPr rtlCol="0" anchor="ctr"/>
+          <a:lstStyle/>
+          <a:p>
+            <a:pPr algn="ctr"/>
+          </a:p>
+        </p:txBody>
+      </p:sp>
+      <p:sp>
+        <p:nvSpPr>
+          <p:cNvPr id="19" name="TextBox 18"/>
+          <p:cNvSpPr txBox="1"/>
+          <p:nvPr/>
+        </p:nvSpPr>
+        <p:spPr>
+          <a:xfrm>
+            <a:off x="3528000" y="2448000"/>
+            <a:ext cx="2376000" cy="2664000"/>
+          </a:xfrm>
+          <a:prstGeom prst="rect">
+            <a:avLst/>
+          </a:prstGeom>
+          <a:noFill/>
+        </p:spPr>
+        <p:txBody>
+          <a:bodyPr wrap="square">
+            <a:spAutoFit/>
+          </a:bodyPr>
+          <a:lstStyle/>
+          <a:p>
+            <a:pPr>
+              <a:lnSpc>
+                <a:spcPct val="110000"/>
+              </a:lnSpc>
+              <a:spcAft>
+                <a:spcPts val="700"/>
+              </a:spcAft>
+            </a:pPr>
+            <a:r>
+              <a:rPr sz="850">
+                <a:solidFill>
+                  <a:srgbClr val="E84E0E"/>
+                </a:solidFill>
+                <a:latin typeface="Arial"/>
+              </a:rPr>
+              <a:t>■  </a:t>
+            </a:r>
+            <a:r>
+              <a:rPr sz="1250">
+                <a:solidFill>
+                  <a:srgbClr val="111111"/>
+                </a:solidFill>
+                <a:latin typeface="Arial"/>
+              </a:rPr>
+              <a:t>Publier les 6 avant / après</a:t>
+            </a:r>
+          </a:p>
+          <a:p>
+            <a:pPr>
+              <a:lnSpc>
+                <a:spcPct val="110000"/>
+              </a:lnSpc>
+              <a:spcAft>
+                <a:spcPts val="700"/>
+              </a:spcAft>
+            </a:pPr>
+            <a:r>
+              <a:rPr sz="850">
+                <a:solidFill>
+                  <a:srgbClr val="E84E0E"/>
+                </a:solidFill>
+                <a:latin typeface="Arial"/>
+              </a:rPr>
+              <a:t>■  </a:t>
+            </a:r>
+            <a:r>
+              <a:rPr sz="1250">
+                <a:solidFill>
+                  <a:srgbClr val="111111"/>
+                </a:solidFill>
+                <a:latin typeface="Arial"/>
+              </a:rPr>
+              <a:t>1 publication par jour, 12 h ou 18 h</a:t>
+            </a:r>
+          </a:p>
+          <a:p>
+            <a:pPr>
+              <a:lnSpc>
+                <a:spcPct val="110000"/>
+              </a:lnSpc>
+              <a:spcAft>
+                <a:spcPts val="700"/>
+              </a:spcAft>
+            </a:pPr>
+            <a:r>
+              <a:rPr sz="850">
+                <a:solidFill>
+                  <a:srgbClr val="E84E0E"/>
+                </a:solidFill>
+                <a:latin typeface="Arial"/>
+              </a:rPr>
+              <a:t>■  </a:t>
+            </a:r>
+            <a:r>
+              <a:rPr sz="1250">
+                <a:solidFill>
+                  <a:srgbClr val="111111"/>
+                </a:solidFill>
+                <a:latin typeface="Arial"/>
+              </a:rPr>
+              <a:t>Répondre à chaque commentaire</a:t>
+            </a:r>
+          </a:p>
+        </p:txBody>
+      </p:sp>
+      <p:sp>
+        <p:nvSpPr>
+          <p:cNvPr id="20" name="Rounded Rectangle 19"/>
+          <p:cNvSpPr/>
+          <p:nvPr/>
+        </p:nvSpPr>
+        <p:spPr>
+          <a:xfrm>
+            <a:off x="6192000" y="1584000"/>
+            <a:ext cx="2628000" cy="576000"/>
+          </a:xfrm>
+          <a:prstGeom prst="roundRect">
+            <a:avLst/>
+          </a:prstGeom>
+          <a:solidFill>
+            <a:srgbClr val="E84E0E"/>
+          </a:solidFill>
+          <a:ln>
+            <a:noFill/>
+          </a:ln>
+          <a:effectLst/>
+        </p:spPr>
+        <p:style>
+          <a:lnRef idx="1">
+            <a:schemeClr val="accent1"/>
+          </a:lnRef>
+          <a:fillRef idx="3">
+            <a:schemeClr val="accent1"/>
+          </a:fillRef>
+          <a:effectRef idx="2">
+            <a:schemeClr val="accent1"/>
+          </a:effectRef>
+          <a:fontRef idx="minor">
+            <a:schemeClr val="lt1"/>
+          </a:fontRef>
+        </p:style>
+        <p:txBody>
+          <a:bodyPr rtlCol="0" anchor="ctr"/>
+          <a:lstStyle/>
+          <a:p>
+            <a:pPr algn="ctr"/>
+          </a:p>
+        </p:txBody>
+      </p:sp>
+      <p:pic>
+        <p:nvPicPr>
+          <p:cNvPr id="21" name="Picture 20" descr="video_bl.png"/>
+          <p:cNvPicPr>
+            <a:picLocks noChangeAspect="1"/>
+          </p:cNvPicPr>
+          <p:nvPr/>
+        </p:nvPicPr>
+        <p:blipFill>
+          <a:blip r:embed="rId5"/>
+          <a:stretch>
+            <a:fillRect/>
+          </a:stretch>
+        </p:blipFill>
+        <p:spPr>
+          <a:xfrm>
+            <a:off x="6336000" y="1710000"/>
+            <a:ext cx="324000" cy="324000"/>
+          </a:xfrm>
+          <a:prstGeom prst="rect">
+            <a:avLst/>
+          </a:prstGeom>
+        </p:spPr>
+      </p:pic>
+      <p:sp>
+        <p:nvSpPr>
+          <p:cNvPr id="22" name="TextBox 21"/>
+          <p:cNvSpPr txBox="1"/>
+          <p:nvPr/>
+        </p:nvSpPr>
+        <p:spPr>
+          <a:xfrm>
+            <a:off x="6732000" y="1584000"/>
+            <a:ext cx="2015999" cy="576000"/>
+          </a:xfrm>
+          <a:prstGeom prst="rect">
+            <a:avLst/>
+          </a:prstGeom>
+          <a:noFill/>
+        </p:spPr>
+        <p:txBody>
+          <a:bodyPr wrap="square" lIns="36000" rIns="36000" tIns="18000" bIns="18000" anchor="ctr">
+            <a:spAutoFit/>
+          </a:bodyPr>
+          <a:lstStyle/>
+          <a:p>
+            <a:pPr algn="l">
+              <a:lnSpc>
+                <a:spcPct val="110000"/>
+              </a:lnSpc>
+            </a:pPr>
+            <a:r>
+              <a:rPr sz="1500" b="1">
+                <a:solidFill>
+                  <a:srgbClr val="FFFFFF"/>
+                </a:solidFill>
+                <a:latin typeface="Arial"/>
+              </a:rPr>
+              <a:t>Semaine 3</a:t>
+            </a:r>
+          </a:p>
+        </p:txBody>
+      </p:sp>
+      <p:sp>
+        <p:nvSpPr>
+          <p:cNvPr id="23" name="Rounded Rectangle 22"/>
+          <p:cNvSpPr/>
+          <p:nvPr/>
+        </p:nvSpPr>
+        <p:spPr>
+          <a:xfrm>
+            <a:off x="6192000" y="2304000"/>
+            <a:ext cx="2628000" cy="2880000"/>
+          </a:xfrm>
+          <a:prstGeom prst="roundRect">
+            <a:avLst>
+              <a:gd name="adj" fmla="val 6000"/>
+            </a:avLst>
+          </a:prstGeom>
+          <a:solidFill>
+            <a:srgbClr val="F4F4F2"/>
+          </a:solidFill>
+          <a:ln>
+            <a:noFill/>
+          </a:ln>
+          <a:effectLst/>
+        </p:spPr>
+        <p:style>
+          <a:lnRef idx="1">
+            <a:schemeClr val="accent1"/>
+          </a:lnRef>
+          <a:fillRef idx="3">
+            <a:schemeClr val="accent1"/>
+          </a:fillRef>
+          <a:effectRef idx="2">
+            <a:schemeClr val="accent1"/>
+          </a:effectRef>
+          <a:fontRef idx="minor">
+            <a:schemeClr val="lt1"/>
+          </a:fontRef>
+        </p:style>
+        <p:txBody>
+          <a:bodyPr rtlCol="0" anchor="ctr"/>
+          <a:lstStyle/>
+          <a:p>
+            <a:pPr algn="ctr"/>
+          </a:p>
+        </p:txBody>
+      </p:sp>
+      <p:sp>
+        <p:nvSpPr>
+          <p:cNvPr id="24" name="TextBox 23"/>
+          <p:cNvSpPr txBox="1"/>
+          <p:nvPr/>
+        </p:nvSpPr>
+        <p:spPr>
+          <a:xfrm>
+            <a:off x="6336000" y="2448000"/>
+            <a:ext cx="2376000" cy="2664000"/>
+          </a:xfrm>
+          <a:prstGeom prst="rect">
+            <a:avLst/>
+          </a:prstGeom>
+          <a:noFill/>
+        </p:spPr>
+        <p:txBody>
+          <a:bodyPr wrap="square">
+            <a:spAutoFit/>
+          </a:bodyPr>
+          <a:lstStyle/>
+          <a:p>
+            <a:pPr>
+              <a:lnSpc>
+                <a:spcPct val="110000"/>
+              </a:lnSpc>
+              <a:spcAft>
+                <a:spcPts val="700"/>
+              </a:spcAft>
+            </a:pPr>
+            <a:r>
+              <a:rPr sz="850">
+                <a:solidFill>
+                  <a:srgbClr val="E84E0E"/>
+                </a:solidFill>
+                <a:latin typeface="Arial"/>
+              </a:rPr>
+              <a:t>■  </a:t>
+            </a:r>
+            <a:r>
+              <a:rPr sz="1250">
+                <a:solidFill>
+                  <a:srgbClr val="111111"/>
+                </a:solidFill>
+                <a:latin typeface="Arial"/>
+              </a:rPr>
+              <a:t>Tourner 2 vidéos à l’usine</a:t>
+            </a:r>
+          </a:p>
+          <a:p>
+            <a:pPr>
+              <a:lnSpc>
+                <a:spcPct val="110000"/>
+              </a:lnSpc>
+              <a:spcAft>
+                <a:spcPts val="700"/>
+              </a:spcAft>
+            </a:pPr>
+            <a:r>
+              <a:rPr sz="850">
+                <a:solidFill>
+                  <a:srgbClr val="E84E0E"/>
+                </a:solidFill>
+                <a:latin typeface="Arial"/>
+              </a:rPr>
+              <a:t>■  </a:t>
+            </a:r>
+            <a:r>
+              <a:rPr sz="1250">
+                <a:solidFill>
+                  <a:srgbClr val="111111"/>
+                </a:solidFill>
+                <a:latin typeface="Arial"/>
+              </a:rPr>
+              <a:t>Première offre datée avec prix</a:t>
+            </a:r>
+          </a:p>
+          <a:p>
+            <a:pPr>
+              <a:lnSpc>
+                <a:spcPct val="110000"/>
+              </a:lnSpc>
+              <a:spcAft>
+                <a:spcPts val="700"/>
+              </a:spcAft>
+            </a:pPr>
+            <a:r>
+              <a:rPr sz="850">
+                <a:solidFill>
+                  <a:srgbClr val="E84E0E"/>
+                </a:solidFill>
+                <a:latin typeface="Arial"/>
+              </a:rPr>
+              <a:t>■  </a:t>
+            </a:r>
+            <a:r>
+              <a:rPr sz="1250">
+                <a:solidFill>
+                  <a:srgbClr val="111111"/>
+                </a:solidFill>
+                <a:latin typeface="Arial"/>
+              </a:rPr>
+              <a:t>Relancer Instagram</a:t>
+            </a:r>
+          </a:p>
+        </p:txBody>
+      </p:sp>
+      <p:sp>
+        <p:nvSpPr>
+          <p:cNvPr id="25" name="Rounded Rectangle 24"/>
+          <p:cNvSpPr/>
+          <p:nvPr/>
+        </p:nvSpPr>
+        <p:spPr>
+          <a:xfrm>
+            <a:off x="9000000" y="1584000"/>
+            <a:ext cx="2628000" cy="576000"/>
+          </a:xfrm>
+          <a:prstGeom prst="roundRect">
+            <a:avLst/>
+          </a:prstGeom>
+          <a:solidFill>
+            <a:srgbClr val="159641"/>
+          </a:solidFill>
+          <a:ln>
+            <a:noFill/>
+          </a:ln>
+          <a:effectLst/>
+        </p:spPr>
+        <p:style>
+          <a:lnRef idx="1">
+            <a:schemeClr val="accent1"/>
+          </a:lnRef>
+          <a:fillRef idx="3">
+            <a:schemeClr val="accent1"/>
+          </a:fillRef>
+          <a:effectRef idx="2">
+            <a:schemeClr val="accent1"/>
+          </a:effectRef>
+          <a:fontRef idx="minor">
+            <a:schemeClr val="lt1"/>
+          </a:fontRef>
+        </p:style>
+        <p:txBody>
+          <a:bodyPr rtlCol="0" anchor="ctr"/>
+          <a:lstStyle/>
+          <a:p>
+            <a:pPr algn="ctr"/>
+          </a:p>
+        </p:txBody>
+      </p:sp>
+      <p:pic>
+        <p:nvPicPr>
+          <p:cNvPr id="26" name="Picture 25" descr="trending-up_bl.png"/>
+          <p:cNvPicPr>
+            <a:picLocks noChangeAspect="1"/>
+          </p:cNvPicPr>
+          <p:nvPr/>
+        </p:nvPicPr>
+        <p:blipFill>
+          <a:blip r:embed="rId6"/>
+          <a:stretch>
+            <a:fillRect/>
+          </a:stretch>
+        </p:blipFill>
+        <p:spPr>
+          <a:xfrm>
+            <a:off x="9144000" y="1710000"/>
+            <a:ext cx="324000" cy="324000"/>
+          </a:xfrm>
+          <a:prstGeom prst="rect">
+            <a:avLst/>
+          </a:prstGeom>
+        </p:spPr>
+      </p:pic>
+      <p:sp>
+        <p:nvSpPr>
+          <p:cNvPr id="27" name="TextBox 26"/>
+          <p:cNvSpPr txBox="1"/>
+          <p:nvPr/>
+        </p:nvSpPr>
+        <p:spPr>
+          <a:xfrm>
+            <a:off x="9540000" y="1584000"/>
+            <a:ext cx="2015999" cy="576000"/>
+          </a:xfrm>
+          <a:prstGeom prst="rect">
+            <a:avLst/>
+          </a:prstGeom>
+          <a:noFill/>
+        </p:spPr>
+        <p:txBody>
+          <a:bodyPr wrap="square" lIns="36000" rIns="36000" tIns="18000" bIns="18000" anchor="ctr">
+            <a:spAutoFit/>
+          </a:bodyPr>
+          <a:lstStyle/>
+          <a:p>
+            <a:pPr algn="l">
+              <a:lnSpc>
+                <a:spcPct val="110000"/>
+              </a:lnSpc>
+            </a:pPr>
+            <a:r>
+              <a:rPr sz="1500" b="1">
+                <a:solidFill>
+                  <a:srgbClr val="FFFFFF"/>
+                </a:solidFill>
+                <a:latin typeface="Arial"/>
+              </a:rPr>
+              <a:t>Semaine 4</a:t>
+            </a:r>
+          </a:p>
+        </p:txBody>
+      </p:sp>
+      <p:sp>
+        <p:nvSpPr>
+          <p:cNvPr id="28" name="Rounded Rectangle 27"/>
+          <p:cNvSpPr/>
+          <p:nvPr/>
+        </p:nvSpPr>
+        <p:spPr>
+          <a:xfrm>
+            <a:off x="9000000" y="2304000"/>
+            <a:ext cx="2628000" cy="2880000"/>
+          </a:xfrm>
+          <a:prstGeom prst="roundRect">
+            <a:avLst>
+              <a:gd name="adj" fmla="val 6000"/>
+            </a:avLst>
+          </a:prstGeom>
+          <a:solidFill>
+            <a:srgbClr val="F4F4F2"/>
+          </a:solidFill>
+          <a:ln>
+            <a:noFill/>
+          </a:ln>
+          <a:effectLst/>
+        </p:spPr>
+        <p:style>
+          <a:lnRef idx="1">
+            <a:schemeClr val="accent1"/>
+          </a:lnRef>
+          <a:fillRef idx="3">
+            <a:schemeClr val="accent1"/>
+          </a:fillRef>
+          <a:effectRef idx="2">
+            <a:schemeClr val="accent1"/>
+          </a:effectRef>
+          <a:fontRef idx="minor">
+            <a:schemeClr val="lt1"/>
+          </a:fontRef>
+        </p:style>
+        <p:txBody>
+          <a:bodyPr rtlCol="0" anchor="ctr"/>
+          <a:lstStyle/>
+          <a:p>
+            <a:pPr algn="ctr"/>
+          </a:p>
+        </p:txBody>
+      </p:sp>
+      <p:sp>
+        <p:nvSpPr>
+          <p:cNvPr id="29" name="TextBox 28"/>
+          <p:cNvSpPr txBox="1"/>
+          <p:nvPr/>
+        </p:nvSpPr>
+        <p:spPr>
+          <a:xfrm>
+            <a:off x="9144000" y="2448000"/>
+            <a:ext cx="2376000" cy="2664000"/>
+          </a:xfrm>
+          <a:prstGeom prst="rect">
+            <a:avLst/>
+          </a:prstGeom>
+          <a:noFill/>
+        </p:spPr>
+        <p:txBody>
+          <a:bodyPr wrap="square">
+            <a:spAutoFit/>
+          </a:bodyPr>
+          <a:lstStyle/>
+          <a:p>
+            <a:pPr>
+              <a:lnSpc>
+                <a:spcPct val="110000"/>
+              </a:lnSpc>
+              <a:spcAft>
+                <a:spcPts val="700"/>
+              </a:spcAft>
+            </a:pPr>
+            <a:r>
+              <a:rPr sz="850">
+                <a:solidFill>
+                  <a:srgbClr val="E84E0E"/>
+                </a:solidFill>
+                <a:latin typeface="Arial"/>
+              </a:rPr>
+              <a:t>■  </a:t>
+            </a:r>
+            <a:r>
+              <a:rPr sz="1250">
+                <a:solidFill>
+                  <a:srgbClr val="111111"/>
+                </a:solidFill>
+                <a:latin typeface="Arial"/>
+              </a:rPr>
+              <a:t>Comparer aux 3 réactions de départ</a:t>
+            </a:r>
+          </a:p>
+          <a:p>
+            <a:pPr>
+              <a:lnSpc>
+                <a:spcPct val="110000"/>
+              </a:lnSpc>
+              <a:spcAft>
+                <a:spcPts val="700"/>
+              </a:spcAft>
+            </a:pPr>
+            <a:r>
+              <a:rPr sz="850">
+                <a:solidFill>
+                  <a:srgbClr val="E84E0E"/>
+                </a:solidFill>
+                <a:latin typeface="Arial"/>
+              </a:rPr>
+              <a:t>■  </a:t>
+            </a:r>
+            <a:r>
+              <a:rPr sz="1250">
+                <a:solidFill>
+                  <a:srgbClr val="111111"/>
+                </a:solidFill>
+                <a:latin typeface="Arial"/>
+              </a:rPr>
+              <a:t>Garder ce qui marche</a:t>
+            </a:r>
+          </a:p>
+          <a:p>
+            <a:pPr>
+              <a:lnSpc>
+                <a:spcPct val="110000"/>
+              </a:lnSpc>
+              <a:spcAft>
+                <a:spcPts val="700"/>
+              </a:spcAft>
+            </a:pPr>
+            <a:r>
+              <a:rPr sz="850">
+                <a:solidFill>
+                  <a:srgbClr val="E84E0E"/>
+                </a:solidFill>
+                <a:latin typeface="Arial"/>
+              </a:rPr>
+              <a:t>■  </a:t>
+            </a:r>
+            <a:r>
+              <a:rPr sz="1250">
+                <a:solidFill>
+                  <a:srgbClr val="111111"/>
+                </a:solidFill>
+                <a:latin typeface="Arial"/>
+              </a:rPr>
+              <a:t>Préparer le mois suivant</a:t>
+            </a:r>
+          </a:p>
+        </p:txBody>
+      </p:sp>
+      <p:sp>
+        <p:nvSpPr>
+          <p:cNvPr id="30" name="Rounded Rectangle 29"/>
+          <p:cNvSpPr/>
+          <p:nvPr/>
+        </p:nvSpPr>
+        <p:spPr>
+          <a:xfrm>
+            <a:off x="576000" y="5364000"/>
+            <a:ext cx="11052000" cy="864000"/>
+          </a:xfrm>
+          <a:prstGeom prst="roundRect">
+            <a:avLst>
+              <a:gd name="adj" fmla="val 6000"/>
+            </a:avLst>
+          </a:prstGeom>
+          <a:solidFill>
+            <a:srgbClr val="111111"/>
+          </a:solidFill>
+          <a:ln>
+            <a:noFill/>
+          </a:ln>
+          <a:effectLst/>
+        </p:spPr>
+        <p:style>
+          <a:lnRef idx="1">
+            <a:schemeClr val="accent1"/>
+          </a:lnRef>
+          <a:fillRef idx="3">
+            <a:schemeClr val="accent1"/>
+          </a:fillRef>
+          <a:effectRef idx="2">
+            <a:schemeClr val="accent1"/>
+          </a:effectRef>
+          <a:fontRef idx="minor">
+            <a:schemeClr val="lt1"/>
+          </a:fontRef>
+        </p:style>
+        <p:txBody>
+          <a:bodyPr rtlCol="0" anchor="ctr"/>
+          <a:lstStyle/>
+          <a:p>
+            <a:pPr algn="ctr"/>
+          </a:p>
+        </p:txBody>
+      </p:sp>
+      <p:pic>
+        <p:nvPicPr>
+          <p:cNvPr id="31" name="Picture 30" descr="target-arrow_or.png"/>
+          <p:cNvPicPr>
+            <a:picLocks noChangeAspect="1"/>
+          </p:cNvPicPr>
+          <p:nvPr/>
+        </p:nvPicPr>
+        <p:blipFill>
+          <a:blip r:embed="rId7"/>
+          <a:stretch>
+            <a:fillRect/>
+          </a:stretch>
+        </p:blipFill>
+        <p:spPr>
+          <a:xfrm>
+            <a:off x="792000" y="5544000"/>
+            <a:ext cx="503999" cy="503999"/>
+          </a:xfrm>
+          <a:prstGeom prst="rect">
+            <a:avLst/>
+          </a:prstGeom>
+        </p:spPr>
+      </p:pic>
+      <p:sp>
+        <p:nvSpPr>
+          <p:cNvPr id="32" name="TextBox 31"/>
+          <p:cNvSpPr txBox="1"/>
+          <p:nvPr/>
+        </p:nvSpPr>
+        <p:spPr>
+          <a:xfrm>
+            <a:off x="1440000" y="5364000"/>
+            <a:ext cx="10008000" cy="864000"/>
+          </a:xfrm>
+          <a:prstGeom prst="rect">
+            <a:avLst/>
+          </a:prstGeom>
+          <a:noFill/>
+        </p:spPr>
+        <p:txBody>
+          <a:bodyPr wrap="square" lIns="36000" rIns="36000" tIns="18000" bIns="18000" anchor="ctr">
+            <a:spAutoFit/>
+          </a:bodyPr>
+          <a:lstStyle/>
+          <a:p>
+            <a:pPr algn="l">
+              <a:lnSpc>
+                <a:spcPct val="110000"/>
+              </a:lnSpc>
+            </a:pPr>
+            <a:r>
+              <a:rPr sz="1350" b="1">
+                <a:solidFill>
+                  <a:srgbClr val="FFFFFF"/>
+                </a:solidFill>
+                <a:latin typeface="Arial"/>
+              </a:rPr>
+              <a:t>Objectif proposé à 30 jours : passer de 3 à 10 réactions médianes par publication, et compter les commandes venues de Facebook.</a:t>
+            </a:r>
+          </a:p>
+        </p:txBody>
+      </p:sp>
+    </p:spTree>
+  </p:cSld>
+  <p:clrMapOvr>
+    <a:masterClrMapping/>
+  </p:clrMapOvr>
+</p:sld>
+</file>
+
+<file path=ppt/slides/slide23.xml><?xml version="1.0" encoding="utf-8"?>
+<p:sld xmlns:a="http://schemas.openxmlformats.org/drawingml/2006/main" xmlns:p="http://schemas.openxmlformats.org/presentationml/2006/main" xmlns:r="http://schemas.openxmlformats.org/officeDocument/2006/relationships">
+  <p:cSld>
+    <p:spTree>
+      <p:nvGrpSpPr>
+        <p:cNvPr id="1" name=""/>
+        <p:cNvGrpSpPr/>
+        <p:nvPr/>
+      </p:nvGrpSpPr>
+      <p:grpSpPr/>
+      <p:sp>
+        <p:nvSpPr>
+          <p:cNvPr id="2" name="Rectangle 1"/>
+          <p:cNvSpPr/>
+          <p:nvPr/>
+        </p:nvSpPr>
+        <p:spPr>
+          <a:xfrm>
+            <a:off x="0" y="0"/>
+            <a:ext cx="12192119" cy="6858000"/>
+          </a:xfrm>
+          <a:prstGeom prst="rect">
+            <a:avLst/>
+          </a:prstGeom>
+          <a:solidFill>
+            <a:srgbClr val="FFFFFF"/>
+          </a:solidFill>
+          <a:ln>
+            <a:noFill/>
+          </a:ln>
+          <a:effectLst/>
+        </p:spPr>
+        <p:style>
+          <a:lnRef idx="1">
+            <a:schemeClr val="accent1"/>
+          </a:lnRef>
+          <a:fillRef idx="3">
+            <a:schemeClr val="accent1"/>
+          </a:fillRef>
+          <a:effectRef idx="2">
+            <a:schemeClr val="accent1"/>
+          </a:effectRef>
+          <a:fontRef idx="minor">
+            <a:schemeClr val="lt1"/>
+          </a:fontRef>
+        </p:style>
+        <p:txBody>
+          <a:bodyPr rtlCol="0" anchor="ctr"/>
+          <a:lstStyle/>
+          <a:p>
+            <a:pPr algn="ctr"/>
+          </a:p>
+        </p:txBody>
+      </p:sp>
+      <p:sp>
+        <p:nvSpPr>
+          <p:cNvPr id="3" name="Rectangle 2"/>
+          <p:cNvSpPr/>
+          <p:nvPr/>
+        </p:nvSpPr>
+        <p:spPr>
+          <a:xfrm>
+            <a:off x="0" y="0"/>
+            <a:ext cx="180000" cy="6858000"/>
+          </a:xfrm>
+          <a:prstGeom prst="rect">
+            <a:avLst/>
+          </a:prstGeom>
+          <a:solidFill>
+            <a:srgbClr val="E84E0E"/>
+          </a:solidFill>
+          <a:ln>
+            <a:noFill/>
+          </a:ln>
+          <a:effectLst/>
+        </p:spPr>
+        <p:style>
+          <a:lnRef idx="1">
+            <a:schemeClr val="accent1"/>
+          </a:lnRef>
+          <a:fillRef idx="3">
+            <a:schemeClr val="accent1"/>
+          </a:fillRef>
+          <a:effectRef idx="2">
+            <a:schemeClr val="accent1"/>
+          </a:effectRef>
+          <a:fontRef idx="minor">
+            <a:schemeClr val="lt1"/>
+          </a:fontRef>
+        </p:style>
+        <p:txBody>
+          <a:bodyPr rtlCol="0" anchor="ctr"/>
+          <a:lstStyle/>
+          <a:p>
+            <a:pPr algn="ctr"/>
+          </a:p>
+        </p:txBody>
+      </p:sp>
+      <p:pic>
+        <p:nvPicPr>
+          <p:cNvPr id="4" name="Picture 3" descr="logo-taj-seul.png"/>
+          <p:cNvPicPr>
+            <a:picLocks noChangeAspect="1"/>
+          </p:cNvPicPr>
+          <p:nvPr/>
+        </p:nvPicPr>
+        <p:blipFill>
+          <a:blip r:embed="rId2"/>
+          <a:stretch>
+            <a:fillRect/>
+          </a:stretch>
+        </p:blipFill>
+        <p:spPr>
+          <a:xfrm>
+            <a:off x="10248119" y="283729"/>
+            <a:ext cx="1584000" cy="440539"/>
+          </a:xfrm>
+          <a:prstGeom prst="rect">
+            <a:avLst/>
+          </a:prstGeom>
+        </p:spPr>
+      </p:pic>
+      <p:sp>
+        <p:nvSpPr>
+          <p:cNvPr id="5" name="TextBox 4"/>
+          <p:cNvSpPr txBox="1"/>
+          <p:nvPr/>
+        </p:nvSpPr>
+        <p:spPr>
+          <a:xfrm>
+            <a:off x="576000" y="324000"/>
+            <a:ext cx="8640000" cy="288000"/>
+          </a:xfrm>
+          <a:prstGeom prst="rect">
+            <a:avLst/>
+          </a:prstGeom>
+          <a:noFill/>
+        </p:spPr>
+        <p:txBody>
+          <a:bodyPr wrap="square" lIns="36000" rIns="36000" tIns="18000" bIns="18000" anchor="t">
+            <a:spAutoFit/>
+          </a:bodyPr>
+          <a:lstStyle/>
+          <a:p>
+            <a:pPr algn="l">
+              <a:lnSpc>
+                <a:spcPct val="110000"/>
+              </a:lnSpc>
+            </a:pPr>
+            <a:r>
+              <a:rPr sz="1100" b="1">
+                <a:solidFill>
+                  <a:srgbClr val="E84E0E"/>
+                </a:solidFill>
+                <a:latin typeface="Arial"/>
+              </a:rPr>
+              <a:t>SUITE</a:t>
+            </a:r>
+          </a:p>
+        </p:txBody>
+      </p:sp>
+      <p:sp>
+        <p:nvSpPr>
+          <p:cNvPr id="6" name="TextBox 5"/>
+          <p:cNvSpPr txBox="1"/>
+          <p:nvPr/>
+        </p:nvSpPr>
+        <p:spPr>
+          <a:xfrm>
+            <a:off x="576000" y="576000"/>
+            <a:ext cx="9000000" cy="720000"/>
+          </a:xfrm>
+          <a:prstGeom prst="rect">
+            <a:avLst/>
+          </a:prstGeom>
+          <a:noFill/>
+        </p:spPr>
+        <p:txBody>
+          <a:bodyPr wrap="square" lIns="36000" rIns="36000" tIns="18000" bIns="18000" anchor="t">
+            <a:spAutoFit/>
+          </a:bodyPr>
+          <a:lstStyle/>
+          <a:p>
+            <a:pPr algn="l">
+              <a:lnSpc>
+                <a:spcPct val="110000"/>
+              </a:lnSpc>
+            </a:pPr>
+            <a:r>
+              <a:rPr sz="2600" b="1">
+                <a:solidFill>
+                  <a:srgbClr val="111111"/>
+                </a:solidFill>
+                <a:latin typeface="Arial"/>
+              </a:rPr>
+              <a:t>Ce qu’il nous faut pour aller plus loin</a:t>
+            </a:r>
+          </a:p>
+        </p:txBody>
+      </p:sp>
+      <p:sp>
+        <p:nvSpPr>
+          <p:cNvPr id="7" name="Rectangle 6"/>
+          <p:cNvSpPr/>
+          <p:nvPr/>
+        </p:nvSpPr>
+        <p:spPr>
+          <a:xfrm>
+            <a:off x="576000" y="1278000"/>
+            <a:ext cx="792000" cy="50400"/>
+          </a:xfrm>
+          <a:prstGeom prst="rect">
+            <a:avLst/>
+          </a:prstGeom>
+          <a:solidFill>
+            <a:srgbClr val="159641"/>
+          </a:solidFill>
+          <a:ln>
+            <a:noFill/>
+          </a:ln>
+          <a:effectLst/>
+        </p:spPr>
+        <p:style>
+          <a:lnRef idx="1">
+            <a:schemeClr val="accent1"/>
+          </a:lnRef>
+          <a:fillRef idx="3">
+            <a:schemeClr val="accent1"/>
+          </a:fillRef>
+          <a:effectRef idx="2">
+            <a:schemeClr val="accent1"/>
+          </a:effectRef>
+          <a:fontRef idx="minor">
+            <a:schemeClr val="lt1"/>
+          </a:fontRef>
+        </p:style>
+        <p:txBody>
+          <a:bodyPr rtlCol="0" anchor="ctr"/>
+          <a:lstStyle/>
+          <a:p>
+            <a:pPr algn="ctr"/>
+          </a:p>
+        </p:txBody>
+      </p:sp>
+      <p:sp>
+        <p:nvSpPr>
+          <p:cNvPr id="8" name="TextBox 7"/>
+          <p:cNvSpPr txBox="1"/>
+          <p:nvPr/>
+        </p:nvSpPr>
+        <p:spPr>
+          <a:xfrm>
+            <a:off x="10572119" y="6498000"/>
+            <a:ext cx="1296000" cy="216000"/>
+          </a:xfrm>
+          <a:prstGeom prst="rect">
+            <a:avLst/>
+          </a:prstGeom>
+          <a:noFill/>
+        </p:spPr>
+        <p:txBody>
+          <a:bodyPr wrap="square" lIns="36000" rIns="36000" tIns="18000" bIns="18000" anchor="t">
+            <a:spAutoFit/>
+          </a:bodyPr>
+          <a:lstStyle/>
+          <a:p>
+            <a:pPr algn="r">
+              <a:lnSpc>
+                <a:spcPct val="110000"/>
+              </a:lnSpc>
+            </a:pPr>
+            <a:r>
+              <a:rPr sz="900" b="0">
+                <a:solidFill>
+                  <a:srgbClr val="5A5A5A"/>
+                </a:solidFill>
+                <a:latin typeface="Arial"/>
+              </a:rPr>
+              <a:t>23 / 23</a:t>
+            </a:r>
+          </a:p>
+        </p:txBody>
+      </p:sp>
+      <p:sp>
+        <p:nvSpPr>
+          <p:cNvPr id="9" name="TextBox 8"/>
+          <p:cNvSpPr txBox="1"/>
+          <p:nvPr/>
+        </p:nvSpPr>
+        <p:spPr>
+          <a:xfrm>
+            <a:off x="576000" y="6498000"/>
+            <a:ext cx="7200000" cy="216000"/>
+          </a:xfrm>
+          <a:prstGeom prst="rect">
+            <a:avLst/>
+          </a:prstGeom>
+          <a:noFill/>
+        </p:spPr>
+        <p:txBody>
+          <a:bodyPr wrap="square" lIns="36000" rIns="36000" tIns="18000" bIns="18000" anchor="t">
+            <a:spAutoFit/>
+          </a:bodyPr>
+          <a:lstStyle/>
+          <a:p>
+            <a:pPr algn="l">
+              <a:lnSpc>
+                <a:spcPct val="110000"/>
+              </a:lnSpc>
+            </a:pPr>
+            <a:r>
+              <a:rPr sz="900" b="0">
+                <a:solidFill>
+                  <a:srgbClr val="5A5A5A"/>
+                </a:solidFill>
+                <a:latin typeface="Arial"/>
+              </a:rPr>
+              <a:t>TAJ PLAST · Audit réseaux sociaux · relevé du 27/10/2026</a:t>
+            </a:r>
+          </a:p>
+        </p:txBody>
+      </p:sp>
+      <p:sp>
+        <p:nvSpPr>
+          <p:cNvPr id="10" name="Rounded Rectangle 9"/>
+          <p:cNvSpPr/>
+          <p:nvPr/>
+        </p:nvSpPr>
+        <p:spPr>
+          <a:xfrm>
+            <a:off x="576000" y="1655999"/>
+            <a:ext cx="3528000" cy="3420000"/>
+          </a:xfrm>
+          <a:prstGeom prst="roundRect">
+            <a:avLst>
+              <a:gd name="adj" fmla="val 6000"/>
+            </a:avLst>
+          </a:prstGeom>
+          <a:solidFill>
+            <a:srgbClr val="F4F4F2"/>
+          </a:solidFill>
+          <a:ln>
+            <a:noFill/>
+          </a:ln>
+          <a:effectLst/>
+        </p:spPr>
+        <p:style>
+          <a:lnRef idx="1">
+            <a:schemeClr val="accent1"/>
+          </a:lnRef>
+          <a:fillRef idx="3">
+            <a:schemeClr val="accent1"/>
+          </a:fillRef>
+          <a:effectRef idx="2">
+            <a:schemeClr val="accent1"/>
+          </a:effectRef>
+          <a:fontRef idx="minor">
+            <a:schemeClr val="lt1"/>
+          </a:fontRef>
+        </p:style>
+        <p:txBody>
+          <a:bodyPr rtlCol="0" anchor="ctr"/>
+          <a:lstStyle/>
+          <a:p>
+            <a:pPr algn="ctr"/>
+          </a:p>
+        </p:txBody>
+      </p:sp>
+      <p:sp>
+        <p:nvSpPr>
+          <p:cNvPr id="11" name="Oval 10"/>
+          <p:cNvSpPr/>
+          <p:nvPr/>
+        </p:nvSpPr>
+        <p:spPr>
+          <a:xfrm>
+            <a:off x="864000" y="1944000"/>
+            <a:ext cx="792000" cy="792000"/>
+          </a:xfrm>
+          <a:prstGeom prst="ellipse">
+            <a:avLst/>
+          </a:prstGeom>
+          <a:solidFill>
+            <a:srgbClr val="E84E0E"/>
+          </a:solidFill>
+          <a:ln>
+            <a:noFill/>
+          </a:ln>
+          <a:effectLst/>
+        </p:spPr>
+        <p:style>
+          <a:lnRef idx="1">
+            <a:schemeClr val="accent1"/>
+          </a:lnRef>
+          <a:fillRef idx="3">
+            <a:schemeClr val="accent1"/>
+          </a:fillRef>
+          <a:effectRef idx="2">
+            <a:schemeClr val="accent1"/>
+          </a:effectRef>
+          <a:fontRef idx="minor">
+            <a:schemeClr val="lt1"/>
+          </a:fontRef>
+        </p:style>
+        <p:txBody>
+          <a:bodyPr rtlCol="0" anchor="ctr"/>
+          <a:lstStyle/>
+          <a:p>
+            <a:pPr algn="ctr"/>
+          </a:p>
+        </p:txBody>
+      </p:sp>
+      <p:pic>
+        <p:nvPicPr>
+          <p:cNvPr id="12" name="Picture 11" descr="eye_bl.png"/>
+          <p:cNvPicPr>
+            <a:picLocks noChangeAspect="1"/>
+          </p:cNvPicPr>
+          <p:nvPr/>
+        </p:nvPicPr>
+        <p:blipFill>
+          <a:blip r:embed="rId3"/>
+          <a:stretch>
+            <a:fillRect/>
+          </a:stretch>
+        </p:blipFill>
+        <p:spPr>
+          <a:xfrm>
+            <a:off x="1038240" y="2118240"/>
+            <a:ext cx="443520" cy="443520"/>
+          </a:xfrm>
+          <a:prstGeom prst="rect">
+            <a:avLst/>
+          </a:prstGeom>
+        </p:spPr>
+      </p:pic>
+      <p:sp>
+        <p:nvSpPr>
+          <p:cNvPr id="13" name="TextBox 12"/>
+          <p:cNvSpPr txBox="1"/>
+          <p:nvPr/>
+        </p:nvSpPr>
+        <p:spPr>
+          <a:xfrm>
+            <a:off x="864000" y="2951999"/>
+            <a:ext cx="3024000" cy="432000"/>
+          </a:xfrm>
+          <a:prstGeom prst="rect">
+            <a:avLst/>
+          </a:prstGeom>
+          <a:noFill/>
+        </p:spPr>
+        <p:txBody>
+          <a:bodyPr wrap="square" lIns="36000" rIns="36000" tIns="18000" bIns="18000" anchor="t">
+            <a:spAutoFit/>
+          </a:bodyPr>
+          <a:lstStyle/>
+          <a:p>
+            <a:pPr algn="l">
+              <a:lnSpc>
+                <a:spcPct val="110000"/>
+              </a:lnSpc>
+            </a:pPr>
+            <a:r>
+              <a:rPr sz="1700" b="1">
+                <a:solidFill>
+                  <a:srgbClr val="111111"/>
+                </a:solidFill>
+                <a:latin typeface="Arial"/>
+              </a:rPr>
+              <a:t>L’accès aux comptes</a:t>
+            </a:r>
+          </a:p>
+        </p:txBody>
+      </p:sp>
+      <p:sp>
+        <p:nvSpPr>
+          <p:cNvPr id="14" name="TextBox 13"/>
+          <p:cNvSpPr txBox="1"/>
+          <p:nvPr/>
+        </p:nvSpPr>
+        <p:spPr>
+          <a:xfrm>
+            <a:off x="864000" y="3456000"/>
+            <a:ext cx="3024000" cy="1440000"/>
+          </a:xfrm>
+          <a:prstGeom prst="rect">
+            <a:avLst/>
+          </a:prstGeom>
+          <a:noFill/>
+        </p:spPr>
+        <p:txBody>
+          <a:bodyPr wrap="square" lIns="36000" rIns="36000" tIns="18000" bIns="18000" anchor="t">
+            <a:spAutoFit/>
+          </a:bodyPr>
+          <a:lstStyle/>
+          <a:p>
+            <a:pPr algn="l">
+              <a:lnSpc>
+                <a:spcPct val="110000"/>
+              </a:lnSpc>
+            </a:pPr>
+            <a:r>
+              <a:rPr sz="1300" b="0">
+                <a:solidFill>
+                  <a:srgbClr val="5A5A5A"/>
+                </a:solidFill>
+                <a:latin typeface="Arial"/>
+              </a:rPr>
+              <a:t>Portée, clics et messages reçus : pour mesurer les ventes, pas seulement les réactions.</a:t>
+            </a:r>
+          </a:p>
+        </p:txBody>
+      </p:sp>
+      <p:sp>
+        <p:nvSpPr>
+          <p:cNvPr id="15" name="Rounded Rectangle 14"/>
+          <p:cNvSpPr/>
+          <p:nvPr/>
+        </p:nvSpPr>
+        <p:spPr>
+          <a:xfrm>
+            <a:off x="4320000" y="1655999"/>
+            <a:ext cx="3528000" cy="3420000"/>
+          </a:xfrm>
+          <a:prstGeom prst="roundRect">
+            <a:avLst>
+              <a:gd name="adj" fmla="val 6000"/>
+            </a:avLst>
+          </a:prstGeom>
+          <a:solidFill>
+            <a:srgbClr val="F4F4F2"/>
+          </a:solidFill>
+          <a:ln>
+            <a:noFill/>
+          </a:ln>
+          <a:effectLst/>
+        </p:spPr>
+        <p:style>
+          <a:lnRef idx="1">
+            <a:schemeClr val="accent1"/>
+          </a:lnRef>
+          <a:fillRef idx="3">
+            <a:schemeClr val="accent1"/>
+          </a:fillRef>
+          <a:effectRef idx="2">
+            <a:schemeClr val="accent1"/>
+          </a:effectRef>
+          <a:fontRef idx="minor">
+            <a:schemeClr val="lt1"/>
+          </a:fontRef>
+        </p:style>
+        <p:txBody>
+          <a:bodyPr rtlCol="0" anchor="ctr"/>
+          <a:lstStyle/>
+          <a:p>
+            <a:pPr algn="ctr"/>
+          </a:p>
+        </p:txBody>
+      </p:sp>
+      <p:sp>
+        <p:nvSpPr>
+          <p:cNvPr id="16" name="Oval 15"/>
+          <p:cNvSpPr/>
+          <p:nvPr/>
+        </p:nvSpPr>
+        <p:spPr>
+          <a:xfrm>
+            <a:off x="4608000" y="1944000"/>
+            <a:ext cx="792000" cy="792000"/>
+          </a:xfrm>
+          <a:prstGeom prst="ellipse">
+            <a:avLst/>
+          </a:prstGeom>
+          <a:solidFill>
+            <a:srgbClr val="E84E0E"/>
+          </a:solidFill>
+          <a:ln>
+            <a:noFill/>
+          </a:ln>
+          <a:effectLst/>
+        </p:spPr>
+        <p:style>
+          <a:lnRef idx="1">
+            <a:schemeClr val="accent1"/>
+          </a:lnRef>
+          <a:fillRef idx="3">
+            <a:schemeClr val="accent1"/>
+          </a:fillRef>
+          <a:effectRef idx="2">
+            <a:schemeClr val="accent1"/>
+          </a:effectRef>
+          <a:fontRef idx="minor">
+            <a:schemeClr val="lt1"/>
+          </a:fontRef>
+        </p:style>
+        <p:txBody>
+          <a:bodyPr rtlCol="0" anchor="ctr"/>
+          <a:lstStyle/>
+          <a:p>
+            <a:pPr algn="ctr"/>
+          </a:p>
+        </p:txBody>
+      </p:sp>
+      <p:pic>
+        <p:nvPicPr>
+          <p:cNvPr id="17" name="Picture 16" descr="currency-dollar_bl.png"/>
+          <p:cNvPicPr>
+            <a:picLocks noChangeAspect="1"/>
+          </p:cNvPicPr>
+          <p:nvPr/>
+        </p:nvPicPr>
+        <p:blipFill>
+          <a:blip r:embed="rId4"/>
+          <a:stretch>
+            <a:fillRect/>
+          </a:stretch>
+        </p:blipFill>
+        <p:spPr>
+          <a:xfrm>
+            <a:off x="4782240" y="2118240"/>
+            <a:ext cx="443520" cy="443520"/>
+          </a:xfrm>
+          <a:prstGeom prst="rect">
+            <a:avLst/>
+          </a:prstGeom>
+        </p:spPr>
+      </p:pic>
+      <p:sp>
+        <p:nvSpPr>
+          <p:cNvPr id="18" name="TextBox 17"/>
+          <p:cNvSpPr txBox="1"/>
+          <p:nvPr/>
+        </p:nvSpPr>
+        <p:spPr>
+          <a:xfrm>
+            <a:off x="4608000" y="2951999"/>
+            <a:ext cx="3024000" cy="432000"/>
+          </a:xfrm>
+          <a:prstGeom prst="rect">
+            <a:avLst/>
+          </a:prstGeom>
+          <a:noFill/>
+        </p:spPr>
+        <p:txBody>
+          <a:bodyPr wrap="square" lIns="36000" rIns="36000" tIns="18000" bIns="18000" anchor="t">
+            <a:spAutoFit/>
+          </a:bodyPr>
+          <a:lstStyle/>
+          <a:p>
+            <a:pPr algn="l">
+              <a:lnSpc>
+                <a:spcPct val="110000"/>
+              </a:lnSpc>
+            </a:pPr>
+            <a:r>
+              <a:rPr sz="1700" b="1">
+                <a:solidFill>
+                  <a:srgbClr val="111111"/>
+                </a:solidFill>
+                <a:latin typeface="Arial"/>
+              </a:rPr>
+              <a:t>Prix et délais</a:t>
+            </a:r>
+          </a:p>
+        </p:txBody>
+      </p:sp>
+      <p:sp>
+        <p:nvSpPr>
+          <p:cNvPr id="19" name="TextBox 18"/>
+          <p:cNvSpPr txBox="1"/>
+          <p:nvPr/>
+        </p:nvSpPr>
+        <p:spPr>
+          <a:xfrm>
+            <a:off x="4608000" y="3456000"/>
+            <a:ext cx="3024000" cy="1440000"/>
+          </a:xfrm>
+          <a:prstGeom prst="rect">
+            <a:avLst/>
+          </a:prstGeom>
+          <a:noFill/>
+        </p:spPr>
+        <p:txBody>
+          <a:bodyPr wrap="square" lIns="36000" rIns="36000" tIns="18000" bIns="18000" anchor="t">
+            <a:spAutoFit/>
+          </a:bodyPr>
+          <a:lstStyle/>
+          <a:p>
+            <a:pPr algn="l">
+              <a:lnSpc>
+                <a:spcPct val="110000"/>
+              </a:lnSpc>
+            </a:pPr>
+            <a:r>
+              <a:rPr sz="1300" b="0">
+                <a:solidFill>
+                  <a:srgbClr val="5A5A5A"/>
+                </a:solidFill>
+                <a:latin typeface="Arial"/>
+              </a:rPr>
+              <a:t>Pour écrire des offres datées sur les produits phares.</a:t>
+            </a:r>
+          </a:p>
+        </p:txBody>
+      </p:sp>
+      <p:sp>
+        <p:nvSpPr>
+          <p:cNvPr id="20" name="Rounded Rectangle 19"/>
+          <p:cNvSpPr/>
+          <p:nvPr/>
+        </p:nvSpPr>
+        <p:spPr>
+          <a:xfrm>
+            <a:off x="8064000" y="1655999"/>
+            <a:ext cx="3528000" cy="3420000"/>
+          </a:xfrm>
+          <a:prstGeom prst="roundRect">
+            <a:avLst>
+              <a:gd name="adj" fmla="val 6000"/>
+            </a:avLst>
+          </a:prstGeom>
+          <a:solidFill>
+            <a:srgbClr val="F4F4F2"/>
+          </a:solidFill>
+          <a:ln>
+            <a:noFill/>
+          </a:ln>
+          <a:effectLst/>
+        </p:spPr>
+        <p:style>
+          <a:lnRef idx="1">
+            <a:schemeClr val="accent1"/>
+          </a:lnRef>
+          <a:fillRef idx="3">
+            <a:schemeClr val="accent1"/>
+          </a:fillRef>
+          <a:effectRef idx="2">
+            <a:schemeClr val="accent1"/>
+          </a:effectRef>
+          <a:fontRef idx="minor">
+            <a:schemeClr val="lt1"/>
+          </a:fontRef>
+        </p:style>
+        <p:txBody>
+          <a:bodyPr rtlCol="0" anchor="ctr"/>
+          <a:lstStyle/>
+          <a:p>
+            <a:pPr algn="ctr"/>
+          </a:p>
+        </p:txBody>
+      </p:sp>
+      <p:sp>
+        <p:nvSpPr>
+          <p:cNvPr id="21" name="Oval 20"/>
+          <p:cNvSpPr/>
+          <p:nvPr/>
+        </p:nvSpPr>
+        <p:spPr>
+          <a:xfrm>
+            <a:off x="8352000" y="1944000"/>
+            <a:ext cx="792000" cy="792000"/>
+          </a:xfrm>
+          <a:prstGeom prst="ellipse">
+            <a:avLst/>
+          </a:prstGeom>
+          <a:solidFill>
+            <a:srgbClr val="159641"/>
+          </a:solidFill>
+          <a:ln>
+            <a:noFill/>
+          </a:ln>
+          <a:effectLst/>
+        </p:spPr>
+        <p:style>
+          <a:lnRef idx="1">
+            <a:schemeClr val="accent1"/>
+          </a:lnRef>
+          <a:fillRef idx="3">
+            <a:schemeClr val="accent1"/>
+          </a:fillRef>
+          <a:effectRef idx="2">
+            <a:schemeClr val="accent1"/>
+          </a:effectRef>
+          <a:fontRef idx="minor">
+            <a:schemeClr val="lt1"/>
+          </a:fontRef>
+        </p:style>
+        <p:txBody>
+          <a:bodyPr rtlCol="0" anchor="ctr"/>
+          <a:lstStyle/>
+          <a:p>
+            <a:pPr algn="ctr"/>
+          </a:p>
+        </p:txBody>
+      </p:sp>
+      <p:pic>
+        <p:nvPicPr>
+          <p:cNvPr id="22" name="Picture 21" descr="circle-check_bl.png"/>
+          <p:cNvPicPr>
+            <a:picLocks noChangeAspect="1"/>
+          </p:cNvPicPr>
+          <p:nvPr/>
+        </p:nvPicPr>
+        <p:blipFill>
+          <a:blip r:embed="rId5"/>
+          <a:stretch>
+            <a:fillRect/>
+          </a:stretch>
+        </p:blipFill>
+        <p:spPr>
+          <a:xfrm>
+            <a:off x="8526240" y="2118240"/>
+            <a:ext cx="443520" cy="443520"/>
+          </a:xfrm>
+          <a:prstGeom prst="rect">
+            <a:avLst/>
+          </a:prstGeom>
+        </p:spPr>
+      </p:pic>
+      <p:sp>
+        <p:nvSpPr>
+          <p:cNvPr id="23" name="TextBox 22"/>
+          <p:cNvSpPr txBox="1"/>
+          <p:nvPr/>
+        </p:nvSpPr>
+        <p:spPr>
+          <a:xfrm>
+            <a:off x="8352000" y="2951999"/>
+            <a:ext cx="3024000" cy="432000"/>
+          </a:xfrm>
+          <a:prstGeom prst="rect">
+            <a:avLst/>
+          </a:prstGeom>
+          <a:noFill/>
+        </p:spPr>
+        <p:txBody>
+          <a:bodyPr wrap="square" lIns="36000" rIns="36000" tIns="18000" bIns="18000" anchor="t">
+            <a:spAutoFit/>
+          </a:bodyPr>
+          <a:lstStyle/>
+          <a:p>
+            <a:pPr algn="l">
+              <a:lnSpc>
+                <a:spcPct val="110000"/>
+              </a:lnSpc>
+            </a:pPr>
+            <a:r>
+              <a:rPr sz="1700" b="1">
+                <a:solidFill>
+                  <a:srgbClr val="111111"/>
+                </a:solidFill>
+                <a:latin typeface="Arial"/>
+              </a:rPr>
+              <a:t>Votre accord</a:t>
+            </a:r>
+          </a:p>
+        </p:txBody>
+      </p:sp>
+      <p:sp>
+        <p:nvSpPr>
+          <p:cNvPr id="24" name="TextBox 23"/>
+          <p:cNvSpPr txBox="1"/>
+          <p:nvPr/>
+        </p:nvSpPr>
+        <p:spPr>
+          <a:xfrm>
+            <a:off x="8352000" y="3456000"/>
+            <a:ext cx="3024000" cy="1440000"/>
+          </a:xfrm>
+          <a:prstGeom prst="rect">
+            <a:avLst/>
+          </a:prstGeom>
+          <a:noFill/>
+        </p:spPr>
+        <p:txBody>
+          <a:bodyPr wrap="square" lIns="36000" rIns="36000" tIns="18000" bIns="18000" anchor="t">
+            <a:spAutoFit/>
+          </a:bodyPr>
+          <a:lstStyle/>
+          <a:p>
+            <a:pPr algn="l">
+              <a:lnSpc>
+                <a:spcPct val="110000"/>
+              </a:lnSpc>
+            </a:pPr>
+            <a:r>
+              <a:rPr sz="1300" b="0">
+                <a:solidFill>
+                  <a:srgbClr val="5A5A5A"/>
+                </a:solidFill>
+                <a:latin typeface="Arial"/>
+              </a:rPr>
+              <a:t>Sur les 6 publications refaites, avant toute mise en ligne.</a:t>
+            </a:r>
+          </a:p>
+        </p:txBody>
+      </p:sp>
+      <p:sp>
+        <p:nvSpPr>
+          <p:cNvPr id="25" name="TextBox 24"/>
+          <p:cNvSpPr txBox="1"/>
+          <p:nvPr/>
+        </p:nvSpPr>
+        <p:spPr>
+          <a:xfrm>
+            <a:off x="576000" y="5400000"/>
+            <a:ext cx="11052000" cy="720000"/>
+          </a:xfrm>
+          <a:prstGeom prst="rect">
+            <a:avLst/>
+          </a:prstGeom>
+          <a:noFill/>
+        </p:spPr>
+        <p:txBody>
+          <a:bodyPr wrap="square" lIns="36000" rIns="36000" tIns="18000" bIns="18000" anchor="t">
+            <a:spAutoFit/>
+          </a:bodyPr>
+          <a:lstStyle/>
+          <a:p>
+            <a:pPr algn="l">
+              <a:lnSpc>
+                <a:spcPct val="110000"/>
+              </a:lnSpc>
+            </a:pPr>
+            <a:r>
+              <a:rPr sz="1200" b="0">
+                <a:solidFill>
+                  <a:srgbClr val="5A5A5A"/>
+                </a:solidFill>
+                <a:latin typeface="Arial"/>
+              </a:rPr>
+              <a:t>Rien n’a été publié. Les visuels « après » reprennent vos propres images et vos coordonnées.</a:t>
             </a:r>
           </a:p>
         </p:txBody>
@@ -16634,7 +19758,7 @@
                 </a:solidFill>
                 <a:latin typeface="Arial"/>
               </a:rPr>
-              <a:t>3 / 19</a:t>
+              <a:t>3 / 23</a:t>
             </a:r>
           </a:p>
         </p:txBody>
@@ -17732,7 +20856,7 @@
                 </a:solidFill>
                 <a:latin typeface="Arial"/>
               </a:rPr>
-              <a:t>4 / 19</a:t>
+              <a:t>4 / 23</a:t>
             </a:r>
           </a:p>
         </p:txBody>
@@ -18924,7 +22048,7 @@
                 </a:solidFill>
                 <a:latin typeface="Arial"/>
               </a:rPr>
-              <a:t>5 / 19</a:t>
+              <a:t>5 / 23</a:t>
             </a:r>
           </a:p>
         </p:txBody>
@@ -19995,7 +23119,7 @@
                 </a:solidFill>
                 <a:latin typeface="Arial"/>
               </a:rPr>
-              <a:t>6 / 19</a:t>
+              <a:t>6 / 23</a:t>
             </a:r>
           </a:p>
         </p:txBody>
@@ -21339,7 +24463,7 @@
                 </a:solidFill>
                 <a:latin typeface="Arial"/>
               </a:rPr>
-              <a:t>7 / 19</a:t>
+              <a:t>7 / 23</a:t>
             </a:r>
           </a:p>
         </p:txBody>
@@ -22392,7 +25516,7 @@
                 </a:solidFill>
                 <a:latin typeface="Arial"/>
               </a:rPr>
-              <a:t>8 / 19</a:t>
+              <a:t>8 / 23</a:t>
             </a:r>
           </a:p>
         </p:txBody>
@@ -24367,7 +27491,7 @@
                 </a:solidFill>
                 <a:latin typeface="Arial"/>
               </a:rPr>
-              <a:t>9 / 19</a:t>
+              <a:t>9 / 23</a:t>
             </a:r>
           </a:p>
         </p:txBody>
